--- a/ppt/KasireddyVadicherla_X25104047_bridge-structural-health.pptx
+++ b/ppt/KasireddyVadicherla_X25104047_bridge-structural-health.pptx
@@ -1150,20 +1150,20 @@
         </p:nvSpPr>
         <p:spPr>
           <a:xfrm>
-            <a:off x="640080" y="914400"/>
-            <a:ext cx="10972800" cy="1280160"/>
-          </a:xfrm>
-          <a:prstGeom prst="rect">
-            <a:avLst/>
-          </a:prstGeom>
-          <a:noFill/>
-          <a:ln/>
-        </p:spPr>
-        <p:txBody>
-          <a:bodyPr wrap="square" rtlCol="0" anchor="t"/>
-          <a:lstStyle/>
-          <a:p>
-            <a:pPr algn="l" indent="0" marL="0">
+            <a:off x="548640" y="1051560"/>
+            <a:ext cx="11064240" cy="1188720"/>
+          </a:xfrm>
+          <a:prstGeom prst="rect">
+            <a:avLst/>
+          </a:prstGeom>
+          <a:noFill/>
+          <a:ln/>
+        </p:spPr>
+        <p:txBody>
+          <a:bodyPr wrap="square" rtlCol="0" anchor="ctr"/>
+          <a:lstStyle/>
+          <a:p>
+            <a:pPr algn="ctr" indent="0" marL="0">
               <a:buNone/>
             </a:pPr>
             <a:r>
@@ -1189,8 +1189,8 @@
         </p:nvSpPr>
         <p:spPr>
           <a:xfrm>
-            <a:off x="658368" y="2148840"/>
-            <a:ext cx="10972800" cy="365760"/>
+            <a:off x="548640" y="2286000"/>
+            <a:ext cx="11064240" cy="365760"/>
           </a:xfrm>
           <a:prstGeom prst="rect">
             <a:avLst/>
@@ -1202,7 +1202,7 @@
           <a:bodyPr wrap="square" rtlCol="0" anchor="ctr"/>
           <a:lstStyle/>
           <a:p>
-            <a:pPr indent="0" marL="0">
+            <a:pPr algn="ctr" indent="0" marL="0">
               <a:buNone/>
             </a:pPr>
             <a:r>
@@ -1228,8 +1228,8 @@
         </p:nvSpPr>
         <p:spPr>
           <a:xfrm>
-            <a:off x="658368" y="2697480"/>
-            <a:ext cx="10424160" cy="1371600"/>
+            <a:off x="1463040" y="2926080"/>
+            <a:ext cx="9235440" cy="1371600"/>
           </a:xfrm>
           <a:prstGeom prst="rect">
             <a:avLst/>
@@ -1241,7 +1241,7 @@
           <a:bodyPr wrap="square" rtlCol="0" anchor="ctr"/>
           <a:lstStyle/>
           <a:p>
-            <a:pPr indent="0" marL="0">
+            <a:pPr algn="ctr" indent="0" marL="0">
               <a:lnSpc>
                 <a:spcPct val="110000"/>
               </a:lnSpc>
@@ -1270,7 +1270,7 @@
         </p:nvSpPr>
         <p:spPr>
           <a:xfrm>
-            <a:off x="658368" y="4206240"/>
+            <a:off x="1889608" y="4526280"/>
             <a:ext cx="2651760" cy="566928"/>
           </a:xfrm>
           <a:prstGeom prst="roundRect">
@@ -1297,7 +1297,7 @@
         </p:nvSpPr>
         <p:spPr>
           <a:xfrm>
-            <a:off x="658368" y="4206240"/>
+            <a:off x="1889608" y="4526280"/>
             <a:ext cx="2651760" cy="566928"/>
           </a:xfrm>
           <a:prstGeom prst="rect">
@@ -1314,7 +1314,7 @@
               <a:buNone/>
             </a:pPr>
             <a:r>
-              <a:rPr lang="en-US" sz="1400" b="1" dirty="0">
+              <a:rPr lang="en-US" sz="1350" b="1" dirty="0">
                 <a:solidFill>
                   <a:srgbClr val="E0A63C"/>
                 </a:solidFill>
@@ -1324,7 +1324,7 @@
               </a:rPr>
               <a:t>Years between inspections</a:t>
             </a:r>
-            <a:endParaRPr lang="en-US" sz="1400" dirty="0"/>
+            <a:endParaRPr lang="en-US" sz="1350" dirty="0"/>
           </a:p>
         </p:txBody>
       </p:sp>
@@ -1336,7 +1336,7 @@
         </p:nvSpPr>
         <p:spPr>
           <a:xfrm>
-            <a:off x="3538728" y="4206240"/>
+            <a:off x="4769968" y="4526280"/>
             <a:ext cx="2651760" cy="566928"/>
           </a:xfrm>
           <a:prstGeom prst="roundRect">
@@ -1363,7 +1363,7 @@
         </p:nvSpPr>
         <p:spPr>
           <a:xfrm>
-            <a:off x="3538728" y="4206240"/>
+            <a:off x="4769968" y="4526280"/>
             <a:ext cx="2651760" cy="566928"/>
           </a:xfrm>
           <a:prstGeom prst="rect">
@@ -1380,7 +1380,7 @@
               <a:buNone/>
             </a:pPr>
             <a:r>
-              <a:rPr lang="en-US" sz="1400" b="1" dirty="0">
+              <a:rPr lang="en-US" sz="1350" b="1" dirty="0">
                 <a:solidFill>
                   <a:srgbClr val="E0A63C"/>
                 </a:solidFill>
@@ -1390,7 +1390,7 @@
               </a:rPr>
               <a:t>24/7 strain accrues</a:t>
             </a:r>
-            <a:endParaRPr lang="en-US" sz="1400" dirty="0"/>
+            <a:endParaRPr lang="en-US" sz="1350" dirty="0"/>
           </a:p>
         </p:txBody>
       </p:sp>
@@ -1402,7 +1402,7 @@
         </p:nvSpPr>
         <p:spPr>
           <a:xfrm>
-            <a:off x="6419088" y="4206240"/>
+            <a:off x="7650328" y="4526280"/>
             <a:ext cx="2651760" cy="566928"/>
           </a:xfrm>
           <a:prstGeom prst="roundRect">
@@ -1429,7 +1429,7 @@
         </p:nvSpPr>
         <p:spPr>
           <a:xfrm>
-            <a:off x="6419088" y="4206240"/>
+            <a:off x="7650328" y="4526280"/>
             <a:ext cx="2651760" cy="566928"/>
           </a:xfrm>
           <a:prstGeom prst="rect">
@@ -1446,7 +1446,7 @@
               <a:buNone/>
             </a:pPr>
             <a:r>
-              <a:rPr lang="en-US" sz="1400" b="1" dirty="0">
+              <a:rPr lang="en-US" sz="1350" b="1" dirty="0">
                 <a:solidFill>
                   <a:srgbClr val="E0A63C"/>
                 </a:solidFill>
@@ -1456,7 +1456,7 @@
               </a:rPr>
               <a:t>0 visibility in the gap</a:t>
             </a:r>
-            <a:endParaRPr lang="en-US" sz="1400" dirty="0"/>
+            <a:endParaRPr lang="en-US" sz="1350" dirty="0"/>
           </a:p>
         </p:txBody>
       </p:sp>
@@ -1468,8 +1468,8 @@
         </p:nvSpPr>
         <p:spPr>
           <a:xfrm>
-            <a:off x="658368" y="6126480"/>
-            <a:ext cx="10972800" cy="365760"/>
+            <a:off x="548640" y="6126480"/>
+            <a:ext cx="11064240" cy="365760"/>
           </a:xfrm>
           <a:prstGeom prst="rect">
             <a:avLst/>
@@ -1481,7 +1481,7 @@
           <a:bodyPr wrap="square" rtlCol="0" anchor="ctr"/>
           <a:lstStyle/>
           <a:p>
-            <a:pPr indent="0" marL="0">
+            <a:pPr algn="ctr" indent="0" marL="0">
               <a:buNone/>
             </a:pPr>
             <a:r>
@@ -1605,8 +1605,8 @@
         </p:nvSpPr>
         <p:spPr>
           <a:xfrm>
-            <a:off x="1325880" y="2670048"/>
-            <a:ext cx="201168" cy="201168"/>
+            <a:off x="1335024" y="2633472"/>
+            <a:ext cx="182880" cy="182880"/>
           </a:xfrm>
           <a:prstGeom prst="ellipse">
             <a:avLst/>
@@ -1625,8 +1625,8 @@
         </p:nvSpPr>
         <p:spPr>
           <a:xfrm>
-            <a:off x="594360" y="2926080"/>
-            <a:ext cx="1664208" cy="411480"/>
+            <a:off x="612648" y="2852928"/>
+            <a:ext cx="1627632" cy="365760"/>
           </a:xfrm>
           <a:prstGeom prst="rect">
             <a:avLst/>
@@ -1664,8 +1664,8 @@
         </p:nvSpPr>
         <p:spPr>
           <a:xfrm>
-            <a:off x="621792" y="3310128"/>
-            <a:ext cx="1609344" cy="457200"/>
+            <a:off x="640080" y="3200400"/>
+            <a:ext cx="1572768" cy="411480"/>
           </a:xfrm>
           <a:prstGeom prst="rect">
             <a:avLst/>
@@ -1754,8 +1754,8 @@
         </p:nvSpPr>
         <p:spPr>
           <a:xfrm>
-            <a:off x="3193633" y="2670048"/>
-            <a:ext cx="201168" cy="201168"/>
+            <a:off x="3202777" y="2633472"/>
+            <a:ext cx="182880" cy="182880"/>
           </a:xfrm>
           <a:prstGeom prst="ellipse">
             <a:avLst/>
@@ -1774,8 +1774,8 @@
         </p:nvSpPr>
         <p:spPr>
           <a:xfrm>
-            <a:off x="2462113" y="2926080"/>
-            <a:ext cx="1664208" cy="411480"/>
+            <a:off x="2480401" y="2852928"/>
+            <a:ext cx="1627632" cy="365760"/>
           </a:xfrm>
           <a:prstGeom prst="rect">
             <a:avLst/>
@@ -1813,8 +1813,8 @@
         </p:nvSpPr>
         <p:spPr>
           <a:xfrm>
-            <a:off x="2489545" y="3310128"/>
-            <a:ext cx="1609344" cy="457200"/>
+            <a:off x="2507833" y="3200400"/>
+            <a:ext cx="1572768" cy="411480"/>
           </a:xfrm>
           <a:prstGeom prst="rect">
             <a:avLst/>
@@ -1903,8 +1903,8 @@
         </p:nvSpPr>
         <p:spPr>
           <a:xfrm>
-            <a:off x="5061387" y="2670048"/>
-            <a:ext cx="201168" cy="201168"/>
+            <a:off x="5070531" y="2633472"/>
+            <a:ext cx="182880" cy="182880"/>
           </a:xfrm>
           <a:prstGeom prst="ellipse">
             <a:avLst/>
@@ -1923,8 +1923,8 @@
         </p:nvSpPr>
         <p:spPr>
           <a:xfrm>
-            <a:off x="4329867" y="2926080"/>
-            <a:ext cx="1664208" cy="411480"/>
+            <a:off x="4348155" y="2852928"/>
+            <a:ext cx="1627632" cy="365760"/>
           </a:xfrm>
           <a:prstGeom prst="rect">
             <a:avLst/>
@@ -1962,8 +1962,8 @@
         </p:nvSpPr>
         <p:spPr>
           <a:xfrm>
-            <a:off x="4357299" y="3310128"/>
-            <a:ext cx="1609344" cy="457200"/>
+            <a:off x="4375587" y="3200400"/>
+            <a:ext cx="1572768" cy="411480"/>
           </a:xfrm>
           <a:prstGeom prst="rect">
             <a:avLst/>
@@ -2052,8 +2052,8 @@
         </p:nvSpPr>
         <p:spPr>
           <a:xfrm>
-            <a:off x="6929140" y="2670048"/>
-            <a:ext cx="201168" cy="201168"/>
+            <a:off x="6938284" y="2633472"/>
+            <a:ext cx="182880" cy="182880"/>
           </a:xfrm>
           <a:prstGeom prst="ellipse">
             <a:avLst/>
@@ -2072,8 +2072,8 @@
         </p:nvSpPr>
         <p:spPr>
           <a:xfrm>
-            <a:off x="6197620" y="2926080"/>
-            <a:ext cx="1664208" cy="411480"/>
+            <a:off x="6215908" y="2852928"/>
+            <a:ext cx="1627632" cy="365760"/>
           </a:xfrm>
           <a:prstGeom prst="rect">
             <a:avLst/>
@@ -2111,8 +2111,8 @@
         </p:nvSpPr>
         <p:spPr>
           <a:xfrm>
-            <a:off x="6225052" y="3310128"/>
-            <a:ext cx="1609344" cy="457200"/>
+            <a:off x="6243340" y="3200400"/>
+            <a:ext cx="1572768" cy="411480"/>
           </a:xfrm>
           <a:prstGeom prst="rect">
             <a:avLst/>
@@ -2201,8 +2201,8 @@
         </p:nvSpPr>
         <p:spPr>
           <a:xfrm>
-            <a:off x="8796894" y="2670048"/>
-            <a:ext cx="201168" cy="201168"/>
+            <a:off x="8806038" y="2633472"/>
+            <a:ext cx="182880" cy="182880"/>
           </a:xfrm>
           <a:prstGeom prst="ellipse">
             <a:avLst/>
@@ -2221,8 +2221,8 @@
         </p:nvSpPr>
         <p:spPr>
           <a:xfrm>
-            <a:off x="8065374" y="2926080"/>
-            <a:ext cx="1664208" cy="411480"/>
+            <a:off x="8083662" y="2852928"/>
+            <a:ext cx="1627632" cy="365760"/>
           </a:xfrm>
           <a:prstGeom prst="rect">
             <a:avLst/>
@@ -2260,8 +2260,8 @@
         </p:nvSpPr>
         <p:spPr>
           <a:xfrm>
-            <a:off x="8092806" y="3310128"/>
-            <a:ext cx="1609344" cy="457200"/>
+            <a:off x="8111094" y="3200400"/>
+            <a:ext cx="1572768" cy="411480"/>
           </a:xfrm>
           <a:prstGeom prst="rect">
             <a:avLst/>
@@ -2350,8 +2350,8 @@
         </p:nvSpPr>
         <p:spPr>
           <a:xfrm>
-            <a:off x="10664647" y="2670048"/>
-            <a:ext cx="201168" cy="201168"/>
+            <a:off x="10673791" y="2633472"/>
+            <a:ext cx="182880" cy="182880"/>
           </a:xfrm>
           <a:prstGeom prst="ellipse">
             <a:avLst/>
@@ -2370,8 +2370,8 @@
         </p:nvSpPr>
         <p:spPr>
           <a:xfrm>
-            <a:off x="9933127" y="2926080"/>
-            <a:ext cx="1664208" cy="411480"/>
+            <a:off x="9951415" y="2852928"/>
+            <a:ext cx="1627632" cy="365760"/>
           </a:xfrm>
           <a:prstGeom prst="rect">
             <a:avLst/>
@@ -2409,8 +2409,8 @@
         </p:nvSpPr>
         <p:spPr>
           <a:xfrm>
-            <a:off x="9960559" y="3310128"/>
-            <a:ext cx="1609344" cy="457200"/>
+            <a:off x="9978847" y="3200400"/>
+            <a:ext cx="1572768" cy="411480"/>
           </a:xfrm>
           <a:prstGeom prst="rect">
             <a:avLst/>
@@ -2526,8 +2526,8 @@
         </p:nvSpPr>
         <p:spPr>
           <a:xfrm>
-            <a:off x="640080" y="5212080"/>
-            <a:ext cx="10972800" cy="640080"/>
+            <a:off x="640080" y="5257800"/>
+            <a:ext cx="10972800" cy="731520"/>
           </a:xfrm>
           <a:prstGeom prst="rect">
             <a:avLst/>
@@ -2759,7 +2759,7 @@
                 <a:ea typeface="Calibri" pitchFamily="34" charset="-122"/>
                 <a:cs typeface="Calibri" pitchFamily="34" charset="-120"/>
               </a:rPr>
-              <a:t>Pipeline health, all green</a:t>
+              <a:t>A 0-to-100 integrity index per span</a:t>
             </a:r>
             <a:endParaRPr lang="en-US" sz="1800" dirty="0"/>
           </a:p>
@@ -2798,7 +2798,7 @@
                 <a:ea typeface="Calibri" pitchFamily="34" charset="-122"/>
                 <a:cs typeface="Calibri" pitchFamily="34" charset="-120"/>
               </a:rPr>
-              <a:t>Fog gateway, SQS queue, Lambda and data freshness all healthy on the live deployment.</a:t>
+              <a:t>The dashboard folds each span's strain average and peak vibration into one structural integrity index, live on read.</a:t>
             </a:r>
             <a:endParaRPr lang="en-US" sz="1350" dirty="0"/>
           </a:p>
@@ -2896,7 +2896,7 @@
                 <a:ea typeface="Calibri" pitchFamily="34" charset="-122"/>
                 <a:cs typeface="Calibri" pitchFamily="34" charset="-120"/>
               </a:rPr>
-              <a:t>Live integrity index</a:t>
+              <a:t>Two spans, tracked live</a:t>
             </a:r>
             <a:endParaRPr lang="en-US" sz="1800" dirty="0"/>
           </a:p>
@@ -2935,7 +2935,7 @@
                 <a:ea typeface="Calibri" pitchFamily="34" charset="-122"/>
                 <a:cs typeface="Calibri" pitchFamily="34" charset="-120"/>
               </a:rPr>
-              <a:t>Span A at 100 percent with no active alerts; Span B at 76.8 percent, good and tracking real readings.</a:t>
+              <a:t>Span-A reads 100 percent with no active alerts and Span-B reads 76.8 percent, good and tracking real readings.</a:t>
             </a:r>
             <a:endParaRPr lang="en-US" sz="1350" dirty="0"/>
           </a:p>
@@ -3033,7 +3033,7 @@
                 <a:ea typeface="Calibri" pitchFamily="34" charset="-122"/>
                 <a:cs typeface="Calibri" pitchFamily="34" charset="-120"/>
               </a:rPr>
-              <a:t>Tested and scales</a:t>
+              <a:t>The index reaches zero where an alert fires</a:t>
             </a:r>
             <a:endParaRPr lang="en-US" sz="1800" dirty="0"/>
           </a:p>
@@ -3072,7 +3072,7 @@
                 <a:ea typeface="Calibri" pitchFamily="34" charset="-122"/>
                 <a:cs typeface="Calibri" pitchFamily="34" charset="-120"/>
               </a:rPr>
-              <a:t>115 automated tests pass across fourteen suites — windowing, thresholds, pagination, batching and real-socket HTTP routing.</a:t>
+              <a:t>Its critical bound equals the alert threshold, so the number and the alarm agree by construction.</a:t>
             </a:r>
             <a:endParaRPr lang="en-US" sz="1350" dirty="0"/>
           </a:p>
@@ -3157,24 +3157,24 @@
         </p:nvSpPr>
         <p:spPr>
           <a:xfrm>
-            <a:off x="640080" y="640080"/>
-            <a:ext cx="10972800" cy="640080"/>
-          </a:xfrm>
-          <a:prstGeom prst="rect">
-            <a:avLst/>
-          </a:prstGeom>
-          <a:noFill/>
-          <a:ln/>
-        </p:spPr>
-        <p:txBody>
-          <a:bodyPr wrap="square" rtlCol="0" anchor="ctr"/>
+            <a:off x="640080" y="594360"/>
+            <a:ext cx="10972800" cy="822960"/>
+          </a:xfrm>
+          <a:prstGeom prst="rect">
+            <a:avLst/>
+          </a:prstGeom>
+          <a:noFill/>
+          <a:ln/>
+        </p:spPr>
+        <p:txBody>
+          <a:bodyPr wrap="square" rtlCol="0" anchor="t"/>
           <a:lstStyle/>
           <a:p>
             <a:pPr indent="0" marL="0">
               <a:buNone/>
             </a:pPr>
             <a:r>
-              <a:rPr lang="en-US" sz="3000" b="1" dirty="0">
+              <a:rPr lang="en-US" sz="2800" b="1" dirty="0">
                 <a:solidFill>
                   <a:srgbClr val="FFFFFF"/>
                 </a:solidFill>
@@ -3184,7 +3184,7 @@
               </a:rPr>
               <a:t>Hardest Part — one risky Terraform apply</a:t>
             </a:r>
-            <a:endParaRPr lang="en-US" sz="3000" dirty="0"/>
+            <a:endParaRPr lang="en-US" sz="2800" dirty="0"/>
           </a:p>
         </p:txBody>
       </p:sp>
@@ -3196,12 +3196,12 @@
         </p:nvSpPr>
         <p:spPr>
           <a:xfrm>
-            <a:off x="731520" y="1920240"/>
-            <a:ext cx="10698480" cy="1965960"/>
+            <a:off x="731520" y="1874520"/>
+            <a:ext cx="5212080" cy="4160520"/>
           </a:xfrm>
           <a:prstGeom prst="roundRect">
             <a:avLst>
-              <a:gd name="adj" fmla="val 4651"/>
+              <a:gd name="adj" fmla="val 2198"/>
             </a:avLst>
           </a:prstGeom>
           <a:solidFill>
@@ -3223,7 +3223,7 @@
         </p:nvSpPr>
         <p:spPr>
           <a:xfrm>
-            <a:off x="1005840" y="2103120"/>
+            <a:off x="1051560" y="2103120"/>
             <a:ext cx="3657600" cy="457200"/>
           </a:xfrm>
           <a:prstGeom prst="rect">
@@ -3262,8 +3262,8 @@
         </p:nvSpPr>
         <p:spPr>
           <a:xfrm>
-            <a:off x="1005840" y="2578608"/>
-            <a:ext cx="9966960" cy="1188720"/>
+            <a:off x="1051560" y="2651760"/>
+            <a:ext cx="4572000" cy="3200400"/>
           </a:xfrm>
           <a:prstGeom prst="rect">
             <a:avLst/>
@@ -3277,12 +3277,12 @@
           <a:p>
             <a:pPr indent="0" marL="0">
               <a:lnSpc>
-                <a:spcPct val="105000"/>
+                <a:spcPct val="110000"/>
               </a:lnSpc>
               <a:buNone/>
             </a:pPr>
             <a:r>
-              <a:rPr lang="en-US" sz="1300" dirty="0">
+              <a:rPr lang="en-US" sz="1350" dirty="0">
                 <a:solidFill>
                   <a:srgbClr val="D2DBE0"/>
                 </a:solidFill>
@@ -3292,7 +3292,7 @@
               </a:rPr>
               <a:t>Every project here deploys through one shared Terraform module, and its local state file already tracked a different live AWS stack under the default workspace. Nothing in my code was wrong — but applied against that workspace, Terraform reconciles state and plans to destroy the other deployment's live resources. The only warning is one line of plan output.</a:t>
             </a:r>
-            <a:endParaRPr lang="en-US" sz="1300" dirty="0"/>
+            <a:endParaRPr lang="en-US" sz="1350" dirty="0"/>
           </a:p>
         </p:txBody>
       </p:sp>
@@ -3304,12 +3304,12 @@
         </p:nvSpPr>
         <p:spPr>
           <a:xfrm>
-            <a:off x="731520" y="4041648"/>
-            <a:ext cx="10698480" cy="1965960"/>
+            <a:off x="6263640" y="1874520"/>
+            <a:ext cx="5212080" cy="4160520"/>
           </a:xfrm>
           <a:prstGeom prst="roundRect">
             <a:avLst>
-              <a:gd name="adj" fmla="val 4651"/>
+              <a:gd name="adj" fmla="val 2198"/>
             </a:avLst>
           </a:prstGeom>
           <a:solidFill>
@@ -3331,7 +3331,7 @@
         </p:nvSpPr>
         <p:spPr>
           <a:xfrm>
-            <a:off x="1005840" y="4224528"/>
+            <a:off x="6583680" y="2103120"/>
             <a:ext cx="3657600" cy="457200"/>
           </a:xfrm>
           <a:prstGeom prst="rect">
@@ -3370,8 +3370,8 @@
         </p:nvSpPr>
         <p:spPr>
           <a:xfrm>
-            <a:off x="1005840" y="4700016"/>
-            <a:ext cx="9966960" cy="1188720"/>
+            <a:off x="6583680" y="2651760"/>
+            <a:ext cx="4572000" cy="3200400"/>
           </a:xfrm>
           <a:prstGeom prst="rect">
             <a:avLst/>
@@ -3385,12 +3385,12 @@
           <a:p>
             <a:pPr indent="0" marL="0">
               <a:lnSpc>
-                <a:spcPct val="105000"/>
+                <a:spcPct val="110000"/>
               </a:lnSpc>
               <a:buNone/>
             </a:pPr>
             <a:r>
-              <a:rPr lang="en-US" sz="1300" dirty="0">
+              <a:rPr lang="en-US" sz="1350" dirty="0">
                 <a:solidFill>
                   <a:srgbClr val="D2DBE0"/>
                 </a:solidFill>
@@ -3400,7 +3400,7 @@
               </a:rPr>
               <a:t>A dedicated workspace was created first, and the re-plan read "24 to add, 0 to change, 0 to destroy"; then a single apply built all 24 resources, healthy within a minute. Never apply an unread plan. The same pre-deploy audit also caught two silent defects — a pagination undercount and unbatched publishing — both fixed and regression-tested before launch.</a:t>
             </a:r>
-            <a:endParaRPr lang="en-US" sz="1300" dirty="0"/>
+            <a:endParaRPr lang="en-US" sz="1350" dirty="0"/>
           </a:p>
         </p:txBody>
       </p:sp>

--- a/ppt/KasireddyVadicherla_X25104047_bridge-structural-health.pptx
+++ b/ppt/KasireddyVadicherla_X25104047_bridge-structural-health.pptx
@@ -3131,7 +3131,7 @@
     <p:bg>
       <p:bgPr>
         <a:solidFill>
-          <a:srgbClr val="1E2630"/>
+          <a:srgbClr val="FFFFFF"/>
         </a:solidFill>
       </p:bgPr>
     </p:bg>
@@ -3157,7 +3157,7 @@
         </p:nvSpPr>
         <p:spPr>
           <a:xfrm>
-            <a:off x="640080" y="594360"/>
+            <a:off x="640080" y="502920"/>
             <a:ext cx="10972800" cy="822960"/>
           </a:xfrm>
           <a:prstGeom prst="rect">
@@ -3176,7 +3176,7 @@
             <a:r>
               <a:rPr lang="en-US" sz="2800" b="1" dirty="0">
                 <a:solidFill>
-                  <a:srgbClr val="FFFFFF"/>
+                  <a:srgbClr val="1E262E"/>
                 </a:solidFill>
                 <a:latin typeface="Bookman Old Style" pitchFamily="34" charset="0"/>
                 <a:ea typeface="Bookman Old Style" pitchFamily="34" charset="-122"/>
@@ -3196,8 +3196,8 @@
         </p:nvSpPr>
         <p:spPr>
           <a:xfrm>
-            <a:off x="731520" y="1874520"/>
-            <a:ext cx="5212080" cy="4160520"/>
+            <a:off x="640080" y="1874520"/>
+            <a:ext cx="4937760" cy="4160520"/>
           </a:xfrm>
           <a:prstGeom prst="roundRect">
             <a:avLst>
@@ -3205,9 +3205,9 @@
             </a:avLst>
           </a:prstGeom>
           <a:solidFill>
-            <a:srgbClr val="2A343D"/>
-          </a:solidFill>
-          <a:ln w="15875">
+            <a:srgbClr val="EEF2F4"/>
+          </a:solidFill>
+          <a:ln w="19050">
             <a:solidFill>
               <a:srgbClr val="E0A63C"/>
             </a:solidFill>
@@ -3223,7 +3223,7 @@
         </p:nvSpPr>
         <p:spPr>
           <a:xfrm>
-            <a:off x="1051560" y="2103120"/>
+            <a:off x="960120" y="2103120"/>
             <a:ext cx="3657600" cy="457200"/>
           </a:xfrm>
           <a:prstGeom prst="rect">
@@ -3262,8 +3262,8 @@
         </p:nvSpPr>
         <p:spPr>
           <a:xfrm>
-            <a:off x="1051560" y="2651760"/>
-            <a:ext cx="4572000" cy="3200400"/>
+            <a:off x="960120" y="2651760"/>
+            <a:ext cx="4343400" cy="3200400"/>
           </a:xfrm>
           <a:prstGeom prst="rect">
             <a:avLst/>
@@ -3277,14 +3277,14 @@
           <a:p>
             <a:pPr indent="0" marL="0">
               <a:lnSpc>
-                <a:spcPct val="110000"/>
+                <a:spcPct val="112000"/>
               </a:lnSpc>
               <a:buNone/>
             </a:pPr>
             <a:r>
               <a:rPr lang="en-US" sz="1350" dirty="0">
                 <a:solidFill>
-                  <a:srgbClr val="D2DBE0"/>
+                  <a:srgbClr val="1E262E"/>
                 </a:solidFill>
                 <a:latin typeface="Calibri" pitchFamily="34" charset="0"/>
                 <a:ea typeface="Calibri" pitchFamily="34" charset="-122"/>
@@ -3304,8 +3304,8 @@
         </p:nvSpPr>
         <p:spPr>
           <a:xfrm>
-            <a:off x="6263640" y="1874520"/>
-            <a:ext cx="5212080" cy="4160520"/>
+            <a:off x="6611112" y="1874520"/>
+            <a:ext cx="4937760" cy="4160520"/>
           </a:xfrm>
           <a:prstGeom prst="roundRect">
             <a:avLst>
@@ -3313,11 +3313,11 @@
             </a:avLst>
           </a:prstGeom>
           <a:solidFill>
-            <a:srgbClr val="2A343D"/>
-          </a:solidFill>
-          <a:ln w="15875">
+            <a:srgbClr val="EEF2F4"/>
+          </a:solidFill>
+          <a:ln w="19050">
             <a:solidFill>
-              <a:srgbClr val="74899A"/>
+              <a:srgbClr val="4E6773"/>
             </a:solidFill>
             <a:prstDash val="solid"/>
           </a:ln>
@@ -3331,7 +3331,7 @@
         </p:nvSpPr>
         <p:spPr>
           <a:xfrm>
-            <a:off x="6583680" y="2103120"/>
+            <a:off x="6931152" y="2103120"/>
             <a:ext cx="3657600" cy="457200"/>
           </a:xfrm>
           <a:prstGeom prst="rect">
@@ -3350,7 +3350,7 @@
             <a:r>
               <a:rPr lang="en-US" sz="1900" b="1" dirty="0">
                 <a:solidFill>
-                  <a:srgbClr val="74899A"/>
+                  <a:srgbClr val="4E6773"/>
                 </a:solidFill>
                 <a:latin typeface="Bookman Old Style" pitchFamily="34" charset="0"/>
                 <a:ea typeface="Bookman Old Style" pitchFamily="34" charset="-122"/>
@@ -3370,8 +3370,8 @@
         </p:nvSpPr>
         <p:spPr>
           <a:xfrm>
-            <a:off x="6583680" y="2651760"/>
-            <a:ext cx="4572000" cy="3200400"/>
+            <a:off x="6931152" y="2651760"/>
+            <a:ext cx="4343400" cy="3200400"/>
           </a:xfrm>
           <a:prstGeom prst="rect">
             <a:avLst/>
@@ -3385,14 +3385,14 @@
           <a:p>
             <a:pPr indent="0" marL="0">
               <a:lnSpc>
-                <a:spcPct val="110000"/>
+                <a:spcPct val="112000"/>
               </a:lnSpc>
               <a:buNone/>
             </a:pPr>
             <a:r>
               <a:rPr lang="en-US" sz="1350" dirty="0">
                 <a:solidFill>
-                  <a:srgbClr val="D2DBE0"/>
+                  <a:srgbClr val="1E262E"/>
                 </a:solidFill>
                 <a:latin typeface="Calibri" pitchFamily="34" charset="0"/>
                 <a:ea typeface="Calibri" pitchFamily="34" charset="-122"/>
@@ -3403,6 +3403,26 @@
             <a:endParaRPr lang="en-US" sz="1350" dirty="0"/>
           </a:p>
         </p:txBody>
+      </p:sp>
+      <p:sp>
+        <p:nvSpPr>
+          <p:cNvPr id="9" name="Shape 7"/>
+          <p:cNvSpPr/>
+          <p:nvPr/>
+        </p:nvSpPr>
+        <p:spPr>
+          <a:xfrm>
+            <a:off x="5669280" y="3703320"/>
+            <a:ext cx="841248" cy="512064"/>
+          </a:xfrm>
+          <a:prstGeom prst="rightArrow">
+            <a:avLst/>
+          </a:prstGeom>
+          <a:solidFill>
+            <a:srgbClr val="33454E"/>
+          </a:solidFill>
+          <a:ln/>
+        </p:spPr>
       </p:sp>
     </p:spTree>
   </p:cSld>

--- a/ppt/KasireddyVadicherla_X25104047_bridge-structural-health.pptx
+++ b/ppt/KasireddyVadicherla_X25104047_bridge-structural-health.pptx
@@ -1578,12 +1578,12 @@
         </p:nvSpPr>
         <p:spPr>
           <a:xfrm>
-            <a:off x="640080" y="2468880"/>
-            <a:ext cx="1572768" cy="1371600"/>
+            <a:off x="640080" y="1874520"/>
+            <a:ext cx="2286000" cy="1280160"/>
           </a:xfrm>
           <a:prstGeom prst="roundRect">
             <a:avLst>
-              <a:gd name="adj" fmla="val 6667"/>
+              <a:gd name="adj" fmla="val 7143"/>
             </a:avLst>
           </a:prstGeom>
           <a:solidFill>
@@ -1605,7 +1605,7 @@
         </p:nvSpPr>
         <p:spPr>
           <a:xfrm>
-            <a:off x="1335024" y="2633472"/>
+            <a:off x="1691640" y="2039112"/>
             <a:ext cx="182880" cy="182880"/>
           </a:xfrm>
           <a:prstGeom prst="ellipse">
@@ -1625,8 +1625,8 @@
         </p:nvSpPr>
         <p:spPr>
           <a:xfrm>
-            <a:off x="612648" y="2852928"/>
-            <a:ext cx="1627632" cy="365760"/>
+            <a:off x="612648" y="2258568"/>
+            <a:ext cx="2340864" cy="365760"/>
           </a:xfrm>
           <a:prstGeom prst="rect">
             <a:avLst/>
@@ -1664,8 +1664,8 @@
         </p:nvSpPr>
         <p:spPr>
           <a:xfrm>
-            <a:off x="640080" y="3200400"/>
-            <a:ext cx="1572768" cy="411480"/>
+            <a:off x="640080" y="2606040"/>
+            <a:ext cx="2286000" cy="411480"/>
           </a:xfrm>
           <a:prstGeom prst="rect">
             <a:avLst/>
@@ -1703,8 +1703,733 @@
         </p:nvSpPr>
         <p:spPr>
           <a:xfrm>
-            <a:off x="2231136" y="3154680"/>
-            <a:ext cx="258409" cy="0"/>
+            <a:off x="2944368" y="2514600"/>
+            <a:ext cx="1975104" cy="0"/>
+          </a:xfrm>
+          <a:prstGeom prst="line">
+            <a:avLst/>
+          </a:prstGeom>
+          <a:noFill/>
+          <a:ln w="25400">
+            <a:solidFill>
+              <a:srgbClr val="74899A"/>
+            </a:solidFill>
+            <a:prstDash val="solid"/>
+            <a:headEnd type="none"/>
+            <a:tailEnd type="triangle"/>
+          </a:ln>
+        </p:spPr>
+      </p:sp>
+      <p:sp>
+        <p:nvSpPr>
+          <p:cNvPr id="8" name="Shape 6"/>
+          <p:cNvSpPr/>
+          <p:nvPr/>
+        </p:nvSpPr>
+        <p:spPr>
+          <a:xfrm>
+            <a:off x="4937760" y="1874520"/>
+            <a:ext cx="2286000" cy="1280160"/>
+          </a:xfrm>
+          <a:prstGeom prst="roundRect">
+            <a:avLst>
+              <a:gd name="adj" fmla="val 7143"/>
+            </a:avLst>
+          </a:prstGeom>
+          <a:solidFill>
+            <a:srgbClr val="EEF2F4"/>
+          </a:solidFill>
+          <a:ln w="19050">
+            <a:solidFill>
+              <a:srgbClr val="74899A"/>
+            </a:solidFill>
+            <a:prstDash val="solid"/>
+          </a:ln>
+        </p:spPr>
+      </p:sp>
+      <p:sp>
+        <p:nvSpPr>
+          <p:cNvPr id="9" name="Shape 7"/>
+          <p:cNvSpPr/>
+          <p:nvPr/>
+        </p:nvSpPr>
+        <p:spPr>
+          <a:xfrm>
+            <a:off x="5989320" y="2039112"/>
+            <a:ext cx="182880" cy="182880"/>
+          </a:xfrm>
+          <a:prstGeom prst="ellipse">
+            <a:avLst/>
+          </a:prstGeom>
+          <a:solidFill>
+            <a:srgbClr val="74899A"/>
+          </a:solidFill>
+          <a:ln/>
+        </p:spPr>
+      </p:sp>
+      <p:sp>
+        <p:nvSpPr>
+          <p:cNvPr id="10" name="Text 8"/>
+          <p:cNvSpPr/>
+          <p:nvPr/>
+        </p:nvSpPr>
+        <p:spPr>
+          <a:xfrm>
+            <a:off x="4910328" y="2258568"/>
+            <a:ext cx="2340864" cy="365760"/>
+          </a:xfrm>
+          <a:prstGeom prst="rect">
+            <a:avLst/>
+          </a:prstGeom>
+          <a:noFill/>
+          <a:ln/>
+        </p:spPr>
+        <p:txBody>
+          <a:bodyPr wrap="square" lIns="0" tIns="0" rIns="0" bIns="0" rtlCol="0" anchor="ctr"/>
+          <a:lstStyle/>
+          <a:p>
+            <a:pPr algn="ctr" indent="0" marL="0">
+              <a:buNone/>
+            </a:pPr>
+            <a:r>
+              <a:rPr lang="en-US" sz="1450" b="1" dirty="0">
+                <a:solidFill>
+                  <a:srgbClr val="1E262E"/>
+                </a:solidFill>
+                <a:latin typeface="Calibri" pitchFamily="34" charset="0"/>
+                <a:ea typeface="Calibri" pitchFamily="34" charset="-122"/>
+                <a:cs typeface="Calibri" pitchFamily="34" charset="-120"/>
+              </a:rPr>
+              <a:t>Fog node</a:t>
+            </a:r>
+            <a:endParaRPr lang="en-US" sz="1450" dirty="0"/>
+          </a:p>
+        </p:txBody>
+      </p:sp>
+      <p:sp>
+        <p:nvSpPr>
+          <p:cNvPr id="11" name="Text 9"/>
+          <p:cNvSpPr/>
+          <p:nvPr/>
+        </p:nvSpPr>
+        <p:spPr>
+          <a:xfrm>
+            <a:off x="4937760" y="2606040"/>
+            <a:ext cx="2286000" cy="411480"/>
+          </a:xfrm>
+          <a:prstGeom prst="rect">
+            <a:avLst/>
+          </a:prstGeom>
+          <a:noFill/>
+          <a:ln/>
+        </p:spPr>
+        <p:txBody>
+          <a:bodyPr wrap="square" lIns="0" tIns="0" rIns="0" bIns="0" rtlCol="0" anchor="t"/>
+          <a:lstStyle/>
+          <a:p>
+            <a:pPr algn="ctr" indent="0" marL="0">
+              <a:buNone/>
+            </a:pPr>
+            <a:r>
+              <a:rPr lang="en-US" sz="1050" dirty="0">
+                <a:solidFill>
+                  <a:srgbClr val="5F6C76"/>
+                </a:solidFill>
+                <a:latin typeface="Calibri" pitchFamily="34" charset="0"/>
+                <a:ea typeface="Calibri" pitchFamily="34" charset="-122"/>
+                <a:cs typeface="Calibri" pitchFamily="34" charset="-120"/>
+              </a:rPr>
+              <a:t>windows · 4 thresholds</a:t>
+            </a:r>
+            <a:endParaRPr lang="en-US" sz="1050" dirty="0"/>
+          </a:p>
+        </p:txBody>
+      </p:sp>
+      <p:sp>
+        <p:nvSpPr>
+          <p:cNvPr id="12" name="Shape 10"/>
+          <p:cNvSpPr/>
+          <p:nvPr/>
+        </p:nvSpPr>
+        <p:spPr>
+          <a:xfrm>
+            <a:off x="7242048" y="2514600"/>
+            <a:ext cx="1975104" cy="0"/>
+          </a:xfrm>
+          <a:prstGeom prst="line">
+            <a:avLst/>
+          </a:prstGeom>
+          <a:noFill/>
+          <a:ln w="25400">
+            <a:solidFill>
+              <a:srgbClr val="74899A"/>
+            </a:solidFill>
+            <a:prstDash val="solid"/>
+            <a:headEnd type="none"/>
+            <a:tailEnd type="triangle"/>
+          </a:ln>
+        </p:spPr>
+      </p:sp>
+      <p:sp>
+        <p:nvSpPr>
+          <p:cNvPr id="13" name="Shape 11"/>
+          <p:cNvSpPr/>
+          <p:nvPr/>
+        </p:nvSpPr>
+        <p:spPr>
+          <a:xfrm>
+            <a:off x="9235440" y="1874520"/>
+            <a:ext cx="2286000" cy="1280160"/>
+          </a:xfrm>
+          <a:prstGeom prst="roundRect">
+            <a:avLst>
+              <a:gd name="adj" fmla="val 7143"/>
+            </a:avLst>
+          </a:prstGeom>
+          <a:solidFill>
+            <a:srgbClr val="EEF2F4"/>
+          </a:solidFill>
+          <a:ln w="19050">
+            <a:solidFill>
+              <a:srgbClr val="33454E"/>
+            </a:solidFill>
+            <a:prstDash val="solid"/>
+          </a:ln>
+        </p:spPr>
+      </p:sp>
+      <p:sp>
+        <p:nvSpPr>
+          <p:cNvPr id="14" name="Shape 12"/>
+          <p:cNvSpPr/>
+          <p:nvPr/>
+        </p:nvSpPr>
+        <p:spPr>
+          <a:xfrm>
+            <a:off x="10287000" y="2039112"/>
+            <a:ext cx="182880" cy="182880"/>
+          </a:xfrm>
+          <a:prstGeom prst="ellipse">
+            <a:avLst/>
+          </a:prstGeom>
+          <a:solidFill>
+            <a:srgbClr val="33454E"/>
+          </a:solidFill>
+          <a:ln/>
+        </p:spPr>
+      </p:sp>
+      <p:sp>
+        <p:nvSpPr>
+          <p:cNvPr id="15" name="Text 13"/>
+          <p:cNvSpPr/>
+          <p:nvPr/>
+        </p:nvSpPr>
+        <p:spPr>
+          <a:xfrm>
+            <a:off x="9208008" y="2258568"/>
+            <a:ext cx="2340864" cy="365760"/>
+          </a:xfrm>
+          <a:prstGeom prst="rect">
+            <a:avLst/>
+          </a:prstGeom>
+          <a:noFill/>
+          <a:ln/>
+        </p:spPr>
+        <p:txBody>
+          <a:bodyPr wrap="square" lIns="0" tIns="0" rIns="0" bIns="0" rtlCol="0" anchor="ctr"/>
+          <a:lstStyle/>
+          <a:p>
+            <a:pPr algn="ctr" indent="0" marL="0">
+              <a:buNone/>
+            </a:pPr>
+            <a:r>
+              <a:rPr lang="en-US" sz="1450" b="1" dirty="0">
+                <a:solidFill>
+                  <a:srgbClr val="1E262E"/>
+                </a:solidFill>
+                <a:latin typeface="Calibri" pitchFamily="34" charset="0"/>
+                <a:ea typeface="Calibri" pitchFamily="34" charset="-122"/>
+                <a:cs typeface="Calibri" pitchFamily="34" charset="-120"/>
+              </a:rPr>
+              <a:t>Amazon SQS</a:t>
+            </a:r>
+            <a:endParaRPr lang="en-US" sz="1450" dirty="0"/>
+          </a:p>
+        </p:txBody>
+      </p:sp>
+      <p:sp>
+        <p:nvSpPr>
+          <p:cNvPr id="16" name="Text 14"/>
+          <p:cNvSpPr/>
+          <p:nvPr/>
+        </p:nvSpPr>
+        <p:spPr>
+          <a:xfrm>
+            <a:off x="9235440" y="2606040"/>
+            <a:ext cx="2286000" cy="411480"/>
+          </a:xfrm>
+          <a:prstGeom prst="rect">
+            <a:avLst/>
+          </a:prstGeom>
+          <a:noFill/>
+          <a:ln/>
+        </p:spPr>
+        <p:txBody>
+          <a:bodyPr wrap="square" lIns="0" tIns="0" rIns="0" bIns="0" rtlCol="0" anchor="t"/>
+          <a:lstStyle/>
+          <a:p>
+            <a:pPr algn="ctr" indent="0" marL="0">
+              <a:buNone/>
+            </a:pPr>
+            <a:r>
+              <a:rPr lang="en-US" sz="1050" dirty="0">
+                <a:solidFill>
+                  <a:srgbClr val="5F6C76"/>
+                </a:solidFill>
+                <a:latin typeface="Calibri" pitchFamily="34" charset="0"/>
+                <a:ea typeface="Calibri" pitchFamily="34" charset="-122"/>
+                <a:cs typeface="Calibri" pitchFamily="34" charset="-120"/>
+              </a:rPr>
+              <a:t>batched summaries</a:t>
+            </a:r>
+            <a:endParaRPr lang="en-US" sz="1050" dirty="0"/>
+          </a:p>
+        </p:txBody>
+      </p:sp>
+      <p:sp>
+        <p:nvSpPr>
+          <p:cNvPr id="17" name="Shape 15"/>
+          <p:cNvSpPr/>
+          <p:nvPr/>
+        </p:nvSpPr>
+        <p:spPr>
+          <a:xfrm>
+            <a:off x="9235440" y="3520440"/>
+            <a:ext cx="2286000" cy="1280160"/>
+          </a:xfrm>
+          <a:prstGeom prst="roundRect">
+            <a:avLst>
+              <a:gd name="adj" fmla="val 7143"/>
+            </a:avLst>
+          </a:prstGeom>
+          <a:solidFill>
+            <a:srgbClr val="EEF2F4"/>
+          </a:solidFill>
+          <a:ln w="19050">
+            <a:solidFill>
+              <a:srgbClr val="33454E"/>
+            </a:solidFill>
+            <a:prstDash val="solid"/>
+          </a:ln>
+        </p:spPr>
+      </p:sp>
+      <p:sp>
+        <p:nvSpPr>
+          <p:cNvPr id="18" name="Shape 16"/>
+          <p:cNvSpPr/>
+          <p:nvPr/>
+        </p:nvSpPr>
+        <p:spPr>
+          <a:xfrm>
+            <a:off x="10287000" y="3685032"/>
+            <a:ext cx="182880" cy="182880"/>
+          </a:xfrm>
+          <a:prstGeom prst="ellipse">
+            <a:avLst/>
+          </a:prstGeom>
+          <a:solidFill>
+            <a:srgbClr val="33454E"/>
+          </a:solidFill>
+          <a:ln/>
+        </p:spPr>
+      </p:sp>
+      <p:sp>
+        <p:nvSpPr>
+          <p:cNvPr id="19" name="Text 17"/>
+          <p:cNvSpPr/>
+          <p:nvPr/>
+        </p:nvSpPr>
+        <p:spPr>
+          <a:xfrm>
+            <a:off x="9208008" y="3904488"/>
+            <a:ext cx="2340864" cy="365760"/>
+          </a:xfrm>
+          <a:prstGeom prst="rect">
+            <a:avLst/>
+          </a:prstGeom>
+          <a:noFill/>
+          <a:ln/>
+        </p:spPr>
+        <p:txBody>
+          <a:bodyPr wrap="square" lIns="0" tIns="0" rIns="0" bIns="0" rtlCol="0" anchor="ctr"/>
+          <a:lstStyle/>
+          <a:p>
+            <a:pPr algn="ctr" indent="0" marL="0">
+              <a:buNone/>
+            </a:pPr>
+            <a:r>
+              <a:rPr lang="en-US" sz="1450" b="1" dirty="0">
+                <a:solidFill>
+                  <a:srgbClr val="1E262E"/>
+                </a:solidFill>
+                <a:latin typeface="Calibri" pitchFamily="34" charset="0"/>
+                <a:ea typeface="Calibri" pitchFamily="34" charset="-122"/>
+                <a:cs typeface="Calibri" pitchFamily="34" charset="-120"/>
+              </a:rPr>
+              <a:t>AWS Lambda</a:t>
+            </a:r>
+            <a:endParaRPr lang="en-US" sz="1450" dirty="0"/>
+          </a:p>
+        </p:txBody>
+      </p:sp>
+      <p:sp>
+        <p:nvSpPr>
+          <p:cNvPr id="20" name="Text 18"/>
+          <p:cNvSpPr/>
+          <p:nvPr/>
+        </p:nvSpPr>
+        <p:spPr>
+          <a:xfrm>
+            <a:off x="9235440" y="4251960"/>
+            <a:ext cx="2286000" cy="411480"/>
+          </a:xfrm>
+          <a:prstGeom prst="rect">
+            <a:avLst/>
+          </a:prstGeom>
+          <a:noFill/>
+          <a:ln/>
+        </p:spPr>
+        <p:txBody>
+          <a:bodyPr wrap="square" lIns="0" tIns="0" rIns="0" bIns="0" rtlCol="0" anchor="t"/>
+          <a:lstStyle/>
+          <a:p>
+            <a:pPr algn="ctr" indent="0" marL="0">
+              <a:buNone/>
+            </a:pPr>
+            <a:r>
+              <a:rPr lang="en-US" sz="1050" dirty="0">
+                <a:solidFill>
+                  <a:srgbClr val="5F6C76"/>
+                </a:solidFill>
+                <a:latin typeface="Calibri" pitchFamily="34" charset="0"/>
+                <a:ea typeface="Calibri" pitchFamily="34" charset="-122"/>
+                <a:cs typeface="Calibri" pitchFamily="34" charset="-120"/>
+              </a:rPr>
+              <a:t>python3.12 ingest</a:t>
+            </a:r>
+            <a:endParaRPr lang="en-US" sz="1050" dirty="0"/>
+          </a:p>
+        </p:txBody>
+      </p:sp>
+      <p:sp>
+        <p:nvSpPr>
+          <p:cNvPr id="21" name="Shape 19"/>
+          <p:cNvSpPr/>
+          <p:nvPr/>
+        </p:nvSpPr>
+        <p:spPr>
+          <a:xfrm>
+            <a:off x="7242048" y="4160520"/>
+            <a:ext cx="1975104" cy="0"/>
+          </a:xfrm>
+          <a:prstGeom prst="line">
+            <a:avLst/>
+          </a:prstGeom>
+          <a:noFill/>
+          <a:ln w="25400">
+            <a:solidFill>
+              <a:srgbClr val="74899A"/>
+            </a:solidFill>
+            <a:prstDash val="solid"/>
+            <a:headEnd type="triangle"/>
+            <a:tailEnd type="oval"/>
+          </a:ln>
+        </p:spPr>
+      </p:sp>
+      <p:sp>
+        <p:nvSpPr>
+          <p:cNvPr id="22" name="Shape 20"/>
+          <p:cNvSpPr/>
+          <p:nvPr/>
+        </p:nvSpPr>
+        <p:spPr>
+          <a:xfrm>
+            <a:off x="4937760" y="3520440"/>
+            <a:ext cx="2286000" cy="1280160"/>
+          </a:xfrm>
+          <a:prstGeom prst="roundRect">
+            <a:avLst>
+              <a:gd name="adj" fmla="val 7143"/>
+            </a:avLst>
+          </a:prstGeom>
+          <a:solidFill>
+            <a:srgbClr val="EEF2F4"/>
+          </a:solidFill>
+          <a:ln w="19050">
+            <a:solidFill>
+              <a:srgbClr val="33454E"/>
+            </a:solidFill>
+            <a:prstDash val="solid"/>
+          </a:ln>
+        </p:spPr>
+      </p:sp>
+      <p:sp>
+        <p:nvSpPr>
+          <p:cNvPr id="23" name="Shape 21"/>
+          <p:cNvSpPr/>
+          <p:nvPr/>
+        </p:nvSpPr>
+        <p:spPr>
+          <a:xfrm>
+            <a:off x="5989320" y="3685032"/>
+            <a:ext cx="182880" cy="182880"/>
+          </a:xfrm>
+          <a:prstGeom prst="ellipse">
+            <a:avLst/>
+          </a:prstGeom>
+          <a:solidFill>
+            <a:srgbClr val="33454E"/>
+          </a:solidFill>
+          <a:ln/>
+        </p:spPr>
+      </p:sp>
+      <p:sp>
+        <p:nvSpPr>
+          <p:cNvPr id="24" name="Text 22"/>
+          <p:cNvSpPr/>
+          <p:nvPr/>
+        </p:nvSpPr>
+        <p:spPr>
+          <a:xfrm>
+            <a:off x="4910328" y="3904488"/>
+            <a:ext cx="2340864" cy="365760"/>
+          </a:xfrm>
+          <a:prstGeom prst="rect">
+            <a:avLst/>
+          </a:prstGeom>
+          <a:noFill/>
+          <a:ln/>
+        </p:spPr>
+        <p:txBody>
+          <a:bodyPr wrap="square" lIns="0" tIns="0" rIns="0" bIns="0" rtlCol="0" anchor="ctr"/>
+          <a:lstStyle/>
+          <a:p>
+            <a:pPr algn="ctr" indent="0" marL="0">
+              <a:buNone/>
+            </a:pPr>
+            <a:r>
+              <a:rPr lang="en-US" sz="1450" b="1" dirty="0">
+                <a:solidFill>
+                  <a:srgbClr val="1E262E"/>
+                </a:solidFill>
+                <a:latin typeface="Calibri" pitchFamily="34" charset="0"/>
+                <a:ea typeface="Calibri" pitchFamily="34" charset="-122"/>
+                <a:cs typeface="Calibri" pitchFamily="34" charset="-120"/>
+              </a:rPr>
+              <a:t>DynamoDB</a:t>
+            </a:r>
+            <a:endParaRPr lang="en-US" sz="1450" dirty="0"/>
+          </a:p>
+        </p:txBody>
+      </p:sp>
+      <p:sp>
+        <p:nvSpPr>
+          <p:cNvPr id="25" name="Text 23"/>
+          <p:cNvSpPr/>
+          <p:nvPr/>
+        </p:nvSpPr>
+        <p:spPr>
+          <a:xfrm>
+            <a:off x="4937760" y="4251960"/>
+            <a:ext cx="2286000" cy="411480"/>
+          </a:xfrm>
+          <a:prstGeom prst="rect">
+            <a:avLst/>
+          </a:prstGeom>
+          <a:noFill/>
+          <a:ln/>
+        </p:spPr>
+        <p:txBody>
+          <a:bodyPr wrap="square" lIns="0" tIns="0" rIns="0" bIns="0" rtlCol="0" anchor="t"/>
+          <a:lstStyle/>
+          <a:p>
+            <a:pPr algn="ctr" indent="0" marL="0">
+              <a:buNone/>
+            </a:pPr>
+            <a:r>
+              <a:rPr lang="en-US" sz="1050" dirty="0">
+                <a:solidFill>
+                  <a:srgbClr val="5F6C76"/>
+                </a:solidFill>
+                <a:latin typeface="Calibri" pitchFamily="34" charset="0"/>
+                <a:ea typeface="Calibri" pitchFamily="34" charset="-122"/>
+                <a:cs typeface="Calibri" pitchFamily="34" charset="-120"/>
+              </a:rPr>
+              <a:t>time-keyed store</a:t>
+            </a:r>
+            <a:endParaRPr lang="en-US" sz="1050" dirty="0"/>
+          </a:p>
+        </p:txBody>
+      </p:sp>
+      <p:sp>
+        <p:nvSpPr>
+          <p:cNvPr id="26" name="Shape 24"/>
+          <p:cNvSpPr/>
+          <p:nvPr/>
+        </p:nvSpPr>
+        <p:spPr>
+          <a:xfrm>
+            <a:off x="2944368" y="4160520"/>
+            <a:ext cx="1975104" cy="0"/>
+          </a:xfrm>
+          <a:prstGeom prst="line">
+            <a:avLst/>
+          </a:prstGeom>
+          <a:noFill/>
+          <a:ln w="25400">
+            <a:solidFill>
+              <a:srgbClr val="74899A"/>
+            </a:solidFill>
+            <a:prstDash val="solid"/>
+            <a:headEnd type="triangle"/>
+            <a:tailEnd type="oval"/>
+          </a:ln>
+        </p:spPr>
+      </p:sp>
+      <p:sp>
+        <p:nvSpPr>
+          <p:cNvPr id="27" name="Shape 25"/>
+          <p:cNvSpPr/>
+          <p:nvPr/>
+        </p:nvSpPr>
+        <p:spPr>
+          <a:xfrm>
+            <a:off x="640080" y="3520440"/>
+            <a:ext cx="2286000" cy="1280160"/>
+          </a:xfrm>
+          <a:prstGeom prst="roundRect">
+            <a:avLst>
+              <a:gd name="adj" fmla="val 7143"/>
+            </a:avLst>
+          </a:prstGeom>
+          <a:solidFill>
+            <a:srgbClr val="EEF2F4"/>
+          </a:solidFill>
+          <a:ln w="19050">
+            <a:solidFill>
+              <a:srgbClr val="4E6773"/>
+            </a:solidFill>
+            <a:prstDash val="solid"/>
+          </a:ln>
+        </p:spPr>
+      </p:sp>
+      <p:sp>
+        <p:nvSpPr>
+          <p:cNvPr id="28" name="Shape 26"/>
+          <p:cNvSpPr/>
+          <p:nvPr/>
+        </p:nvSpPr>
+        <p:spPr>
+          <a:xfrm>
+            <a:off x="1691640" y="3685032"/>
+            <a:ext cx="182880" cy="182880"/>
+          </a:xfrm>
+          <a:prstGeom prst="ellipse">
+            <a:avLst/>
+          </a:prstGeom>
+          <a:solidFill>
+            <a:srgbClr val="4E6773"/>
+          </a:solidFill>
+          <a:ln/>
+        </p:spPr>
+      </p:sp>
+      <p:sp>
+        <p:nvSpPr>
+          <p:cNvPr id="29" name="Text 27"/>
+          <p:cNvSpPr/>
+          <p:nvPr/>
+        </p:nvSpPr>
+        <p:spPr>
+          <a:xfrm>
+            <a:off x="612648" y="3904488"/>
+            <a:ext cx="2340864" cy="365760"/>
+          </a:xfrm>
+          <a:prstGeom prst="rect">
+            <a:avLst/>
+          </a:prstGeom>
+          <a:noFill/>
+          <a:ln/>
+        </p:spPr>
+        <p:txBody>
+          <a:bodyPr wrap="square" lIns="0" tIns="0" rIns="0" bIns="0" rtlCol="0" anchor="ctr"/>
+          <a:lstStyle/>
+          <a:p>
+            <a:pPr algn="ctr" indent="0" marL="0">
+              <a:buNone/>
+            </a:pPr>
+            <a:r>
+              <a:rPr lang="en-US" sz="1450" b="1" dirty="0">
+                <a:solidFill>
+                  <a:srgbClr val="1E262E"/>
+                </a:solidFill>
+                <a:latin typeface="Calibri" pitchFamily="34" charset="0"/>
+                <a:ea typeface="Calibri" pitchFamily="34" charset="-122"/>
+                <a:cs typeface="Calibri" pitchFamily="34" charset="-120"/>
+              </a:rPr>
+              <a:t>API GW + S3</a:t>
+            </a:r>
+            <a:endParaRPr lang="en-US" sz="1450" dirty="0"/>
+          </a:p>
+        </p:txBody>
+      </p:sp>
+      <p:sp>
+        <p:nvSpPr>
+          <p:cNvPr id="30" name="Text 28"/>
+          <p:cNvSpPr/>
+          <p:nvPr/>
+        </p:nvSpPr>
+        <p:spPr>
+          <a:xfrm>
+            <a:off x="640080" y="4251960"/>
+            <a:ext cx="2286000" cy="411480"/>
+          </a:xfrm>
+          <a:prstGeom prst="rect">
+            <a:avLst/>
+          </a:prstGeom>
+          <a:noFill/>
+          <a:ln/>
+        </p:spPr>
+        <p:txBody>
+          <a:bodyPr wrap="square" lIns="0" tIns="0" rIns="0" bIns="0" rtlCol="0" anchor="t"/>
+          <a:lstStyle/>
+          <a:p>
+            <a:pPr algn="ctr" indent="0" marL="0">
+              <a:buNone/>
+            </a:pPr>
+            <a:r>
+              <a:rPr lang="en-US" sz="1050" dirty="0">
+                <a:solidFill>
+                  <a:srgbClr val="5F6C76"/>
+                </a:solidFill>
+                <a:latin typeface="Calibri" pitchFamily="34" charset="0"/>
+                <a:ea typeface="Calibri" pitchFamily="34" charset="-122"/>
+                <a:cs typeface="Calibri" pitchFamily="34" charset="-120"/>
+              </a:rPr>
+              <a:t>integrity index</a:t>
+            </a:r>
+            <a:endParaRPr lang="en-US" sz="1050" dirty="0"/>
+          </a:p>
+        </p:txBody>
+      </p:sp>
+      <p:sp>
+        <p:nvSpPr>
+          <p:cNvPr id="31" name="Shape 29"/>
+          <p:cNvSpPr/>
+          <p:nvPr/>
+        </p:nvSpPr>
+        <p:spPr>
+          <a:xfrm>
+            <a:off x="10378440" y="3154680"/>
+            <a:ext cx="0" cy="365760"/>
           </a:xfrm>
           <a:prstGeom prst="line">
             <a:avLst/>
@@ -1721,806 +2446,7 @@
       </p:sp>
       <p:sp>
         <p:nvSpPr>
-          <p:cNvPr id="8" name="Shape 6"/>
-          <p:cNvSpPr/>
-          <p:nvPr/>
-        </p:nvSpPr>
-        <p:spPr>
-          <a:xfrm>
-            <a:off x="2507833" y="2468880"/>
-            <a:ext cx="1572768" cy="1371600"/>
-          </a:xfrm>
-          <a:prstGeom prst="roundRect">
-            <a:avLst>
-              <a:gd name="adj" fmla="val 6667"/>
-            </a:avLst>
-          </a:prstGeom>
-          <a:solidFill>
-            <a:srgbClr val="EEF2F4"/>
-          </a:solidFill>
-          <a:ln w="19050">
-            <a:solidFill>
-              <a:srgbClr val="74899A"/>
-            </a:solidFill>
-            <a:prstDash val="solid"/>
-          </a:ln>
-        </p:spPr>
-      </p:sp>
-      <p:sp>
-        <p:nvSpPr>
-          <p:cNvPr id="9" name="Shape 7"/>
-          <p:cNvSpPr/>
-          <p:nvPr/>
-        </p:nvSpPr>
-        <p:spPr>
-          <a:xfrm>
-            <a:off x="3202777" y="2633472"/>
-            <a:ext cx="182880" cy="182880"/>
-          </a:xfrm>
-          <a:prstGeom prst="ellipse">
-            <a:avLst/>
-          </a:prstGeom>
-          <a:solidFill>
-            <a:srgbClr val="74899A"/>
-          </a:solidFill>
-          <a:ln/>
-        </p:spPr>
-      </p:sp>
-      <p:sp>
-        <p:nvSpPr>
-          <p:cNvPr id="10" name="Text 8"/>
-          <p:cNvSpPr/>
-          <p:nvPr/>
-        </p:nvSpPr>
-        <p:spPr>
-          <a:xfrm>
-            <a:off x="2480401" y="2852928"/>
-            <a:ext cx="1627632" cy="365760"/>
-          </a:xfrm>
-          <a:prstGeom prst="rect">
-            <a:avLst/>
-          </a:prstGeom>
-          <a:noFill/>
-          <a:ln/>
-        </p:spPr>
-        <p:txBody>
-          <a:bodyPr wrap="square" lIns="0" tIns="0" rIns="0" bIns="0" rtlCol="0" anchor="ctr"/>
-          <a:lstStyle/>
-          <a:p>
-            <a:pPr algn="ctr" indent="0" marL="0">
-              <a:buNone/>
-            </a:pPr>
-            <a:r>
-              <a:rPr lang="en-US" sz="1450" b="1" dirty="0">
-                <a:solidFill>
-                  <a:srgbClr val="1E262E"/>
-                </a:solidFill>
-                <a:latin typeface="Calibri" pitchFamily="34" charset="0"/>
-                <a:ea typeface="Calibri" pitchFamily="34" charset="-122"/>
-                <a:cs typeface="Calibri" pitchFamily="34" charset="-120"/>
-              </a:rPr>
-              <a:t>Fog node</a:t>
-            </a:r>
-            <a:endParaRPr lang="en-US" sz="1450" dirty="0"/>
-          </a:p>
-        </p:txBody>
-      </p:sp>
-      <p:sp>
-        <p:nvSpPr>
-          <p:cNvPr id="11" name="Text 9"/>
-          <p:cNvSpPr/>
-          <p:nvPr/>
-        </p:nvSpPr>
-        <p:spPr>
-          <a:xfrm>
-            <a:off x="2507833" y="3200400"/>
-            <a:ext cx="1572768" cy="411480"/>
-          </a:xfrm>
-          <a:prstGeom prst="rect">
-            <a:avLst/>
-          </a:prstGeom>
-          <a:noFill/>
-          <a:ln/>
-        </p:spPr>
-        <p:txBody>
-          <a:bodyPr wrap="square" lIns="0" tIns="0" rIns="0" bIns="0" rtlCol="0" anchor="t"/>
-          <a:lstStyle/>
-          <a:p>
-            <a:pPr algn="ctr" indent="0" marL="0">
-              <a:buNone/>
-            </a:pPr>
-            <a:r>
-              <a:rPr lang="en-US" sz="1050" dirty="0">
-                <a:solidFill>
-                  <a:srgbClr val="5F6C76"/>
-                </a:solidFill>
-                <a:latin typeface="Calibri" pitchFamily="34" charset="0"/>
-                <a:ea typeface="Calibri" pitchFamily="34" charset="-122"/>
-                <a:cs typeface="Calibri" pitchFamily="34" charset="-120"/>
-              </a:rPr>
-              <a:t>windows · 4 thresholds</a:t>
-            </a:r>
-            <a:endParaRPr lang="en-US" sz="1050" dirty="0"/>
-          </a:p>
-        </p:txBody>
-      </p:sp>
-      <p:sp>
-        <p:nvSpPr>
-          <p:cNvPr id="12" name="Shape 10"/>
-          <p:cNvSpPr/>
-          <p:nvPr/>
-        </p:nvSpPr>
-        <p:spPr>
-          <a:xfrm>
-            <a:off x="4098889" y="3154680"/>
-            <a:ext cx="258409" cy="0"/>
-          </a:xfrm>
-          <a:prstGeom prst="line">
-            <a:avLst/>
-          </a:prstGeom>
-          <a:noFill/>
-          <a:ln w="25400">
-            <a:solidFill>
-              <a:srgbClr val="74899A"/>
-            </a:solidFill>
-            <a:prstDash val="solid"/>
-            <a:tailEnd type="triangle"/>
-          </a:ln>
-        </p:spPr>
-      </p:sp>
-      <p:sp>
-        <p:nvSpPr>
-          <p:cNvPr id="13" name="Shape 11"/>
-          <p:cNvSpPr/>
-          <p:nvPr/>
-        </p:nvSpPr>
-        <p:spPr>
-          <a:xfrm>
-            <a:off x="4375587" y="2468880"/>
-            <a:ext cx="1572768" cy="1371600"/>
-          </a:xfrm>
-          <a:prstGeom prst="roundRect">
-            <a:avLst>
-              <a:gd name="adj" fmla="val 6667"/>
-            </a:avLst>
-          </a:prstGeom>
-          <a:solidFill>
-            <a:srgbClr val="EEF2F4"/>
-          </a:solidFill>
-          <a:ln w="19050">
-            <a:solidFill>
-              <a:srgbClr val="33454E"/>
-            </a:solidFill>
-            <a:prstDash val="solid"/>
-          </a:ln>
-        </p:spPr>
-      </p:sp>
-      <p:sp>
-        <p:nvSpPr>
-          <p:cNvPr id="14" name="Shape 12"/>
-          <p:cNvSpPr/>
-          <p:nvPr/>
-        </p:nvSpPr>
-        <p:spPr>
-          <a:xfrm>
-            <a:off x="5070531" y="2633472"/>
-            <a:ext cx="182880" cy="182880"/>
-          </a:xfrm>
-          <a:prstGeom prst="ellipse">
-            <a:avLst/>
-          </a:prstGeom>
-          <a:solidFill>
-            <a:srgbClr val="33454E"/>
-          </a:solidFill>
-          <a:ln/>
-        </p:spPr>
-      </p:sp>
-      <p:sp>
-        <p:nvSpPr>
-          <p:cNvPr id="15" name="Text 13"/>
-          <p:cNvSpPr/>
-          <p:nvPr/>
-        </p:nvSpPr>
-        <p:spPr>
-          <a:xfrm>
-            <a:off x="4348155" y="2852928"/>
-            <a:ext cx="1627632" cy="365760"/>
-          </a:xfrm>
-          <a:prstGeom prst="rect">
-            <a:avLst/>
-          </a:prstGeom>
-          <a:noFill/>
-          <a:ln/>
-        </p:spPr>
-        <p:txBody>
-          <a:bodyPr wrap="square" lIns="0" tIns="0" rIns="0" bIns="0" rtlCol="0" anchor="ctr"/>
-          <a:lstStyle/>
-          <a:p>
-            <a:pPr algn="ctr" indent="0" marL="0">
-              <a:buNone/>
-            </a:pPr>
-            <a:r>
-              <a:rPr lang="en-US" sz="1450" b="1" dirty="0">
-                <a:solidFill>
-                  <a:srgbClr val="1E262E"/>
-                </a:solidFill>
-                <a:latin typeface="Calibri" pitchFamily="34" charset="0"/>
-                <a:ea typeface="Calibri" pitchFamily="34" charset="-122"/>
-                <a:cs typeface="Calibri" pitchFamily="34" charset="-120"/>
-              </a:rPr>
-              <a:t>Amazon SQS</a:t>
-            </a:r>
-            <a:endParaRPr lang="en-US" sz="1450" dirty="0"/>
-          </a:p>
-        </p:txBody>
-      </p:sp>
-      <p:sp>
-        <p:nvSpPr>
-          <p:cNvPr id="16" name="Text 14"/>
-          <p:cNvSpPr/>
-          <p:nvPr/>
-        </p:nvSpPr>
-        <p:spPr>
-          <a:xfrm>
-            <a:off x="4375587" y="3200400"/>
-            <a:ext cx="1572768" cy="411480"/>
-          </a:xfrm>
-          <a:prstGeom prst="rect">
-            <a:avLst/>
-          </a:prstGeom>
-          <a:noFill/>
-          <a:ln/>
-        </p:spPr>
-        <p:txBody>
-          <a:bodyPr wrap="square" lIns="0" tIns="0" rIns="0" bIns="0" rtlCol="0" anchor="t"/>
-          <a:lstStyle/>
-          <a:p>
-            <a:pPr algn="ctr" indent="0" marL="0">
-              <a:buNone/>
-            </a:pPr>
-            <a:r>
-              <a:rPr lang="en-US" sz="1050" dirty="0">
-                <a:solidFill>
-                  <a:srgbClr val="5F6C76"/>
-                </a:solidFill>
-                <a:latin typeface="Calibri" pitchFamily="34" charset="0"/>
-                <a:ea typeface="Calibri" pitchFamily="34" charset="-122"/>
-                <a:cs typeface="Calibri" pitchFamily="34" charset="-120"/>
-              </a:rPr>
-              <a:t>batched summaries</a:t>
-            </a:r>
-            <a:endParaRPr lang="en-US" sz="1050" dirty="0"/>
-          </a:p>
-        </p:txBody>
-      </p:sp>
-      <p:sp>
-        <p:nvSpPr>
-          <p:cNvPr id="17" name="Shape 15"/>
-          <p:cNvSpPr/>
-          <p:nvPr/>
-        </p:nvSpPr>
-        <p:spPr>
-          <a:xfrm>
-            <a:off x="5966643" y="3154680"/>
-            <a:ext cx="258409" cy="0"/>
-          </a:xfrm>
-          <a:prstGeom prst="line">
-            <a:avLst/>
-          </a:prstGeom>
-          <a:noFill/>
-          <a:ln w="25400">
-            <a:solidFill>
-              <a:srgbClr val="74899A"/>
-            </a:solidFill>
-            <a:prstDash val="solid"/>
-            <a:tailEnd type="triangle"/>
-          </a:ln>
-        </p:spPr>
-      </p:sp>
-      <p:sp>
-        <p:nvSpPr>
-          <p:cNvPr id="18" name="Shape 16"/>
-          <p:cNvSpPr/>
-          <p:nvPr/>
-        </p:nvSpPr>
-        <p:spPr>
-          <a:xfrm>
-            <a:off x="6243340" y="2468880"/>
-            <a:ext cx="1572768" cy="1371600"/>
-          </a:xfrm>
-          <a:prstGeom prst="roundRect">
-            <a:avLst>
-              <a:gd name="adj" fmla="val 6667"/>
-            </a:avLst>
-          </a:prstGeom>
-          <a:solidFill>
-            <a:srgbClr val="EEF2F4"/>
-          </a:solidFill>
-          <a:ln w="19050">
-            <a:solidFill>
-              <a:srgbClr val="33454E"/>
-            </a:solidFill>
-            <a:prstDash val="solid"/>
-          </a:ln>
-        </p:spPr>
-      </p:sp>
-      <p:sp>
-        <p:nvSpPr>
-          <p:cNvPr id="19" name="Shape 17"/>
-          <p:cNvSpPr/>
-          <p:nvPr/>
-        </p:nvSpPr>
-        <p:spPr>
-          <a:xfrm>
-            <a:off x="6938284" y="2633472"/>
-            <a:ext cx="182880" cy="182880"/>
-          </a:xfrm>
-          <a:prstGeom prst="ellipse">
-            <a:avLst/>
-          </a:prstGeom>
-          <a:solidFill>
-            <a:srgbClr val="33454E"/>
-          </a:solidFill>
-          <a:ln/>
-        </p:spPr>
-      </p:sp>
-      <p:sp>
-        <p:nvSpPr>
-          <p:cNvPr id="20" name="Text 18"/>
-          <p:cNvSpPr/>
-          <p:nvPr/>
-        </p:nvSpPr>
-        <p:spPr>
-          <a:xfrm>
-            <a:off x="6215908" y="2852928"/>
-            <a:ext cx="1627632" cy="365760"/>
-          </a:xfrm>
-          <a:prstGeom prst="rect">
-            <a:avLst/>
-          </a:prstGeom>
-          <a:noFill/>
-          <a:ln/>
-        </p:spPr>
-        <p:txBody>
-          <a:bodyPr wrap="square" lIns="0" tIns="0" rIns="0" bIns="0" rtlCol="0" anchor="ctr"/>
-          <a:lstStyle/>
-          <a:p>
-            <a:pPr algn="ctr" indent="0" marL="0">
-              <a:buNone/>
-            </a:pPr>
-            <a:r>
-              <a:rPr lang="en-US" sz="1450" b="1" dirty="0">
-                <a:solidFill>
-                  <a:srgbClr val="1E262E"/>
-                </a:solidFill>
-                <a:latin typeface="Calibri" pitchFamily="34" charset="0"/>
-                <a:ea typeface="Calibri" pitchFamily="34" charset="-122"/>
-                <a:cs typeface="Calibri" pitchFamily="34" charset="-120"/>
-              </a:rPr>
-              <a:t>AWS Lambda</a:t>
-            </a:r>
-            <a:endParaRPr lang="en-US" sz="1450" dirty="0"/>
-          </a:p>
-        </p:txBody>
-      </p:sp>
-      <p:sp>
-        <p:nvSpPr>
-          <p:cNvPr id="21" name="Text 19"/>
-          <p:cNvSpPr/>
-          <p:nvPr/>
-        </p:nvSpPr>
-        <p:spPr>
-          <a:xfrm>
-            <a:off x="6243340" y="3200400"/>
-            <a:ext cx="1572768" cy="411480"/>
-          </a:xfrm>
-          <a:prstGeom prst="rect">
-            <a:avLst/>
-          </a:prstGeom>
-          <a:noFill/>
-          <a:ln/>
-        </p:spPr>
-        <p:txBody>
-          <a:bodyPr wrap="square" lIns="0" tIns="0" rIns="0" bIns="0" rtlCol="0" anchor="t"/>
-          <a:lstStyle/>
-          <a:p>
-            <a:pPr algn="ctr" indent="0" marL="0">
-              <a:buNone/>
-            </a:pPr>
-            <a:r>
-              <a:rPr lang="en-US" sz="1050" dirty="0">
-                <a:solidFill>
-                  <a:srgbClr val="5F6C76"/>
-                </a:solidFill>
-                <a:latin typeface="Calibri" pitchFamily="34" charset="0"/>
-                <a:ea typeface="Calibri" pitchFamily="34" charset="-122"/>
-                <a:cs typeface="Calibri" pitchFamily="34" charset="-120"/>
-              </a:rPr>
-              <a:t>python3.12 ingest</a:t>
-            </a:r>
-            <a:endParaRPr lang="en-US" sz="1050" dirty="0"/>
-          </a:p>
-        </p:txBody>
-      </p:sp>
-      <p:sp>
-        <p:nvSpPr>
-          <p:cNvPr id="22" name="Shape 20"/>
-          <p:cNvSpPr/>
-          <p:nvPr/>
-        </p:nvSpPr>
-        <p:spPr>
-          <a:xfrm>
-            <a:off x="7834396" y="3154680"/>
-            <a:ext cx="258409" cy="0"/>
-          </a:xfrm>
-          <a:prstGeom prst="line">
-            <a:avLst/>
-          </a:prstGeom>
-          <a:noFill/>
-          <a:ln w="25400">
-            <a:solidFill>
-              <a:srgbClr val="74899A"/>
-            </a:solidFill>
-            <a:prstDash val="solid"/>
-            <a:tailEnd type="triangle"/>
-          </a:ln>
-        </p:spPr>
-      </p:sp>
-      <p:sp>
-        <p:nvSpPr>
-          <p:cNvPr id="23" name="Shape 21"/>
-          <p:cNvSpPr/>
-          <p:nvPr/>
-        </p:nvSpPr>
-        <p:spPr>
-          <a:xfrm>
-            <a:off x="8111094" y="2468880"/>
-            <a:ext cx="1572768" cy="1371600"/>
-          </a:xfrm>
-          <a:prstGeom prst="roundRect">
-            <a:avLst>
-              <a:gd name="adj" fmla="val 6667"/>
-            </a:avLst>
-          </a:prstGeom>
-          <a:solidFill>
-            <a:srgbClr val="EEF2F4"/>
-          </a:solidFill>
-          <a:ln w="19050">
-            <a:solidFill>
-              <a:srgbClr val="33454E"/>
-            </a:solidFill>
-            <a:prstDash val="solid"/>
-          </a:ln>
-        </p:spPr>
-      </p:sp>
-      <p:sp>
-        <p:nvSpPr>
-          <p:cNvPr id="24" name="Shape 22"/>
-          <p:cNvSpPr/>
-          <p:nvPr/>
-        </p:nvSpPr>
-        <p:spPr>
-          <a:xfrm>
-            <a:off x="8806038" y="2633472"/>
-            <a:ext cx="182880" cy="182880"/>
-          </a:xfrm>
-          <a:prstGeom prst="ellipse">
-            <a:avLst/>
-          </a:prstGeom>
-          <a:solidFill>
-            <a:srgbClr val="33454E"/>
-          </a:solidFill>
-          <a:ln/>
-        </p:spPr>
-      </p:sp>
-      <p:sp>
-        <p:nvSpPr>
-          <p:cNvPr id="25" name="Text 23"/>
-          <p:cNvSpPr/>
-          <p:nvPr/>
-        </p:nvSpPr>
-        <p:spPr>
-          <a:xfrm>
-            <a:off x="8083662" y="2852928"/>
-            <a:ext cx="1627632" cy="365760"/>
-          </a:xfrm>
-          <a:prstGeom prst="rect">
-            <a:avLst/>
-          </a:prstGeom>
-          <a:noFill/>
-          <a:ln/>
-        </p:spPr>
-        <p:txBody>
-          <a:bodyPr wrap="square" lIns="0" tIns="0" rIns="0" bIns="0" rtlCol="0" anchor="ctr"/>
-          <a:lstStyle/>
-          <a:p>
-            <a:pPr algn="ctr" indent="0" marL="0">
-              <a:buNone/>
-            </a:pPr>
-            <a:r>
-              <a:rPr lang="en-US" sz="1450" b="1" dirty="0">
-                <a:solidFill>
-                  <a:srgbClr val="1E262E"/>
-                </a:solidFill>
-                <a:latin typeface="Calibri" pitchFamily="34" charset="0"/>
-                <a:ea typeface="Calibri" pitchFamily="34" charset="-122"/>
-                <a:cs typeface="Calibri" pitchFamily="34" charset="-120"/>
-              </a:rPr>
-              <a:t>DynamoDB</a:t>
-            </a:r>
-            <a:endParaRPr lang="en-US" sz="1450" dirty="0"/>
-          </a:p>
-        </p:txBody>
-      </p:sp>
-      <p:sp>
-        <p:nvSpPr>
-          <p:cNvPr id="26" name="Text 24"/>
-          <p:cNvSpPr/>
-          <p:nvPr/>
-        </p:nvSpPr>
-        <p:spPr>
-          <a:xfrm>
-            <a:off x="8111094" y="3200400"/>
-            <a:ext cx="1572768" cy="411480"/>
-          </a:xfrm>
-          <a:prstGeom prst="rect">
-            <a:avLst/>
-          </a:prstGeom>
-          <a:noFill/>
-          <a:ln/>
-        </p:spPr>
-        <p:txBody>
-          <a:bodyPr wrap="square" lIns="0" tIns="0" rIns="0" bIns="0" rtlCol="0" anchor="t"/>
-          <a:lstStyle/>
-          <a:p>
-            <a:pPr algn="ctr" indent="0" marL="0">
-              <a:buNone/>
-            </a:pPr>
-            <a:r>
-              <a:rPr lang="en-US" sz="1050" dirty="0">
-                <a:solidFill>
-                  <a:srgbClr val="5F6C76"/>
-                </a:solidFill>
-                <a:latin typeface="Calibri" pitchFamily="34" charset="0"/>
-                <a:ea typeface="Calibri" pitchFamily="34" charset="-122"/>
-                <a:cs typeface="Calibri" pitchFamily="34" charset="-120"/>
-              </a:rPr>
-              <a:t>time-keyed store</a:t>
-            </a:r>
-            <a:endParaRPr lang="en-US" sz="1050" dirty="0"/>
-          </a:p>
-        </p:txBody>
-      </p:sp>
-      <p:sp>
-        <p:nvSpPr>
-          <p:cNvPr id="27" name="Shape 25"/>
-          <p:cNvSpPr/>
-          <p:nvPr/>
-        </p:nvSpPr>
-        <p:spPr>
-          <a:xfrm>
-            <a:off x="9702150" y="3154680"/>
-            <a:ext cx="258409" cy="0"/>
-          </a:xfrm>
-          <a:prstGeom prst="line">
-            <a:avLst/>
-          </a:prstGeom>
-          <a:noFill/>
-          <a:ln w="25400">
-            <a:solidFill>
-              <a:srgbClr val="74899A"/>
-            </a:solidFill>
-            <a:prstDash val="solid"/>
-            <a:tailEnd type="triangle"/>
-          </a:ln>
-        </p:spPr>
-      </p:sp>
-      <p:sp>
-        <p:nvSpPr>
-          <p:cNvPr id="28" name="Shape 26"/>
-          <p:cNvSpPr/>
-          <p:nvPr/>
-        </p:nvSpPr>
-        <p:spPr>
-          <a:xfrm>
-            <a:off x="9978847" y="2468880"/>
-            <a:ext cx="1572768" cy="1371600"/>
-          </a:xfrm>
-          <a:prstGeom prst="roundRect">
-            <a:avLst>
-              <a:gd name="adj" fmla="val 6667"/>
-            </a:avLst>
-          </a:prstGeom>
-          <a:solidFill>
-            <a:srgbClr val="EEF2F4"/>
-          </a:solidFill>
-          <a:ln w="19050">
-            <a:solidFill>
-              <a:srgbClr val="4E6773"/>
-            </a:solidFill>
-            <a:prstDash val="solid"/>
-          </a:ln>
-        </p:spPr>
-      </p:sp>
-      <p:sp>
-        <p:nvSpPr>
-          <p:cNvPr id="29" name="Shape 27"/>
-          <p:cNvSpPr/>
-          <p:nvPr/>
-        </p:nvSpPr>
-        <p:spPr>
-          <a:xfrm>
-            <a:off x="10673791" y="2633472"/>
-            <a:ext cx="182880" cy="182880"/>
-          </a:xfrm>
-          <a:prstGeom prst="ellipse">
-            <a:avLst/>
-          </a:prstGeom>
-          <a:solidFill>
-            <a:srgbClr val="4E6773"/>
-          </a:solidFill>
-          <a:ln/>
-        </p:spPr>
-      </p:sp>
-      <p:sp>
-        <p:nvSpPr>
-          <p:cNvPr id="30" name="Text 28"/>
-          <p:cNvSpPr/>
-          <p:nvPr/>
-        </p:nvSpPr>
-        <p:spPr>
-          <a:xfrm>
-            <a:off x="9951415" y="2852928"/>
-            <a:ext cx="1627632" cy="365760"/>
-          </a:xfrm>
-          <a:prstGeom prst="rect">
-            <a:avLst/>
-          </a:prstGeom>
-          <a:noFill/>
-          <a:ln/>
-        </p:spPr>
-        <p:txBody>
-          <a:bodyPr wrap="square" lIns="0" tIns="0" rIns="0" bIns="0" rtlCol="0" anchor="ctr"/>
-          <a:lstStyle/>
-          <a:p>
-            <a:pPr algn="ctr" indent="0" marL="0">
-              <a:buNone/>
-            </a:pPr>
-            <a:r>
-              <a:rPr lang="en-US" sz="1450" b="1" dirty="0">
-                <a:solidFill>
-                  <a:srgbClr val="1E262E"/>
-                </a:solidFill>
-                <a:latin typeface="Calibri" pitchFamily="34" charset="0"/>
-                <a:ea typeface="Calibri" pitchFamily="34" charset="-122"/>
-                <a:cs typeface="Calibri" pitchFamily="34" charset="-120"/>
-              </a:rPr>
-              <a:t>API GW + S3</a:t>
-            </a:r>
-            <a:endParaRPr lang="en-US" sz="1450" dirty="0"/>
-          </a:p>
-        </p:txBody>
-      </p:sp>
-      <p:sp>
-        <p:nvSpPr>
-          <p:cNvPr id="31" name="Text 29"/>
-          <p:cNvSpPr/>
-          <p:nvPr/>
-        </p:nvSpPr>
-        <p:spPr>
-          <a:xfrm>
-            <a:off x="9978847" y="3200400"/>
-            <a:ext cx="1572768" cy="411480"/>
-          </a:xfrm>
-          <a:prstGeom prst="rect">
-            <a:avLst/>
-          </a:prstGeom>
-          <a:noFill/>
-          <a:ln/>
-        </p:spPr>
-        <p:txBody>
-          <a:bodyPr wrap="square" lIns="0" tIns="0" rIns="0" bIns="0" rtlCol="0" anchor="t"/>
-          <a:lstStyle/>
-          <a:p>
-            <a:pPr algn="ctr" indent="0" marL="0">
-              <a:buNone/>
-            </a:pPr>
-            <a:r>
-              <a:rPr lang="en-US" sz="1050" dirty="0">
-                <a:solidFill>
-                  <a:srgbClr val="5F6C76"/>
-                </a:solidFill>
-                <a:latin typeface="Calibri" pitchFamily="34" charset="0"/>
-                <a:ea typeface="Calibri" pitchFamily="34" charset="-122"/>
-                <a:cs typeface="Calibri" pitchFamily="34" charset="-120"/>
-              </a:rPr>
-              <a:t>integrity index</a:t>
-            </a:r>
-            <a:endParaRPr lang="en-US" sz="1050" dirty="0"/>
-          </a:p>
-        </p:txBody>
-      </p:sp>
-      <p:sp>
-        <p:nvSpPr>
           <p:cNvPr id="32" name="Text 30"/>
-          <p:cNvSpPr/>
-          <p:nvPr/>
-        </p:nvSpPr>
-        <p:spPr>
-          <a:xfrm>
-            <a:off x="640080" y="3977640"/>
-            <a:ext cx="3440521" cy="274320"/>
-          </a:xfrm>
-          <a:prstGeom prst="rect">
-            <a:avLst/>
-          </a:prstGeom>
-          <a:noFill/>
-          <a:ln/>
-        </p:spPr>
-        <p:txBody>
-          <a:bodyPr wrap="square" rtlCol="0" anchor="ctr"/>
-          <a:lstStyle/>
-          <a:p>
-            <a:pPr algn="ctr" indent="0" marL="0">
-              <a:buNone/>
-            </a:pPr>
-            <a:r>
-              <a:rPr lang="en-US" sz="1100" b="1" spc="200" kern="0" dirty="0">
-                <a:solidFill>
-                  <a:srgbClr val="74899A"/>
-                </a:solidFill>
-                <a:latin typeface="Calibri" pitchFamily="34" charset="0"/>
-                <a:ea typeface="Calibri" pitchFamily="34" charset="-122"/>
-                <a:cs typeface="Calibri" pitchFamily="34" charset="-120"/>
-              </a:rPr>
-              <a:t>EDGE</a:t>
-            </a:r>
-            <a:endParaRPr lang="en-US" sz="1100" dirty="0"/>
-          </a:p>
-        </p:txBody>
-      </p:sp>
-      <p:sp>
-        <p:nvSpPr>
-          <p:cNvPr id="33" name="Text 31"/>
-          <p:cNvSpPr/>
-          <p:nvPr/>
-        </p:nvSpPr>
-        <p:spPr>
-          <a:xfrm>
-            <a:off x="4375587" y="3977640"/>
-            <a:ext cx="7176028" cy="274320"/>
-          </a:xfrm>
-          <a:prstGeom prst="rect">
-            <a:avLst/>
-          </a:prstGeom>
-          <a:noFill/>
-          <a:ln/>
-        </p:spPr>
-        <p:txBody>
-          <a:bodyPr wrap="square" rtlCol="0" anchor="ctr"/>
-          <a:lstStyle/>
-          <a:p>
-            <a:pPr algn="ctr" indent="0" marL="0">
-              <a:buNone/>
-            </a:pPr>
-            <a:r>
-              <a:rPr lang="en-US" sz="1100" b="1" spc="200" kern="0" dirty="0">
-                <a:solidFill>
-                  <a:srgbClr val="33454E"/>
-                </a:solidFill>
-                <a:latin typeface="Calibri" pitchFamily="34" charset="0"/>
-                <a:ea typeface="Calibri" pitchFamily="34" charset="-122"/>
-                <a:cs typeface="Calibri" pitchFamily="34" charset="-120"/>
-              </a:rPr>
-              <a:t>CLOUD</a:t>
-            </a:r>
-            <a:endParaRPr lang="en-US" sz="1100" dirty="0"/>
-          </a:p>
-        </p:txBody>
-      </p:sp>
-      <p:sp>
-        <p:nvSpPr>
-          <p:cNvPr id="34" name="Text 32"/>
           <p:cNvSpPr/>
           <p:nvPr/>
         </p:nvSpPr>
@@ -3196,12 +3122,12 @@
         </p:nvSpPr>
         <p:spPr>
           <a:xfrm>
-            <a:off x="640080" y="1874520"/>
-            <a:ext cx="4937760" cy="4160520"/>
+            <a:off x="731520" y="1920240"/>
+            <a:ext cx="10698480" cy="1965960"/>
           </a:xfrm>
           <a:prstGeom prst="roundRect">
             <a:avLst>
-              <a:gd name="adj" fmla="val 2198"/>
+              <a:gd name="adj" fmla="val 4651"/>
             </a:avLst>
           </a:prstGeom>
           <a:solidFill>
@@ -3223,7 +3149,7 @@
         </p:nvSpPr>
         <p:spPr>
           <a:xfrm>
-            <a:off x="960120" y="2103120"/>
+            <a:off x="1005840" y="2103120"/>
             <a:ext cx="3657600" cy="457200"/>
           </a:xfrm>
           <a:prstGeom prst="rect">
@@ -3262,8 +3188,8 @@
         </p:nvSpPr>
         <p:spPr>
           <a:xfrm>
-            <a:off x="960120" y="2651760"/>
-            <a:ext cx="4343400" cy="3200400"/>
+            <a:off x="1005840" y="2578608"/>
+            <a:ext cx="9966960" cy="1188720"/>
           </a:xfrm>
           <a:prstGeom prst="rect">
             <a:avLst/>
@@ -3277,12 +3203,12 @@
           <a:p>
             <a:pPr indent="0" marL="0">
               <a:lnSpc>
-                <a:spcPct val="112000"/>
+                <a:spcPct val="105000"/>
               </a:lnSpc>
               <a:buNone/>
             </a:pPr>
             <a:r>
-              <a:rPr lang="en-US" sz="1350" dirty="0">
+              <a:rPr lang="en-US" sz="1300" dirty="0">
                 <a:solidFill>
                   <a:srgbClr val="1E262E"/>
                 </a:solidFill>
@@ -3292,7 +3218,7 @@
               </a:rPr>
               <a:t>Every project here deploys through one shared Terraform module, and its local state file already tracked a different live AWS stack under the default workspace. Nothing in my code was wrong — but applied against that workspace, Terraform reconciles state and plans to destroy the other deployment's live resources. The only warning is one line of plan output.</a:t>
             </a:r>
-            <a:endParaRPr lang="en-US" sz="1350" dirty="0"/>
+            <a:endParaRPr lang="en-US" sz="1300" dirty="0"/>
           </a:p>
         </p:txBody>
       </p:sp>
@@ -3304,12 +3230,12 @@
         </p:nvSpPr>
         <p:spPr>
           <a:xfrm>
-            <a:off x="6611112" y="1874520"/>
-            <a:ext cx="4937760" cy="4160520"/>
+            <a:off x="731520" y="4041648"/>
+            <a:ext cx="10698480" cy="1965960"/>
           </a:xfrm>
           <a:prstGeom prst="roundRect">
             <a:avLst>
-              <a:gd name="adj" fmla="val 2198"/>
+              <a:gd name="adj" fmla="val 4651"/>
             </a:avLst>
           </a:prstGeom>
           <a:solidFill>
@@ -3331,7 +3257,7 @@
         </p:nvSpPr>
         <p:spPr>
           <a:xfrm>
-            <a:off x="6931152" y="2103120"/>
+            <a:off x="1005840" y="4224528"/>
             <a:ext cx="3657600" cy="457200"/>
           </a:xfrm>
           <a:prstGeom prst="rect">
@@ -3370,8 +3296,8 @@
         </p:nvSpPr>
         <p:spPr>
           <a:xfrm>
-            <a:off x="6931152" y="2651760"/>
-            <a:ext cx="4343400" cy="3200400"/>
+            <a:off x="1005840" y="4700016"/>
+            <a:ext cx="9966960" cy="1188720"/>
           </a:xfrm>
           <a:prstGeom prst="rect">
             <a:avLst/>
@@ -3385,12 +3311,12 @@
           <a:p>
             <a:pPr indent="0" marL="0">
               <a:lnSpc>
-                <a:spcPct val="112000"/>
+                <a:spcPct val="105000"/>
               </a:lnSpc>
               <a:buNone/>
             </a:pPr>
             <a:r>
-              <a:rPr lang="en-US" sz="1350" dirty="0">
+              <a:rPr lang="en-US" sz="1300" dirty="0">
                 <a:solidFill>
                   <a:srgbClr val="1E262E"/>
                 </a:solidFill>
@@ -3400,29 +3326,9 @@
               </a:rPr>
               <a:t>A dedicated workspace was created first, and the re-plan read "24 to add, 0 to change, 0 to destroy"; then a single apply built all 24 resources, healthy within a minute. Never apply an unread plan. The same pre-deploy audit also caught two silent defects — a pagination undercount and unbatched publishing — both fixed and regression-tested before launch.</a:t>
             </a:r>
-            <a:endParaRPr lang="en-US" sz="1350" dirty="0"/>
-          </a:p>
-        </p:txBody>
-      </p:sp>
-      <p:sp>
-        <p:nvSpPr>
-          <p:cNvPr id="9" name="Shape 7"/>
-          <p:cNvSpPr/>
-          <p:nvPr/>
-        </p:nvSpPr>
-        <p:spPr>
-          <a:xfrm>
-            <a:off x="5669280" y="3703320"/>
-            <a:ext cx="841248" cy="512064"/>
-          </a:xfrm>
-          <a:prstGeom prst="rightArrow">
-            <a:avLst/>
-          </a:prstGeom>
-          <a:solidFill>
-            <a:srgbClr val="33454E"/>
-          </a:solidFill>
-          <a:ln/>
-        </p:spPr>
+            <a:endParaRPr lang="en-US" sz="1300" dirty="0"/>
+          </a:p>
+        </p:txBody>
       </p:sp>
     </p:spTree>
   </p:cSld>

--- a/ppt/KasireddyVadicherla_X25104047_bridge-structural-health.pptx
+++ b/ppt/KasireddyVadicherla_X25104047_bridge-structural-health.pptx
@@ -2601,8 +2601,35 @@
         </p:nvSpPr>
         <p:spPr>
           <a:xfrm>
-            <a:off x="731520" y="1965960"/>
-            <a:ext cx="685800" cy="685800"/>
+            <a:off x="640080" y="1874520"/>
+            <a:ext cx="3502152" cy="3977640"/>
+          </a:xfrm>
+          <a:prstGeom prst="roundRect">
+            <a:avLst>
+              <a:gd name="adj" fmla="val 2611"/>
+            </a:avLst>
+          </a:prstGeom>
+          <a:solidFill>
+            <a:srgbClr val="EEF2F4"/>
+          </a:solidFill>
+          <a:ln w="15240">
+            <a:solidFill>
+              <a:srgbClr val="4E6773"/>
+            </a:solidFill>
+            <a:prstDash val="solid"/>
+          </a:ln>
+        </p:spPr>
+      </p:sp>
+      <p:sp>
+        <p:nvSpPr>
+          <p:cNvPr id="5" name="Shape 3"/>
+          <p:cNvSpPr/>
+          <p:nvPr/>
+        </p:nvSpPr>
+        <p:spPr>
+          <a:xfrm>
+            <a:off x="914400" y="2148840"/>
+            <a:ext cx="603504" cy="603504"/>
           </a:xfrm>
           <a:prstGeom prst="ellipse">
             <a:avLst/>
@@ -2615,14 +2642,14 @@
       </p:sp>
       <p:sp>
         <p:nvSpPr>
-          <p:cNvPr id="5" name="Text 3"/>
-          <p:cNvSpPr/>
-          <p:nvPr/>
-        </p:nvSpPr>
-        <p:spPr>
-          <a:xfrm>
-            <a:off x="731520" y="1965960"/>
-            <a:ext cx="685800" cy="685800"/>
+          <p:cNvPr id="6" name="Text 4"/>
+          <p:cNvSpPr/>
+          <p:nvPr/>
+        </p:nvSpPr>
+        <p:spPr>
+          <a:xfrm>
+            <a:off x="914400" y="2148840"/>
+            <a:ext cx="603504" cy="603504"/>
           </a:xfrm>
           <a:prstGeom prst="rect">
             <a:avLst/>
@@ -2638,7 +2665,7 @@
               <a:buNone/>
             </a:pPr>
             <a:r>
-              <a:rPr lang="en-US" sz="2600" b="1" dirty="0">
+              <a:rPr lang="en-US" sz="2200" b="1" dirty="0">
                 <a:solidFill>
                   <a:srgbClr val="FFFFFF"/>
                 </a:solidFill>
@@ -2648,20 +2675,20 @@
               </a:rPr>
               <a:t>1</a:t>
             </a:r>
-            <a:endParaRPr lang="en-US" sz="2600" dirty="0"/>
-          </a:p>
-        </p:txBody>
-      </p:sp>
-      <p:sp>
-        <p:nvSpPr>
-          <p:cNvPr id="6" name="Text 4"/>
-          <p:cNvSpPr/>
-          <p:nvPr/>
-        </p:nvSpPr>
-        <p:spPr>
-          <a:xfrm>
-            <a:off x="1691640" y="1920240"/>
-            <a:ext cx="9875520" cy="411480"/>
+            <a:endParaRPr lang="en-US" sz="2200" dirty="0"/>
+          </a:p>
+        </p:txBody>
+      </p:sp>
+      <p:sp>
+        <p:nvSpPr>
+          <p:cNvPr id="7" name="Text 5"/>
+          <p:cNvSpPr/>
+          <p:nvPr/>
+        </p:nvSpPr>
+        <p:spPr>
+          <a:xfrm>
+            <a:off x="914400" y="2898648"/>
+            <a:ext cx="2953512" cy="777240"/>
           </a:xfrm>
           <a:prstGeom prst="rect">
             <a:avLst/>
@@ -2677,7 +2704,7 @@
               <a:buNone/>
             </a:pPr>
             <a:r>
-              <a:rPr lang="en-US" sz="1800" b="1" dirty="0">
+              <a:rPr lang="en-US" sz="1600" b="1" dirty="0">
                 <a:solidFill>
                   <a:srgbClr val="1E262E"/>
                 </a:solidFill>
@@ -2687,20 +2714,20 @@
               </a:rPr>
               <a:t>A 0-to-100 integrity index per span</a:t>
             </a:r>
-            <a:endParaRPr lang="en-US" sz="1800" dirty="0"/>
-          </a:p>
-        </p:txBody>
-      </p:sp>
-      <p:sp>
-        <p:nvSpPr>
-          <p:cNvPr id="7" name="Text 5"/>
-          <p:cNvSpPr/>
-          <p:nvPr/>
-        </p:nvSpPr>
-        <p:spPr>
-          <a:xfrm>
-            <a:off x="1691640" y="2340864"/>
-            <a:ext cx="9875520" cy="640080"/>
+            <a:endParaRPr lang="en-US" sz="1600" dirty="0"/>
+          </a:p>
+        </p:txBody>
+      </p:sp>
+      <p:sp>
+        <p:nvSpPr>
+          <p:cNvPr id="8" name="Text 6"/>
+          <p:cNvSpPr/>
+          <p:nvPr/>
+        </p:nvSpPr>
+        <p:spPr>
+          <a:xfrm>
+            <a:off x="914400" y="3657600"/>
+            <a:ext cx="2953512" cy="2011680"/>
           </a:xfrm>
           <a:prstGeom prst="rect">
             <a:avLst/>
@@ -2713,10 +2740,13 @@
           <a:lstStyle/>
           <a:p>
             <a:pPr indent="0" marL="0">
+              <a:lnSpc>
+                <a:spcPct val="106000"/>
+              </a:lnSpc>
               <a:buNone/>
             </a:pPr>
             <a:r>
-              <a:rPr lang="en-US" sz="1350" dirty="0">
+              <a:rPr lang="en-US" sz="1250" dirty="0">
                 <a:solidFill>
                   <a:srgbClr val="5F6C76"/>
                 </a:solidFill>
@@ -2726,20 +2756,47 @@
               </a:rPr>
               <a:t>The dashboard folds each span's strain average and peak vibration into one structural integrity index, live on read.</a:t>
             </a:r>
-            <a:endParaRPr lang="en-US" sz="1350" dirty="0"/>
-          </a:p>
-        </p:txBody>
-      </p:sp>
-      <p:sp>
-        <p:nvSpPr>
-          <p:cNvPr id="8" name="Shape 6"/>
-          <p:cNvSpPr/>
-          <p:nvPr/>
-        </p:nvSpPr>
-        <p:spPr>
-          <a:xfrm>
-            <a:off x="731520" y="3383280"/>
-            <a:ext cx="685800" cy="685800"/>
+            <a:endParaRPr lang="en-US" sz="1250" dirty="0"/>
+          </a:p>
+        </p:txBody>
+      </p:sp>
+      <p:sp>
+        <p:nvSpPr>
+          <p:cNvPr id="9" name="Shape 7"/>
+          <p:cNvSpPr/>
+          <p:nvPr/>
+        </p:nvSpPr>
+        <p:spPr>
+          <a:xfrm>
+            <a:off x="4416552" y="1874520"/>
+            <a:ext cx="3502152" cy="3977640"/>
+          </a:xfrm>
+          <a:prstGeom prst="roundRect">
+            <a:avLst>
+              <a:gd name="adj" fmla="val 2611"/>
+            </a:avLst>
+          </a:prstGeom>
+          <a:solidFill>
+            <a:srgbClr val="EEF2F4"/>
+          </a:solidFill>
+          <a:ln w="15240">
+            <a:solidFill>
+              <a:srgbClr val="4E6773"/>
+            </a:solidFill>
+            <a:prstDash val="solid"/>
+          </a:ln>
+        </p:spPr>
+      </p:sp>
+      <p:sp>
+        <p:nvSpPr>
+          <p:cNvPr id="10" name="Shape 8"/>
+          <p:cNvSpPr/>
+          <p:nvPr/>
+        </p:nvSpPr>
+        <p:spPr>
+          <a:xfrm>
+            <a:off x="4690872" y="2148840"/>
+            <a:ext cx="603504" cy="603504"/>
           </a:xfrm>
           <a:prstGeom prst="ellipse">
             <a:avLst/>
@@ -2752,14 +2809,14 @@
       </p:sp>
       <p:sp>
         <p:nvSpPr>
-          <p:cNvPr id="9" name="Text 7"/>
-          <p:cNvSpPr/>
-          <p:nvPr/>
-        </p:nvSpPr>
-        <p:spPr>
-          <a:xfrm>
-            <a:off x="731520" y="3383280"/>
-            <a:ext cx="685800" cy="685800"/>
+          <p:cNvPr id="11" name="Text 9"/>
+          <p:cNvSpPr/>
+          <p:nvPr/>
+        </p:nvSpPr>
+        <p:spPr>
+          <a:xfrm>
+            <a:off x="4690872" y="2148840"/>
+            <a:ext cx="603504" cy="603504"/>
           </a:xfrm>
           <a:prstGeom prst="rect">
             <a:avLst/>
@@ -2775,7 +2832,7 @@
               <a:buNone/>
             </a:pPr>
             <a:r>
-              <a:rPr lang="en-US" sz="2600" b="1" dirty="0">
+              <a:rPr lang="en-US" sz="2200" b="1" dirty="0">
                 <a:solidFill>
                   <a:srgbClr val="FFFFFF"/>
                 </a:solidFill>
@@ -2785,20 +2842,20 @@
               </a:rPr>
               <a:t>2</a:t>
             </a:r>
-            <a:endParaRPr lang="en-US" sz="2600" dirty="0"/>
-          </a:p>
-        </p:txBody>
-      </p:sp>
-      <p:sp>
-        <p:nvSpPr>
-          <p:cNvPr id="10" name="Text 8"/>
-          <p:cNvSpPr/>
-          <p:nvPr/>
-        </p:nvSpPr>
-        <p:spPr>
-          <a:xfrm>
-            <a:off x="1691640" y="3337560"/>
-            <a:ext cx="9875520" cy="411480"/>
+            <a:endParaRPr lang="en-US" sz="2200" dirty="0"/>
+          </a:p>
+        </p:txBody>
+      </p:sp>
+      <p:sp>
+        <p:nvSpPr>
+          <p:cNvPr id="12" name="Text 10"/>
+          <p:cNvSpPr/>
+          <p:nvPr/>
+        </p:nvSpPr>
+        <p:spPr>
+          <a:xfrm>
+            <a:off x="4690872" y="2898648"/>
+            <a:ext cx="2953512" cy="777240"/>
           </a:xfrm>
           <a:prstGeom prst="rect">
             <a:avLst/>
@@ -2814,7 +2871,7 @@
               <a:buNone/>
             </a:pPr>
             <a:r>
-              <a:rPr lang="en-US" sz="1800" b="1" dirty="0">
+              <a:rPr lang="en-US" sz="1600" b="1" dirty="0">
                 <a:solidFill>
                   <a:srgbClr val="1E262E"/>
                 </a:solidFill>
@@ -2824,20 +2881,20 @@
               </a:rPr>
               <a:t>Two spans, tracked live</a:t>
             </a:r>
-            <a:endParaRPr lang="en-US" sz="1800" dirty="0"/>
-          </a:p>
-        </p:txBody>
-      </p:sp>
-      <p:sp>
-        <p:nvSpPr>
-          <p:cNvPr id="11" name="Text 9"/>
-          <p:cNvSpPr/>
-          <p:nvPr/>
-        </p:nvSpPr>
-        <p:spPr>
-          <a:xfrm>
-            <a:off x="1691640" y="3758184"/>
-            <a:ext cx="9875520" cy="640080"/>
+            <a:endParaRPr lang="en-US" sz="1600" dirty="0"/>
+          </a:p>
+        </p:txBody>
+      </p:sp>
+      <p:sp>
+        <p:nvSpPr>
+          <p:cNvPr id="13" name="Text 11"/>
+          <p:cNvSpPr/>
+          <p:nvPr/>
+        </p:nvSpPr>
+        <p:spPr>
+          <a:xfrm>
+            <a:off x="4690872" y="3657600"/>
+            <a:ext cx="2953512" cy="2011680"/>
           </a:xfrm>
           <a:prstGeom prst="rect">
             <a:avLst/>
@@ -2850,10 +2907,13 @@
           <a:lstStyle/>
           <a:p>
             <a:pPr indent="0" marL="0">
+              <a:lnSpc>
+                <a:spcPct val="106000"/>
+              </a:lnSpc>
               <a:buNone/>
             </a:pPr>
             <a:r>
-              <a:rPr lang="en-US" sz="1350" dirty="0">
+              <a:rPr lang="en-US" sz="1250" dirty="0">
                 <a:solidFill>
                   <a:srgbClr val="5F6C76"/>
                 </a:solidFill>
@@ -2863,20 +2923,47 @@
               </a:rPr>
               <a:t>Span-A reads 100 percent with no active alerts and Span-B reads 76.8 percent, good and tracking real readings.</a:t>
             </a:r>
-            <a:endParaRPr lang="en-US" sz="1350" dirty="0"/>
-          </a:p>
-        </p:txBody>
-      </p:sp>
-      <p:sp>
-        <p:nvSpPr>
-          <p:cNvPr id="12" name="Shape 10"/>
-          <p:cNvSpPr/>
-          <p:nvPr/>
-        </p:nvSpPr>
-        <p:spPr>
-          <a:xfrm>
-            <a:off x="731520" y="4800600"/>
-            <a:ext cx="685800" cy="685800"/>
+            <a:endParaRPr lang="en-US" sz="1250" dirty="0"/>
+          </a:p>
+        </p:txBody>
+      </p:sp>
+      <p:sp>
+        <p:nvSpPr>
+          <p:cNvPr id="14" name="Shape 12"/>
+          <p:cNvSpPr/>
+          <p:nvPr/>
+        </p:nvSpPr>
+        <p:spPr>
+          <a:xfrm>
+            <a:off x="8193024" y="1874520"/>
+            <a:ext cx="3502152" cy="3977640"/>
+          </a:xfrm>
+          <a:prstGeom prst="roundRect">
+            <a:avLst>
+              <a:gd name="adj" fmla="val 2611"/>
+            </a:avLst>
+          </a:prstGeom>
+          <a:solidFill>
+            <a:srgbClr val="EEF2F4"/>
+          </a:solidFill>
+          <a:ln w="15240">
+            <a:solidFill>
+              <a:srgbClr val="4E6773"/>
+            </a:solidFill>
+            <a:prstDash val="solid"/>
+          </a:ln>
+        </p:spPr>
+      </p:sp>
+      <p:sp>
+        <p:nvSpPr>
+          <p:cNvPr id="15" name="Shape 13"/>
+          <p:cNvSpPr/>
+          <p:nvPr/>
+        </p:nvSpPr>
+        <p:spPr>
+          <a:xfrm>
+            <a:off x="8467344" y="2148840"/>
+            <a:ext cx="603504" cy="603504"/>
           </a:xfrm>
           <a:prstGeom prst="ellipse">
             <a:avLst/>
@@ -2889,14 +2976,14 @@
       </p:sp>
       <p:sp>
         <p:nvSpPr>
-          <p:cNvPr id="13" name="Text 11"/>
-          <p:cNvSpPr/>
-          <p:nvPr/>
-        </p:nvSpPr>
-        <p:spPr>
-          <a:xfrm>
-            <a:off x="731520" y="4800600"/>
-            <a:ext cx="685800" cy="685800"/>
+          <p:cNvPr id="16" name="Text 14"/>
+          <p:cNvSpPr/>
+          <p:nvPr/>
+        </p:nvSpPr>
+        <p:spPr>
+          <a:xfrm>
+            <a:off x="8467344" y="2148840"/>
+            <a:ext cx="603504" cy="603504"/>
           </a:xfrm>
           <a:prstGeom prst="rect">
             <a:avLst/>
@@ -2912,7 +2999,7 @@
               <a:buNone/>
             </a:pPr>
             <a:r>
-              <a:rPr lang="en-US" sz="2600" b="1" dirty="0">
+              <a:rPr lang="en-US" sz="2200" b="1" dirty="0">
                 <a:solidFill>
                   <a:srgbClr val="FFFFFF"/>
                 </a:solidFill>
@@ -2922,20 +3009,20 @@
               </a:rPr>
               <a:t>3</a:t>
             </a:r>
-            <a:endParaRPr lang="en-US" sz="2600" dirty="0"/>
-          </a:p>
-        </p:txBody>
-      </p:sp>
-      <p:sp>
-        <p:nvSpPr>
-          <p:cNvPr id="14" name="Text 12"/>
-          <p:cNvSpPr/>
-          <p:nvPr/>
-        </p:nvSpPr>
-        <p:spPr>
-          <a:xfrm>
-            <a:off x="1691640" y="4754880"/>
-            <a:ext cx="9875520" cy="411480"/>
+            <a:endParaRPr lang="en-US" sz="2200" dirty="0"/>
+          </a:p>
+        </p:txBody>
+      </p:sp>
+      <p:sp>
+        <p:nvSpPr>
+          <p:cNvPr id="17" name="Text 15"/>
+          <p:cNvSpPr/>
+          <p:nvPr/>
+        </p:nvSpPr>
+        <p:spPr>
+          <a:xfrm>
+            <a:off x="8467344" y="2898648"/>
+            <a:ext cx="2953512" cy="777240"/>
           </a:xfrm>
           <a:prstGeom prst="rect">
             <a:avLst/>
@@ -2951,7 +3038,7 @@
               <a:buNone/>
             </a:pPr>
             <a:r>
-              <a:rPr lang="en-US" sz="1800" b="1" dirty="0">
+              <a:rPr lang="en-US" sz="1600" b="1" dirty="0">
                 <a:solidFill>
                   <a:srgbClr val="1E262E"/>
                 </a:solidFill>
@@ -2961,20 +3048,20 @@
               </a:rPr>
               <a:t>The index reaches zero where an alert fires</a:t>
             </a:r>
-            <a:endParaRPr lang="en-US" sz="1800" dirty="0"/>
-          </a:p>
-        </p:txBody>
-      </p:sp>
-      <p:sp>
-        <p:nvSpPr>
-          <p:cNvPr id="15" name="Text 13"/>
-          <p:cNvSpPr/>
-          <p:nvPr/>
-        </p:nvSpPr>
-        <p:spPr>
-          <a:xfrm>
-            <a:off x="1691640" y="5175504"/>
-            <a:ext cx="9875520" cy="640080"/>
+            <a:endParaRPr lang="en-US" sz="1600" dirty="0"/>
+          </a:p>
+        </p:txBody>
+      </p:sp>
+      <p:sp>
+        <p:nvSpPr>
+          <p:cNvPr id="18" name="Text 16"/>
+          <p:cNvSpPr/>
+          <p:nvPr/>
+        </p:nvSpPr>
+        <p:spPr>
+          <a:xfrm>
+            <a:off x="8467344" y="3657600"/>
+            <a:ext cx="2953512" cy="2011680"/>
           </a:xfrm>
           <a:prstGeom prst="rect">
             <a:avLst/>
@@ -2987,10 +3074,13 @@
           <a:lstStyle/>
           <a:p>
             <a:pPr indent="0" marL="0">
+              <a:lnSpc>
+                <a:spcPct val="106000"/>
+              </a:lnSpc>
               <a:buNone/>
             </a:pPr>
             <a:r>
-              <a:rPr lang="en-US" sz="1350" dirty="0">
+              <a:rPr lang="en-US" sz="1250" dirty="0">
                 <a:solidFill>
                   <a:srgbClr val="5F6C76"/>
                 </a:solidFill>
@@ -3000,46 +3090,7 @@
               </a:rPr>
               <a:t>Its critical bound equals the alert threshold, so the number and the alarm agree by construction.</a:t>
             </a:r>
-            <a:endParaRPr lang="en-US" sz="1350" dirty="0"/>
-          </a:p>
-        </p:txBody>
-      </p:sp>
-      <p:sp>
-        <p:nvSpPr>
-          <p:cNvPr id="16" name="Text 14"/>
-          <p:cNvSpPr/>
-          <p:nvPr/>
-        </p:nvSpPr>
-        <p:spPr>
-          <a:xfrm>
-            <a:off x="640080" y="6263640"/>
-            <a:ext cx="10972800" cy="365760"/>
-          </a:xfrm>
-          <a:prstGeom prst="rect">
-            <a:avLst/>
-          </a:prstGeom>
-          <a:noFill/>
-          <a:ln/>
-        </p:spPr>
-        <p:txBody>
-          <a:bodyPr wrap="square" rtlCol="0" anchor="ctr"/>
-          <a:lstStyle/>
-          <a:p>
-            <a:pPr indent="0" marL="0">
-              <a:buNone/>
-            </a:pPr>
-            <a:r>
-              <a:rPr lang="en-US" sz="1300" i="1" dirty="0">
-                <a:solidFill>
-                  <a:srgbClr val="74899A"/>
-                </a:solidFill>
-                <a:latin typeface="Calibri" pitchFamily="34" charset="0"/>
-                <a:ea typeface="Calibri" pitchFamily="34" charset="-122"/>
-                <a:cs typeface="Calibri" pitchFamily="34" charset="-120"/>
-              </a:rPr>
-              <a:t>Switch to the live dashboard here — backup video ready.</a:t>
-            </a:r>
-            <a:endParaRPr lang="en-US" sz="1300" dirty="0"/>
+            <a:endParaRPr lang="en-US" sz="1250" dirty="0"/>
           </a:p>
         </p:txBody>
       </p:sp>
@@ -3122,12 +3173,12 @@
         </p:nvSpPr>
         <p:spPr>
           <a:xfrm>
-            <a:off x="731520" y="1920240"/>
-            <a:ext cx="10698480" cy="1965960"/>
+            <a:off x="640080" y="1874520"/>
+            <a:ext cx="4937760" cy="4160520"/>
           </a:xfrm>
           <a:prstGeom prst="roundRect">
             <a:avLst>
-              <a:gd name="adj" fmla="val 4651"/>
+              <a:gd name="adj" fmla="val 2198"/>
             </a:avLst>
           </a:prstGeom>
           <a:solidFill>
@@ -3149,7 +3200,7 @@
         </p:nvSpPr>
         <p:spPr>
           <a:xfrm>
-            <a:off x="1005840" y="2103120"/>
+            <a:off x="960120" y="2103120"/>
             <a:ext cx="3657600" cy="457200"/>
           </a:xfrm>
           <a:prstGeom prst="rect">
@@ -3188,8 +3239,8 @@
         </p:nvSpPr>
         <p:spPr>
           <a:xfrm>
-            <a:off x="1005840" y="2578608"/>
-            <a:ext cx="9966960" cy="1188720"/>
+            <a:off x="960120" y="2651760"/>
+            <a:ext cx="4343400" cy="3200400"/>
           </a:xfrm>
           <a:prstGeom prst="rect">
             <a:avLst/>
@@ -3203,12 +3254,12 @@
           <a:p>
             <a:pPr indent="0" marL="0">
               <a:lnSpc>
-                <a:spcPct val="105000"/>
+                <a:spcPct val="112000"/>
               </a:lnSpc>
               <a:buNone/>
             </a:pPr>
             <a:r>
-              <a:rPr lang="en-US" sz="1300" dirty="0">
+              <a:rPr lang="en-US" sz="1350" dirty="0">
                 <a:solidFill>
                   <a:srgbClr val="1E262E"/>
                 </a:solidFill>
@@ -3218,7 +3269,7 @@
               </a:rPr>
               <a:t>Every project here deploys through one shared Terraform module, and its local state file already tracked a different live AWS stack under the default workspace. Nothing in my code was wrong — but applied against that workspace, Terraform reconciles state and plans to destroy the other deployment's live resources. The only warning is one line of plan output.</a:t>
             </a:r>
-            <a:endParaRPr lang="en-US" sz="1300" dirty="0"/>
+            <a:endParaRPr lang="en-US" sz="1350" dirty="0"/>
           </a:p>
         </p:txBody>
       </p:sp>
@@ -3230,12 +3281,12 @@
         </p:nvSpPr>
         <p:spPr>
           <a:xfrm>
-            <a:off x="731520" y="4041648"/>
-            <a:ext cx="10698480" cy="1965960"/>
+            <a:off x="6611112" y="1874520"/>
+            <a:ext cx="4937760" cy="4160520"/>
           </a:xfrm>
           <a:prstGeom prst="roundRect">
             <a:avLst>
-              <a:gd name="adj" fmla="val 4651"/>
+              <a:gd name="adj" fmla="val 2198"/>
             </a:avLst>
           </a:prstGeom>
           <a:solidFill>
@@ -3257,7 +3308,7 @@
         </p:nvSpPr>
         <p:spPr>
           <a:xfrm>
-            <a:off x="1005840" y="4224528"/>
+            <a:off x="6931152" y="2103120"/>
             <a:ext cx="3657600" cy="457200"/>
           </a:xfrm>
           <a:prstGeom prst="rect">
@@ -3296,8 +3347,8 @@
         </p:nvSpPr>
         <p:spPr>
           <a:xfrm>
-            <a:off x="1005840" y="4700016"/>
-            <a:ext cx="9966960" cy="1188720"/>
+            <a:off x="6931152" y="2651760"/>
+            <a:ext cx="4343400" cy="3200400"/>
           </a:xfrm>
           <a:prstGeom prst="rect">
             <a:avLst/>
@@ -3311,12 +3362,12 @@
           <a:p>
             <a:pPr indent="0" marL="0">
               <a:lnSpc>
-                <a:spcPct val="105000"/>
+                <a:spcPct val="112000"/>
               </a:lnSpc>
               <a:buNone/>
             </a:pPr>
             <a:r>
-              <a:rPr lang="en-US" sz="1300" dirty="0">
+              <a:rPr lang="en-US" sz="1350" dirty="0">
                 <a:solidFill>
                   <a:srgbClr val="1E262E"/>
                 </a:solidFill>
@@ -3326,9 +3377,29 @@
               </a:rPr>
               <a:t>A dedicated workspace was created first, and the re-plan read "24 to add, 0 to change, 0 to destroy"; then a single apply built all 24 resources, healthy within a minute. Never apply an unread plan. The same pre-deploy audit also caught two silent defects — a pagination undercount and unbatched publishing — both fixed and regression-tested before launch.</a:t>
             </a:r>
-            <a:endParaRPr lang="en-US" sz="1300" dirty="0"/>
-          </a:p>
-        </p:txBody>
+            <a:endParaRPr lang="en-US" sz="1350" dirty="0"/>
+          </a:p>
+        </p:txBody>
+      </p:sp>
+      <p:sp>
+        <p:nvSpPr>
+          <p:cNvPr id="9" name="Shape 7"/>
+          <p:cNvSpPr/>
+          <p:nvPr/>
+        </p:nvSpPr>
+        <p:spPr>
+          <a:xfrm>
+            <a:off x="5669280" y="3703320"/>
+            <a:ext cx="841248" cy="512064"/>
+          </a:xfrm>
+          <a:prstGeom prst="rightArrow">
+            <a:avLst/>
+          </a:prstGeom>
+          <a:solidFill>
+            <a:srgbClr val="33454E"/>
+          </a:solidFill>
+          <a:ln/>
+        </p:spPr>
       </p:sp>
     </p:spTree>
   </p:cSld>

--- a/ppt/KasireddyVadicherla_X25104047_bridge-structural-health.pptx
+++ b/ppt/KasireddyVadicherla_X25104047_bridge-structural-health.pptx
@@ -1279,14 +1279,9 @@
             </a:avLst>
           </a:prstGeom>
           <a:solidFill>
-            <a:srgbClr val="262F38"/>
-          </a:solidFill>
-          <a:ln w="12700">
-            <a:solidFill>
-              <a:srgbClr val="E0A63C"/>
-            </a:solidFill>
-            <a:prstDash val="solid"/>
-          </a:ln>
+            <a:srgbClr val="E0A63C"/>
+          </a:solidFill>
+          <a:ln/>
         </p:spPr>
       </p:sp>
       <p:sp>
@@ -1316,7 +1311,7 @@
             <a:r>
               <a:rPr lang="en-US" sz="1350" b="1" dirty="0">
                 <a:solidFill>
-                  <a:srgbClr val="E0A63C"/>
+                  <a:srgbClr val="1E2630"/>
                 </a:solidFill>
                 <a:latin typeface="Calibri" pitchFamily="34" charset="0"/>
                 <a:ea typeface="Calibri" pitchFamily="34" charset="-122"/>
@@ -1345,14 +1340,9 @@
             </a:avLst>
           </a:prstGeom>
           <a:solidFill>
-            <a:srgbClr val="262F38"/>
-          </a:solidFill>
-          <a:ln w="12700">
-            <a:solidFill>
-              <a:srgbClr val="E0A63C"/>
-            </a:solidFill>
-            <a:prstDash val="solid"/>
-          </a:ln>
+            <a:srgbClr val="E0A63C"/>
+          </a:solidFill>
+          <a:ln/>
         </p:spPr>
       </p:sp>
       <p:sp>
@@ -1382,7 +1372,7 @@
             <a:r>
               <a:rPr lang="en-US" sz="1350" b="1" dirty="0">
                 <a:solidFill>
-                  <a:srgbClr val="E0A63C"/>
+                  <a:srgbClr val="1E2630"/>
                 </a:solidFill>
                 <a:latin typeface="Calibri" pitchFamily="34" charset="0"/>
                 <a:ea typeface="Calibri" pitchFamily="34" charset="-122"/>
@@ -1411,14 +1401,9 @@
             </a:avLst>
           </a:prstGeom>
           <a:solidFill>
-            <a:srgbClr val="262F38"/>
-          </a:solidFill>
-          <a:ln w="12700">
-            <a:solidFill>
-              <a:srgbClr val="E0A63C"/>
-            </a:solidFill>
-            <a:prstDash val="solid"/>
-          </a:ln>
+            <a:srgbClr val="E0A63C"/>
+          </a:solidFill>
+          <a:ln/>
         </p:spPr>
       </p:sp>
       <p:sp>
@@ -1448,7 +1433,7 @@
             <a:r>
               <a:rPr lang="en-US" sz="1350" b="1" dirty="0">
                 <a:solidFill>
-                  <a:srgbClr val="E0A63C"/>
+                  <a:srgbClr val="1E2630"/>
                 </a:solidFill>
                 <a:latin typeface="Calibri" pitchFamily="34" charset="0"/>
                 <a:ea typeface="Calibri" pitchFamily="34" charset="-122"/>
@@ -1484,17 +1469,6 @@
             <a:pPr algn="ctr" indent="0" marL="0">
               <a:buNone/>
             </a:pPr>
-            <a:r>
-              <a:rPr lang="en-US" sz="1300" dirty="0">
-                <a:solidFill>
-                  <a:srgbClr val="5F6C76"/>
-                </a:solidFill>
-                <a:latin typeface="Calibri" pitchFamily="34" charset="0"/>
-                <a:ea typeface="Calibri" pitchFamily="34" charset="-122"/>
-                <a:cs typeface="Calibri" pitchFamily="34" charset="-120"/>
-              </a:rPr>
-              <a:t>Fog &amp; Edge Computing (H9FECC)   ·   deployed live on AWS</a:t>
-            </a:r>
             <a:endParaRPr lang="en-US" sz="1300" dirty="0"/>
           </a:p>
         </p:txBody>

--- a/ppt/KasireddyVadicherla_X25104047_bridge-structural-health.pptx
+++ b/ppt/KasireddyVadicherla_X25104047_bridge-structural-health.pptx
@@ -1124,7 +1124,7 @@
     <p:bg>
       <p:bgPr>
         <a:solidFill>
-          <a:srgbClr val="1E2630"/>
+          <a:srgbClr val="EEF0F1"/>
         </a:solidFill>
       </p:bgPr>
     </p:bg>
@@ -1144,14 +1144,99 @@
       </p:grpSpPr>
       <p:sp>
         <p:nvSpPr>
-          <p:cNvPr id="2" name="Text 0"/>
-          <p:cNvSpPr/>
-          <p:nvPr/>
-        </p:nvSpPr>
-        <p:spPr>
-          <a:xfrm>
-            <a:off x="548640" y="1051560"/>
-            <a:ext cx="11064240" cy="1188720"/>
+          <p:cNvPr id="2" name="Shape 0"/>
+          <p:cNvSpPr/>
+          <p:nvPr/>
+        </p:nvSpPr>
+        <p:spPr>
+          <a:xfrm>
+            <a:off x="4114800" y="685800"/>
+            <a:ext cx="3959352" cy="0"/>
+          </a:xfrm>
+          <a:prstGeom prst="line">
+            <a:avLst/>
+          </a:prstGeom>
+          <a:noFill/>
+          <a:ln w="9525">
+            <a:solidFill>
+              <a:srgbClr val="5F6B74"/>
+            </a:solidFill>
+            <a:prstDash val="solid"/>
+          </a:ln>
+        </p:spPr>
+      </p:sp>
+      <p:sp>
+        <p:nvSpPr>
+          <p:cNvPr id="3" name="Shape 1"/>
+          <p:cNvSpPr/>
+          <p:nvPr/>
+        </p:nvSpPr>
+        <p:spPr>
+          <a:xfrm>
+            <a:off x="5986120" y="576072"/>
+            <a:ext cx="219456" cy="219456"/>
+          </a:xfrm>
+          <a:prstGeom prst="diamond">
+            <a:avLst/>
+          </a:prstGeom>
+          <a:solidFill>
+            <a:srgbClr val="B3302A"/>
+          </a:solidFill>
+          <a:ln/>
+        </p:spPr>
+      </p:sp>
+      <p:sp>
+        <p:nvSpPr>
+          <p:cNvPr id="4" name="Text 2"/>
+          <p:cNvSpPr/>
+          <p:nvPr/>
+        </p:nvSpPr>
+        <p:spPr>
+          <a:xfrm>
+            <a:off x="758952" y="1828800"/>
+            <a:ext cx="10637215" cy="1645920"/>
+          </a:xfrm>
+          <a:prstGeom prst="rect">
+            <a:avLst/>
+          </a:prstGeom>
+          <a:noFill/>
+          <a:ln/>
+        </p:spPr>
+        <p:txBody>
+          <a:bodyPr wrap="square" rtlCol="0" anchor="t"/>
+          <a:lstStyle/>
+          <a:p>
+            <a:pPr indent="0" marL="0">
+              <a:lnSpc>
+                <a:spcPct val="98000"/>
+              </a:lnSpc>
+              <a:buNone/>
+            </a:pPr>
+            <a:r>
+              <a:rPr lang="en-US" sz="3800" b="1" dirty="0">
+                <a:solidFill>
+                  <a:srgbClr val="232C33"/>
+                </a:solidFill>
+                <a:latin typeface="Century Schoolbook" pitchFamily="34" charset="0"/>
+                <a:ea typeface="Century Schoolbook" pitchFamily="34" charset="-122"/>
+                <a:cs typeface="Century Schoolbook" pitchFamily="34" charset="-120"/>
+              </a:rPr>
+              <a:t>Bridge Structural Health Monitoring</a:t>
+            </a:r>
+            <a:endParaRPr lang="en-US" sz="3800" dirty="0"/>
+          </a:p>
+        </p:txBody>
+      </p:sp>
+      <p:sp>
+        <p:nvSpPr>
+          <p:cNvPr id="5" name="Text 3"/>
+          <p:cNvSpPr/>
+          <p:nvPr/>
+        </p:nvSpPr>
+        <p:spPr>
+          <a:xfrm>
+            <a:off x="777240" y="3520440"/>
+            <a:ext cx="10637215" cy="365760"/>
           </a:xfrm>
           <a:prstGeom prst="rect">
             <a:avLst/>
@@ -1163,52 +1248,13 @@
           <a:bodyPr wrap="square" rtlCol="0" anchor="ctr"/>
           <a:lstStyle/>
           <a:p>
-            <a:pPr algn="ctr" indent="0" marL="0">
-              <a:buNone/>
-            </a:pPr>
-            <a:r>
-              <a:rPr lang="en-US" sz="3600" b="1" dirty="0">
-                <a:solidFill>
-                  <a:srgbClr val="FFFFFF"/>
-                </a:solidFill>
-                <a:latin typeface="Bookman Old Style" pitchFamily="34" charset="0"/>
-                <a:ea typeface="Bookman Old Style" pitchFamily="34" charset="-122"/>
-                <a:cs typeface="Bookman Old Style" pitchFamily="34" charset="-120"/>
-              </a:rPr>
-              <a:t>Bridge Structural Health Monitoring</a:t>
-            </a:r>
-            <a:endParaRPr lang="en-US" sz="3600" dirty="0"/>
-          </a:p>
-        </p:txBody>
-      </p:sp>
-      <p:sp>
-        <p:nvSpPr>
-          <p:cNvPr id="3" name="Text 1"/>
-          <p:cNvSpPr/>
-          <p:nvPr/>
-        </p:nvSpPr>
-        <p:spPr>
-          <a:xfrm>
-            <a:off x="548640" y="2286000"/>
-            <a:ext cx="11064240" cy="365760"/>
-          </a:xfrm>
-          <a:prstGeom prst="rect">
-            <a:avLst/>
-          </a:prstGeom>
-          <a:noFill/>
-          <a:ln/>
-        </p:spPr>
-        <p:txBody>
-          <a:bodyPr wrap="square" rtlCol="0" anchor="ctr"/>
-          <a:lstStyle/>
-          <a:p>
-            <a:pPr algn="ctr" indent="0" marL="0">
-              <a:buNone/>
-            </a:pPr>
-            <a:r>
-              <a:rPr lang="en-US" sz="1600" dirty="0">
-                <a:solidFill>
-                  <a:srgbClr val="74899A"/>
+            <a:pPr indent="0" marL="0">
+              <a:buNone/>
+            </a:pPr>
+            <a:r>
+              <a:rPr lang="en-US" sz="1450" dirty="0">
+                <a:solidFill>
+                  <a:srgbClr val="5F6B74"/>
                 </a:solidFill>
                 <a:latin typeface="Calibri" pitchFamily="34" charset="0"/>
                 <a:ea typeface="Calibri" pitchFamily="34" charset="-122"/>
@@ -1216,41 +1262,41 @@
               </a:rPr>
               <a:t>Kasireddy Vadicherla   ·   X25104047</a:t>
             </a:r>
-            <a:endParaRPr lang="en-US" sz="1600" dirty="0"/>
-          </a:p>
-        </p:txBody>
-      </p:sp>
-      <p:sp>
-        <p:nvSpPr>
-          <p:cNvPr id="4" name="Text 2"/>
-          <p:cNvSpPr/>
-          <p:nvPr/>
-        </p:nvSpPr>
-        <p:spPr>
-          <a:xfrm>
-            <a:off x="1463040" y="2926080"/>
-            <a:ext cx="9235440" cy="1371600"/>
-          </a:xfrm>
-          <a:prstGeom prst="rect">
-            <a:avLst/>
-          </a:prstGeom>
-          <a:noFill/>
-          <a:ln/>
-        </p:spPr>
-        <p:txBody>
-          <a:bodyPr wrap="square" rtlCol="0" anchor="ctr"/>
-          <a:lstStyle/>
-          <a:p>
-            <a:pPr algn="ctr" indent="0" marL="0">
+            <a:endParaRPr lang="en-US" sz="1450" dirty="0"/>
+          </a:p>
+        </p:txBody>
+      </p:sp>
+      <p:sp>
+        <p:nvSpPr>
+          <p:cNvPr id="6" name="Text 4"/>
+          <p:cNvSpPr/>
+          <p:nvPr/>
+        </p:nvSpPr>
+        <p:spPr>
+          <a:xfrm>
+            <a:off x="777240" y="4114800"/>
+            <a:ext cx="8138160" cy="1143000"/>
+          </a:xfrm>
+          <a:prstGeom prst="rect">
+            <a:avLst/>
+          </a:prstGeom>
+          <a:noFill/>
+          <a:ln/>
+        </p:spPr>
+        <p:txBody>
+          <a:bodyPr wrap="square" rtlCol="0" anchor="t"/>
+          <a:lstStyle/>
+          <a:p>
+            <a:pPr indent="0" marL="0">
               <a:lnSpc>
-                <a:spcPct val="110000"/>
+                <a:spcPct val="130000"/>
               </a:lnSpc>
               <a:buNone/>
             </a:pPr>
             <a:r>
-              <a:rPr lang="en-US" sz="2000" dirty="0">
-                <a:solidFill>
-                  <a:srgbClr val="D2DBE0"/>
+              <a:rPr lang="en-US" sz="1400" dirty="0">
+                <a:solidFill>
+                  <a:srgbClr val="232C33"/>
                 </a:solidFill>
                 <a:latin typeface="Calibri" pitchFamily="34" charset="0"/>
                 <a:ea typeface="Calibri" pitchFamily="34" charset="-122"/>
@@ -1258,218 +1304,7 @@
               </a:rPr>
               <a:t>Road authorities assess bridges by visual inspection on a cycle measured in years — while the deck keeps working, strain cycles and thermal joint movement accumulate unseen every day.</a:t>
             </a:r>
-            <a:endParaRPr lang="en-US" sz="2000" dirty="0"/>
-          </a:p>
-        </p:txBody>
-      </p:sp>
-      <p:sp>
-        <p:nvSpPr>
-          <p:cNvPr id="5" name="Shape 3"/>
-          <p:cNvSpPr/>
-          <p:nvPr/>
-        </p:nvSpPr>
-        <p:spPr>
-          <a:xfrm>
-            <a:off x="1889608" y="4526280"/>
-            <a:ext cx="2651760" cy="566928"/>
-          </a:xfrm>
-          <a:prstGeom prst="roundRect">
-            <a:avLst>
-              <a:gd name="adj" fmla="val 50000"/>
-            </a:avLst>
-          </a:prstGeom>
-          <a:solidFill>
-            <a:srgbClr val="E0A63C"/>
-          </a:solidFill>
-          <a:ln/>
-        </p:spPr>
-      </p:sp>
-      <p:sp>
-        <p:nvSpPr>
-          <p:cNvPr id="6" name="Text 4"/>
-          <p:cNvSpPr/>
-          <p:nvPr/>
-        </p:nvSpPr>
-        <p:spPr>
-          <a:xfrm>
-            <a:off x="1889608" y="4526280"/>
-            <a:ext cx="2651760" cy="566928"/>
-          </a:xfrm>
-          <a:prstGeom prst="rect">
-            <a:avLst/>
-          </a:prstGeom>
-          <a:noFill/>
-          <a:ln/>
-        </p:spPr>
-        <p:txBody>
-          <a:bodyPr wrap="square" lIns="0" tIns="0" rIns="0" bIns="0" rtlCol="0" anchor="ctr"/>
-          <a:lstStyle/>
-          <a:p>
-            <a:pPr algn="ctr" indent="0" marL="0">
-              <a:buNone/>
-            </a:pPr>
-            <a:r>
-              <a:rPr lang="en-US" sz="1350" b="1" dirty="0">
-                <a:solidFill>
-                  <a:srgbClr val="1E2630"/>
-                </a:solidFill>
-                <a:latin typeface="Calibri" pitchFamily="34" charset="0"/>
-                <a:ea typeface="Calibri" pitchFamily="34" charset="-122"/>
-                <a:cs typeface="Calibri" pitchFamily="34" charset="-120"/>
-              </a:rPr>
-              <a:t>Years between inspections</a:t>
-            </a:r>
-            <a:endParaRPr lang="en-US" sz="1350" dirty="0"/>
-          </a:p>
-        </p:txBody>
-      </p:sp>
-      <p:sp>
-        <p:nvSpPr>
-          <p:cNvPr id="7" name="Shape 5"/>
-          <p:cNvSpPr/>
-          <p:nvPr/>
-        </p:nvSpPr>
-        <p:spPr>
-          <a:xfrm>
-            <a:off x="4769968" y="4526280"/>
-            <a:ext cx="2651760" cy="566928"/>
-          </a:xfrm>
-          <a:prstGeom prst="roundRect">
-            <a:avLst>
-              <a:gd name="adj" fmla="val 50000"/>
-            </a:avLst>
-          </a:prstGeom>
-          <a:solidFill>
-            <a:srgbClr val="E0A63C"/>
-          </a:solidFill>
-          <a:ln/>
-        </p:spPr>
-      </p:sp>
-      <p:sp>
-        <p:nvSpPr>
-          <p:cNvPr id="8" name="Text 6"/>
-          <p:cNvSpPr/>
-          <p:nvPr/>
-        </p:nvSpPr>
-        <p:spPr>
-          <a:xfrm>
-            <a:off x="4769968" y="4526280"/>
-            <a:ext cx="2651760" cy="566928"/>
-          </a:xfrm>
-          <a:prstGeom prst="rect">
-            <a:avLst/>
-          </a:prstGeom>
-          <a:noFill/>
-          <a:ln/>
-        </p:spPr>
-        <p:txBody>
-          <a:bodyPr wrap="square" lIns="0" tIns="0" rIns="0" bIns="0" rtlCol="0" anchor="ctr"/>
-          <a:lstStyle/>
-          <a:p>
-            <a:pPr algn="ctr" indent="0" marL="0">
-              <a:buNone/>
-            </a:pPr>
-            <a:r>
-              <a:rPr lang="en-US" sz="1350" b="1" dirty="0">
-                <a:solidFill>
-                  <a:srgbClr val="1E2630"/>
-                </a:solidFill>
-                <a:latin typeface="Calibri" pitchFamily="34" charset="0"/>
-                <a:ea typeface="Calibri" pitchFamily="34" charset="-122"/>
-                <a:cs typeface="Calibri" pitchFamily="34" charset="-120"/>
-              </a:rPr>
-              <a:t>24/7 strain accrues</a:t>
-            </a:r>
-            <a:endParaRPr lang="en-US" sz="1350" dirty="0"/>
-          </a:p>
-        </p:txBody>
-      </p:sp>
-      <p:sp>
-        <p:nvSpPr>
-          <p:cNvPr id="9" name="Shape 7"/>
-          <p:cNvSpPr/>
-          <p:nvPr/>
-        </p:nvSpPr>
-        <p:spPr>
-          <a:xfrm>
-            <a:off x="7650328" y="4526280"/>
-            <a:ext cx="2651760" cy="566928"/>
-          </a:xfrm>
-          <a:prstGeom prst="roundRect">
-            <a:avLst>
-              <a:gd name="adj" fmla="val 50000"/>
-            </a:avLst>
-          </a:prstGeom>
-          <a:solidFill>
-            <a:srgbClr val="E0A63C"/>
-          </a:solidFill>
-          <a:ln/>
-        </p:spPr>
-      </p:sp>
-      <p:sp>
-        <p:nvSpPr>
-          <p:cNvPr id="10" name="Text 8"/>
-          <p:cNvSpPr/>
-          <p:nvPr/>
-        </p:nvSpPr>
-        <p:spPr>
-          <a:xfrm>
-            <a:off x="7650328" y="4526280"/>
-            <a:ext cx="2651760" cy="566928"/>
-          </a:xfrm>
-          <a:prstGeom prst="rect">
-            <a:avLst/>
-          </a:prstGeom>
-          <a:noFill/>
-          <a:ln/>
-        </p:spPr>
-        <p:txBody>
-          <a:bodyPr wrap="square" lIns="0" tIns="0" rIns="0" bIns="0" rtlCol="0" anchor="ctr"/>
-          <a:lstStyle/>
-          <a:p>
-            <a:pPr algn="ctr" indent="0" marL="0">
-              <a:buNone/>
-            </a:pPr>
-            <a:r>
-              <a:rPr lang="en-US" sz="1350" b="1" dirty="0">
-                <a:solidFill>
-                  <a:srgbClr val="1E2630"/>
-                </a:solidFill>
-                <a:latin typeface="Calibri" pitchFamily="34" charset="0"/>
-                <a:ea typeface="Calibri" pitchFamily="34" charset="-122"/>
-                <a:cs typeface="Calibri" pitchFamily="34" charset="-120"/>
-              </a:rPr>
-              <a:t>0 visibility in the gap</a:t>
-            </a:r>
-            <a:endParaRPr lang="en-US" sz="1350" dirty="0"/>
-          </a:p>
-        </p:txBody>
-      </p:sp>
-      <p:sp>
-        <p:nvSpPr>
-          <p:cNvPr id="11" name="Text 9"/>
-          <p:cNvSpPr/>
-          <p:nvPr/>
-        </p:nvSpPr>
-        <p:spPr>
-          <a:xfrm>
-            <a:off x="548640" y="6126480"/>
-            <a:ext cx="11064240" cy="365760"/>
-          </a:xfrm>
-          <a:prstGeom prst="rect">
-            <a:avLst/>
-          </a:prstGeom>
-          <a:noFill/>
-          <a:ln/>
-        </p:spPr>
-        <p:txBody>
-          <a:bodyPr wrap="square" rtlCol="0" anchor="ctr"/>
-          <a:lstStyle/>
-          <a:p>
-            <a:pPr algn="ctr" indent="0" marL="0">
-              <a:buNone/>
-            </a:pPr>
-            <a:endParaRPr lang="en-US" sz="1300" dirty="0"/>
+            <a:endParaRPr lang="en-US" sz="1400" dirty="0"/>
           </a:p>
         </p:txBody>
       </p:sp>
@@ -1487,7 +1322,7 @@
     <p:bg>
       <p:bgPr>
         <a:solidFill>
-          <a:srgbClr val="FFFFFF"/>
+          <a:srgbClr val="EEF0F1"/>
         </a:solidFill>
       </p:bgPr>
     </p:bg>
@@ -1507,65 +1342,22 @@
       </p:grpSpPr>
       <p:sp>
         <p:nvSpPr>
-          <p:cNvPr id="2" name="Text 0"/>
-          <p:cNvSpPr/>
-          <p:nvPr/>
-        </p:nvSpPr>
-        <p:spPr>
-          <a:xfrm>
-            <a:off x="640080" y="457200"/>
-            <a:ext cx="10972800" cy="640080"/>
-          </a:xfrm>
-          <a:prstGeom prst="rect">
-            <a:avLst/>
-          </a:prstGeom>
-          <a:noFill/>
-          <a:ln/>
-        </p:spPr>
-        <p:txBody>
-          <a:bodyPr wrap="square" rtlCol="0" anchor="ctr"/>
-          <a:lstStyle/>
-          <a:p>
-            <a:pPr indent="0" marL="0">
-              <a:buNone/>
-            </a:pPr>
-            <a:r>
-              <a:rPr lang="en-US" sz="3000" b="1" dirty="0">
-                <a:solidFill>
-                  <a:srgbClr val="1E262E"/>
-                </a:solidFill>
-                <a:latin typeface="Bookman Old Style" pitchFamily="34" charset="0"/>
-                <a:ea typeface="Bookman Old Style" pitchFamily="34" charset="-122"/>
-                <a:cs typeface="Bookman Old Style" pitchFamily="34" charset="-120"/>
-              </a:rPr>
-              <a:t>What I Built — Bridge to Browser</a:t>
-            </a:r>
-            <a:endParaRPr lang="en-US" sz="3000" dirty="0"/>
-          </a:p>
-        </p:txBody>
-      </p:sp>
-      <p:sp>
-        <p:nvSpPr>
-          <p:cNvPr id="3" name="Shape 1"/>
-          <p:cNvSpPr/>
-          <p:nvPr/>
-        </p:nvSpPr>
-        <p:spPr>
-          <a:xfrm>
-            <a:off x="640080" y="1874520"/>
-            <a:ext cx="2286000" cy="1280160"/>
-          </a:xfrm>
-          <a:prstGeom prst="roundRect">
-            <a:avLst>
-              <a:gd name="adj" fmla="val 7143"/>
-            </a:avLst>
-          </a:prstGeom>
-          <a:solidFill>
-            <a:srgbClr val="EEF2F4"/>
-          </a:solidFill>
-          <a:ln w="19050">
+          <p:cNvPr id="2" name="Shape 0"/>
+          <p:cNvSpPr/>
+          <p:nvPr/>
+        </p:nvSpPr>
+        <p:spPr>
+          <a:xfrm>
+            <a:off x="4114800" y="685800"/>
+            <a:ext cx="3959352" cy="0"/>
+          </a:xfrm>
+          <a:prstGeom prst="line">
+            <a:avLst/>
+          </a:prstGeom>
+          <a:noFill/>
+          <a:ln w="9525">
             <a:solidFill>
-              <a:srgbClr val="74899A"/>
+              <a:srgbClr val="5F6B74"/>
             </a:solidFill>
             <a:prstDash val="solid"/>
           </a:ln>
@@ -1573,23 +1365,62 @@
       </p:sp>
       <p:sp>
         <p:nvSpPr>
-          <p:cNvPr id="4" name="Shape 2"/>
-          <p:cNvSpPr/>
-          <p:nvPr/>
-        </p:nvSpPr>
-        <p:spPr>
-          <a:xfrm>
-            <a:off x="1691640" y="2039112"/>
-            <a:ext cx="182880" cy="182880"/>
-          </a:xfrm>
-          <a:prstGeom prst="ellipse">
-            <a:avLst/>
-          </a:prstGeom>
-          <a:solidFill>
-            <a:srgbClr val="74899A"/>
-          </a:solidFill>
-          <a:ln/>
-        </p:spPr>
+          <p:cNvPr id="3" name="Shape 1"/>
+          <p:cNvSpPr/>
+          <p:nvPr/>
+        </p:nvSpPr>
+        <p:spPr>
+          <a:xfrm>
+            <a:off x="5986120" y="576072"/>
+            <a:ext cx="219456" cy="219456"/>
+          </a:xfrm>
+          <a:prstGeom prst="diamond">
+            <a:avLst/>
+          </a:prstGeom>
+          <a:solidFill>
+            <a:srgbClr val="B3302A"/>
+          </a:solidFill>
+          <a:ln/>
+        </p:spPr>
+      </p:sp>
+      <p:sp>
+        <p:nvSpPr>
+          <p:cNvPr id="4" name="Text 2"/>
+          <p:cNvSpPr/>
+          <p:nvPr/>
+        </p:nvSpPr>
+        <p:spPr>
+          <a:xfrm>
+            <a:off x="777240" y="1143000"/>
+            <a:ext cx="914400" cy="640080"/>
+          </a:xfrm>
+          <a:prstGeom prst="rect">
+            <a:avLst/>
+          </a:prstGeom>
+          <a:noFill/>
+          <a:ln/>
+        </p:spPr>
+        <p:txBody>
+          <a:bodyPr wrap="square" lIns="0" tIns="0" rIns="0" bIns="0" rtlCol="0" anchor="ctr"/>
+          <a:lstStyle/>
+          <a:p>
+            <a:pPr indent="0" marL="0">
+              <a:buNone/>
+            </a:pPr>
+            <a:r>
+              <a:rPr lang="en-US" sz="3000" b="1" dirty="0">
+                <a:solidFill>
+                  <a:srgbClr val="B3302A"/>
+                </a:solidFill>
+                <a:latin typeface="Century Schoolbook" pitchFamily="34" charset="0"/>
+                <a:ea typeface="Century Schoolbook" pitchFamily="34" charset="-122"/>
+                <a:cs typeface="Century Schoolbook" pitchFamily="34" charset="-120"/>
+              </a:rPr>
+              <a:t>01</a:t>
+            </a:r>
+            <a:endParaRPr lang="en-US" sz="3000" dirty="0"/>
+          </a:p>
+        </p:txBody>
       </p:sp>
       <p:sp>
         <p:nvSpPr>
@@ -1599,8 +1430,8 @@
         </p:nvSpPr>
         <p:spPr>
           <a:xfrm>
-            <a:off x="612648" y="2258568"/>
-            <a:ext cx="2340864" cy="365760"/>
+            <a:off x="1645920" y="1316736"/>
+            <a:ext cx="9768535" cy="274320"/>
           </a:xfrm>
           <a:prstGeom prst="rect">
             <a:avLst/>
@@ -1612,52 +1443,199 @@
           <a:bodyPr wrap="square" lIns="0" tIns="0" rIns="0" bIns="0" rtlCol="0" anchor="ctr"/>
           <a:lstStyle/>
           <a:p>
-            <a:pPr algn="ctr" indent="0" marL="0">
-              <a:buNone/>
-            </a:pPr>
-            <a:r>
-              <a:rPr lang="en-US" sz="1450" b="1" dirty="0">
-                <a:solidFill>
-                  <a:srgbClr val="1E262E"/>
+            <a:pPr indent="0" marL="0">
+              <a:buNone/>
+            </a:pPr>
+            <a:r>
+              <a:rPr lang="en-US" sz="1100" b="1" spc="200" kern="0" dirty="0">
+                <a:solidFill>
+                  <a:srgbClr val="5F6B74"/>
                 </a:solidFill>
                 <a:latin typeface="Calibri" pitchFamily="34" charset="0"/>
                 <a:ea typeface="Calibri" pitchFamily="34" charset="-122"/>
                 <a:cs typeface="Calibri" pitchFamily="34" charset="-120"/>
               </a:rPr>
+              <a:t>ARCHITECTURE</a:t>
+            </a:r>
+            <a:endParaRPr lang="en-US" sz="1100" dirty="0"/>
+          </a:p>
+        </p:txBody>
+      </p:sp>
+      <p:sp>
+        <p:nvSpPr>
+          <p:cNvPr id="6" name="Text 4"/>
+          <p:cNvSpPr/>
+          <p:nvPr/>
+        </p:nvSpPr>
+        <p:spPr>
+          <a:xfrm>
+            <a:off x="777240" y="1792224"/>
+            <a:ext cx="10637215" cy="640080"/>
+          </a:xfrm>
+          <a:prstGeom prst="rect">
+            <a:avLst/>
+          </a:prstGeom>
+          <a:noFill/>
+          <a:ln/>
+        </p:spPr>
+        <p:txBody>
+          <a:bodyPr wrap="square" lIns="0" tIns="0" rIns="0" bIns="0" rtlCol="0" anchor="ctr"/>
+          <a:lstStyle/>
+          <a:p>
+            <a:pPr indent="0" marL="0">
+              <a:buNone/>
+            </a:pPr>
+            <a:r>
+              <a:rPr lang="en-US" sz="2300" b="1" dirty="0">
+                <a:solidFill>
+                  <a:srgbClr val="232C33"/>
+                </a:solidFill>
+                <a:latin typeface="Century Schoolbook" pitchFamily="34" charset="0"/>
+                <a:ea typeface="Century Schoolbook" pitchFamily="34" charset="-122"/>
+                <a:cs typeface="Century Schoolbook" pitchFamily="34" charset="-120"/>
+              </a:rPr>
+              <a:t>What I Built — Bridge to Browser</a:t>
+            </a:r>
+            <a:endParaRPr lang="en-US" sz="2300" dirty="0"/>
+          </a:p>
+        </p:txBody>
+      </p:sp>
+      <p:sp>
+        <p:nvSpPr>
+          <p:cNvPr id="7" name="Shape 5"/>
+          <p:cNvSpPr/>
+          <p:nvPr/>
+        </p:nvSpPr>
+        <p:spPr>
+          <a:xfrm>
+            <a:off x="777240" y="3383280"/>
+            <a:ext cx="1391869" cy="1965960"/>
+          </a:xfrm>
+          <a:prstGeom prst="roundRect">
+            <a:avLst>
+              <a:gd name="adj" fmla="val 1314"/>
+            </a:avLst>
+          </a:prstGeom>
+          <a:solidFill>
+            <a:srgbClr val="B3302A"/>
+          </a:solidFill>
+          <a:ln w="12700">
+            <a:solidFill>
+              <a:srgbClr val="B3302A"/>
+            </a:solidFill>
+            <a:prstDash val="solid"/>
+          </a:ln>
+        </p:spPr>
+      </p:sp>
+      <p:sp>
+        <p:nvSpPr>
+          <p:cNvPr id="8" name="Text 6"/>
+          <p:cNvSpPr/>
+          <p:nvPr/>
+        </p:nvSpPr>
+        <p:spPr>
+          <a:xfrm>
+            <a:off x="923544" y="3566160"/>
+            <a:ext cx="1099261" cy="320040"/>
+          </a:xfrm>
+          <a:prstGeom prst="rect">
+            <a:avLst/>
+          </a:prstGeom>
+          <a:noFill/>
+          <a:ln/>
+        </p:spPr>
+        <p:txBody>
+          <a:bodyPr wrap="square" lIns="0" tIns="0" rIns="0" bIns="0" rtlCol="0" anchor="ctr"/>
+          <a:lstStyle/>
+          <a:p>
+            <a:pPr indent="0" marL="0">
+              <a:buNone/>
+            </a:pPr>
+            <a:r>
+              <a:rPr lang="en-US" sz="1100" dirty="0">
+                <a:solidFill>
+                  <a:srgbClr val="FFFFFF"/>
+                </a:solidFill>
+                <a:latin typeface="Consolas" pitchFamily="34" charset="0"/>
+                <a:ea typeface="Consolas" pitchFamily="34" charset="-122"/>
+                <a:cs typeface="Consolas" pitchFamily="34" charset="-120"/>
+              </a:rPr>
+              <a:t>01</a:t>
+            </a:r>
+            <a:endParaRPr lang="en-US" sz="1100" dirty="0"/>
+          </a:p>
+        </p:txBody>
+      </p:sp>
+      <p:sp>
+        <p:nvSpPr>
+          <p:cNvPr id="9" name="Text 7"/>
+          <p:cNvSpPr/>
+          <p:nvPr/>
+        </p:nvSpPr>
+        <p:spPr>
+          <a:xfrm>
+            <a:off x="923544" y="4005072"/>
+            <a:ext cx="1099261" cy="868680"/>
+          </a:xfrm>
+          <a:prstGeom prst="rect">
+            <a:avLst/>
+          </a:prstGeom>
+          <a:noFill/>
+          <a:ln/>
+        </p:spPr>
+        <p:txBody>
+          <a:bodyPr wrap="square" lIns="0" tIns="0" rIns="0" bIns="0" rtlCol="0" anchor="t"/>
+          <a:lstStyle/>
+          <a:p>
+            <a:pPr indent="0" marL="0">
+              <a:lnSpc>
+                <a:spcPct val="96000"/>
+              </a:lnSpc>
+              <a:buNone/>
+            </a:pPr>
+            <a:r>
+              <a:rPr lang="en-US" sz="1300" b="1" dirty="0">
+                <a:solidFill>
+                  <a:srgbClr val="FFFFFF"/>
+                </a:solidFill>
+                <a:latin typeface="Century Schoolbook" pitchFamily="34" charset="0"/>
+                <a:ea typeface="Century Schoolbook" pitchFamily="34" charset="-122"/>
+                <a:cs typeface="Century Schoolbook" pitchFamily="34" charset="-120"/>
+              </a:rPr>
               <a:t>Span sensors</a:t>
             </a:r>
-            <a:endParaRPr lang="en-US" sz="1450" dirty="0"/>
-          </a:p>
-        </p:txBody>
-      </p:sp>
-      <p:sp>
-        <p:nvSpPr>
-          <p:cNvPr id="6" name="Text 4"/>
-          <p:cNvSpPr/>
-          <p:nvPr/>
-        </p:nvSpPr>
-        <p:spPr>
-          <a:xfrm>
-            <a:off x="640080" y="2606040"/>
-            <a:ext cx="2286000" cy="411480"/>
-          </a:xfrm>
-          <a:prstGeom prst="rect">
-            <a:avLst/>
-          </a:prstGeom>
-          <a:noFill/>
-          <a:ln/>
-        </p:spPr>
-        <p:txBody>
-          <a:bodyPr wrap="square" lIns="0" tIns="0" rIns="0" bIns="0" rtlCol="0" anchor="t"/>
-          <a:lstStyle/>
-          <a:p>
-            <a:pPr algn="ctr" indent="0" marL="0">
-              <a:buNone/>
-            </a:pPr>
-            <a:r>
-              <a:rPr lang="en-US" sz="1050" dirty="0">
-                <a:solidFill>
-                  <a:srgbClr val="5F6C76"/>
+            <a:endParaRPr lang="en-US" sz="1300" dirty="0"/>
+          </a:p>
+        </p:txBody>
+      </p:sp>
+      <p:sp>
+        <p:nvSpPr>
+          <p:cNvPr id="10" name="Text 8"/>
+          <p:cNvSpPr/>
+          <p:nvPr/>
+        </p:nvSpPr>
+        <p:spPr>
+          <a:xfrm>
+            <a:off x="923544" y="4864608"/>
+            <a:ext cx="1099261" cy="365760"/>
+          </a:xfrm>
+          <a:prstGeom prst="rect">
+            <a:avLst/>
+          </a:prstGeom>
+          <a:noFill/>
+          <a:ln/>
+        </p:spPr>
+        <p:txBody>
+          <a:bodyPr wrap="square" lIns="0" tIns="0" rIns="0" bIns="0" rtlCol="0" anchor="ctr"/>
+          <a:lstStyle/>
+          <a:p>
+            <a:pPr indent="0" marL="0">
+              <a:buNone/>
+            </a:pPr>
+            <a:r>
+              <a:rPr lang="en-US" sz="900" dirty="0">
+                <a:solidFill>
+                  <a:srgbClr val="FFFFFF"/>
                 </a:solidFill>
                 <a:latin typeface="Calibri" pitchFamily="34" charset="0"/>
                 <a:ea typeface="Calibri" pitchFamily="34" charset="-122"/>
@@ -1665,57 +1643,52 @@
               </a:rPr>
               <a:t>10 · 2 spans</a:t>
             </a:r>
-            <a:endParaRPr lang="en-US" sz="1050" dirty="0"/>
-          </a:p>
-        </p:txBody>
-      </p:sp>
-      <p:sp>
-        <p:nvSpPr>
-          <p:cNvPr id="7" name="Shape 5"/>
-          <p:cNvSpPr/>
-          <p:nvPr/>
-        </p:nvSpPr>
-        <p:spPr>
-          <a:xfrm>
-            <a:off x="2944368" y="2514600"/>
-            <a:ext cx="1975104" cy="0"/>
-          </a:xfrm>
-          <a:prstGeom prst="line">
-            <a:avLst/>
-          </a:prstGeom>
-          <a:noFill/>
-          <a:ln w="25400">
-            <a:solidFill>
-              <a:srgbClr val="74899A"/>
-            </a:solidFill>
-            <a:prstDash val="solid"/>
-            <a:headEnd type="none"/>
-            <a:tailEnd type="triangle"/>
-          </a:ln>
-        </p:spPr>
-      </p:sp>
-      <p:sp>
-        <p:nvSpPr>
-          <p:cNvPr id="8" name="Shape 6"/>
-          <p:cNvSpPr/>
-          <p:nvPr/>
-        </p:nvSpPr>
-        <p:spPr>
-          <a:xfrm>
-            <a:off x="4937760" y="1874520"/>
-            <a:ext cx="2286000" cy="1280160"/>
+            <a:endParaRPr lang="en-US" sz="900" dirty="0"/>
+          </a:p>
+        </p:txBody>
+      </p:sp>
+      <p:sp>
+        <p:nvSpPr>
+          <p:cNvPr id="11" name="Shape 9"/>
+          <p:cNvSpPr/>
+          <p:nvPr/>
+        </p:nvSpPr>
+        <p:spPr>
+          <a:xfrm>
+            <a:off x="2242261" y="4256532"/>
+            <a:ext cx="310896" cy="219456"/>
+          </a:xfrm>
+          <a:prstGeom prst="rightArrow">
+            <a:avLst/>
+          </a:prstGeom>
+          <a:solidFill>
+            <a:srgbClr val="5F6B74"/>
+          </a:solidFill>
+          <a:ln/>
+        </p:spPr>
+      </p:sp>
+      <p:sp>
+        <p:nvSpPr>
+          <p:cNvPr id="12" name="Shape 10"/>
+          <p:cNvSpPr/>
+          <p:nvPr/>
+        </p:nvSpPr>
+        <p:spPr>
+          <a:xfrm>
+            <a:off x="2626309" y="3383280"/>
+            <a:ext cx="1391869" cy="1965960"/>
           </a:xfrm>
           <a:prstGeom prst="roundRect">
             <a:avLst>
-              <a:gd name="adj" fmla="val 7143"/>
+              <a:gd name="adj" fmla="val 1314"/>
             </a:avLst>
           </a:prstGeom>
           <a:solidFill>
-            <a:srgbClr val="EEF2F4"/>
-          </a:solidFill>
-          <a:ln w="19050">
+            <a:srgbClr val="B3302A"/>
+          </a:solidFill>
+          <a:ln w="12700">
             <a:solidFill>
-              <a:srgbClr val="74899A"/>
+              <a:srgbClr val="B3302A"/>
             </a:solidFill>
             <a:prstDash val="solid"/>
           </a:ln>
@@ -1723,34 +1696,14 @@
       </p:sp>
       <p:sp>
         <p:nvSpPr>
-          <p:cNvPr id="9" name="Shape 7"/>
-          <p:cNvSpPr/>
-          <p:nvPr/>
-        </p:nvSpPr>
-        <p:spPr>
-          <a:xfrm>
-            <a:off x="5989320" y="2039112"/>
-            <a:ext cx="182880" cy="182880"/>
-          </a:xfrm>
-          <a:prstGeom prst="ellipse">
-            <a:avLst/>
-          </a:prstGeom>
-          <a:solidFill>
-            <a:srgbClr val="74899A"/>
-          </a:solidFill>
-          <a:ln/>
-        </p:spPr>
-      </p:sp>
-      <p:sp>
-        <p:nvSpPr>
-          <p:cNvPr id="10" name="Text 8"/>
-          <p:cNvSpPr/>
-          <p:nvPr/>
-        </p:nvSpPr>
-        <p:spPr>
-          <a:xfrm>
-            <a:off x="4910328" y="2258568"/>
-            <a:ext cx="2340864" cy="365760"/>
+          <p:cNvPr id="13" name="Text 11"/>
+          <p:cNvSpPr/>
+          <p:nvPr/>
+        </p:nvSpPr>
+        <p:spPr>
+          <a:xfrm>
+            <a:off x="2772613" y="3566160"/>
+            <a:ext cx="1099261" cy="320040"/>
           </a:xfrm>
           <a:prstGeom prst="rect">
             <a:avLst/>
@@ -1762,34 +1715,201 @@
           <a:bodyPr wrap="square" lIns="0" tIns="0" rIns="0" bIns="0" rtlCol="0" anchor="ctr"/>
           <a:lstStyle/>
           <a:p>
-            <a:pPr algn="ctr" indent="0" marL="0">
-              <a:buNone/>
-            </a:pPr>
-            <a:r>
-              <a:rPr lang="en-US" sz="1450" b="1" dirty="0">
-                <a:solidFill>
-                  <a:srgbClr val="1E262E"/>
+            <a:pPr indent="0" marL="0">
+              <a:buNone/>
+            </a:pPr>
+            <a:r>
+              <a:rPr lang="en-US" sz="1100" dirty="0">
+                <a:solidFill>
+                  <a:srgbClr val="FFFFFF"/>
+                </a:solidFill>
+                <a:latin typeface="Consolas" pitchFamily="34" charset="0"/>
+                <a:ea typeface="Consolas" pitchFamily="34" charset="-122"/>
+                <a:cs typeface="Consolas" pitchFamily="34" charset="-120"/>
+              </a:rPr>
+              <a:t>02</a:t>
+            </a:r>
+            <a:endParaRPr lang="en-US" sz="1100" dirty="0"/>
+          </a:p>
+        </p:txBody>
+      </p:sp>
+      <p:sp>
+        <p:nvSpPr>
+          <p:cNvPr id="14" name="Text 12"/>
+          <p:cNvSpPr/>
+          <p:nvPr/>
+        </p:nvSpPr>
+        <p:spPr>
+          <a:xfrm>
+            <a:off x="2772613" y="4005072"/>
+            <a:ext cx="1099261" cy="868680"/>
+          </a:xfrm>
+          <a:prstGeom prst="rect">
+            <a:avLst/>
+          </a:prstGeom>
+          <a:noFill/>
+          <a:ln/>
+        </p:spPr>
+        <p:txBody>
+          <a:bodyPr wrap="square" lIns="0" tIns="0" rIns="0" bIns="0" rtlCol="0" anchor="t"/>
+          <a:lstStyle/>
+          <a:p>
+            <a:pPr indent="0" marL="0">
+              <a:lnSpc>
+                <a:spcPct val="96000"/>
+              </a:lnSpc>
+              <a:buNone/>
+            </a:pPr>
+            <a:r>
+              <a:rPr lang="en-US" sz="1300" b="1" dirty="0">
+                <a:solidFill>
+                  <a:srgbClr val="FFFFFF"/>
+                </a:solidFill>
+                <a:latin typeface="Century Schoolbook" pitchFamily="34" charset="0"/>
+                <a:ea typeface="Century Schoolbook" pitchFamily="34" charset="-122"/>
+                <a:cs typeface="Century Schoolbook" pitchFamily="34" charset="-120"/>
+              </a:rPr>
+              <a:t>Fog node</a:t>
+            </a:r>
+            <a:endParaRPr lang="en-US" sz="1300" dirty="0"/>
+          </a:p>
+        </p:txBody>
+      </p:sp>
+      <p:sp>
+        <p:nvSpPr>
+          <p:cNvPr id="15" name="Text 13"/>
+          <p:cNvSpPr/>
+          <p:nvPr/>
+        </p:nvSpPr>
+        <p:spPr>
+          <a:xfrm>
+            <a:off x="2772613" y="4864608"/>
+            <a:ext cx="1099261" cy="365760"/>
+          </a:xfrm>
+          <a:prstGeom prst="rect">
+            <a:avLst/>
+          </a:prstGeom>
+          <a:noFill/>
+          <a:ln/>
+        </p:spPr>
+        <p:txBody>
+          <a:bodyPr wrap="square" lIns="0" tIns="0" rIns="0" bIns="0" rtlCol="0" anchor="ctr"/>
+          <a:lstStyle/>
+          <a:p>
+            <a:pPr indent="0" marL="0">
+              <a:buNone/>
+            </a:pPr>
+            <a:r>
+              <a:rPr lang="en-US" sz="900" dirty="0">
+                <a:solidFill>
+                  <a:srgbClr val="FFFFFF"/>
                 </a:solidFill>
                 <a:latin typeface="Calibri" pitchFamily="34" charset="0"/>
                 <a:ea typeface="Calibri" pitchFamily="34" charset="-122"/>
                 <a:cs typeface="Calibri" pitchFamily="34" charset="-120"/>
               </a:rPr>
-              <a:t>Fog node</a:t>
-            </a:r>
-            <a:endParaRPr lang="en-US" sz="1450" dirty="0"/>
-          </a:p>
-        </p:txBody>
-      </p:sp>
-      <p:sp>
-        <p:nvSpPr>
-          <p:cNvPr id="11" name="Text 9"/>
-          <p:cNvSpPr/>
-          <p:nvPr/>
-        </p:nvSpPr>
-        <p:spPr>
-          <a:xfrm>
-            <a:off x="4937760" y="2606040"/>
-            <a:ext cx="2286000" cy="411480"/>
+              <a:t>windows · 4 thresholds</a:t>
+            </a:r>
+            <a:endParaRPr lang="en-US" sz="900" dirty="0"/>
+          </a:p>
+        </p:txBody>
+      </p:sp>
+      <p:sp>
+        <p:nvSpPr>
+          <p:cNvPr id="16" name="Shape 14"/>
+          <p:cNvSpPr/>
+          <p:nvPr/>
+        </p:nvSpPr>
+        <p:spPr>
+          <a:xfrm>
+            <a:off x="4091330" y="4256532"/>
+            <a:ext cx="310896" cy="219456"/>
+          </a:xfrm>
+          <a:prstGeom prst="rightArrow">
+            <a:avLst/>
+          </a:prstGeom>
+          <a:solidFill>
+            <a:srgbClr val="5F6B74"/>
+          </a:solidFill>
+          <a:ln/>
+        </p:spPr>
+      </p:sp>
+      <p:sp>
+        <p:nvSpPr>
+          <p:cNvPr id="17" name="Shape 15"/>
+          <p:cNvSpPr/>
+          <p:nvPr/>
+        </p:nvSpPr>
+        <p:spPr>
+          <a:xfrm>
+            <a:off x="4475378" y="3383280"/>
+            <a:ext cx="1391869" cy="1965960"/>
+          </a:xfrm>
+          <a:prstGeom prst="roundRect">
+            <a:avLst>
+              <a:gd name="adj" fmla="val 1314"/>
+            </a:avLst>
+          </a:prstGeom>
+          <a:solidFill>
+            <a:srgbClr val="FFFFFF"/>
+          </a:solidFill>
+          <a:ln w="12700">
+            <a:solidFill>
+              <a:srgbClr val="E4E6E9"/>
+            </a:solidFill>
+            <a:prstDash val="solid"/>
+          </a:ln>
+        </p:spPr>
+      </p:sp>
+      <p:sp>
+        <p:nvSpPr>
+          <p:cNvPr id="18" name="Text 16"/>
+          <p:cNvSpPr/>
+          <p:nvPr/>
+        </p:nvSpPr>
+        <p:spPr>
+          <a:xfrm>
+            <a:off x="4621682" y="3566160"/>
+            <a:ext cx="1099261" cy="320040"/>
+          </a:xfrm>
+          <a:prstGeom prst="rect">
+            <a:avLst/>
+          </a:prstGeom>
+          <a:noFill/>
+          <a:ln/>
+        </p:spPr>
+        <p:txBody>
+          <a:bodyPr wrap="square" lIns="0" tIns="0" rIns="0" bIns="0" rtlCol="0" anchor="ctr"/>
+          <a:lstStyle/>
+          <a:p>
+            <a:pPr indent="0" marL="0">
+              <a:buNone/>
+            </a:pPr>
+            <a:r>
+              <a:rPr lang="en-US" sz="1100" dirty="0">
+                <a:solidFill>
+                  <a:srgbClr val="B3302A"/>
+                </a:solidFill>
+                <a:latin typeface="Consolas" pitchFamily="34" charset="0"/>
+                <a:ea typeface="Consolas" pitchFamily="34" charset="-122"/>
+                <a:cs typeface="Consolas" pitchFamily="34" charset="-120"/>
+              </a:rPr>
+              <a:t>03</a:t>
+            </a:r>
+            <a:endParaRPr lang="en-US" sz="1100" dirty="0"/>
+          </a:p>
+        </p:txBody>
+      </p:sp>
+      <p:sp>
+        <p:nvSpPr>
+          <p:cNvPr id="19" name="Text 17"/>
+          <p:cNvSpPr/>
+          <p:nvPr/>
+        </p:nvSpPr>
+        <p:spPr>
+          <a:xfrm>
+            <a:off x="4621682" y="4005072"/>
+            <a:ext cx="1099261" cy="868680"/>
           </a:xfrm>
           <a:prstGeom prst="rect">
             <a:avLst/>
@@ -1801,71 +1921,108 @@
           <a:bodyPr wrap="square" lIns="0" tIns="0" rIns="0" bIns="0" rtlCol="0" anchor="t"/>
           <a:lstStyle/>
           <a:p>
-            <a:pPr algn="ctr" indent="0" marL="0">
-              <a:buNone/>
-            </a:pPr>
-            <a:r>
-              <a:rPr lang="en-US" sz="1050" dirty="0">
-                <a:solidFill>
-                  <a:srgbClr val="5F6C76"/>
+            <a:pPr indent="0" marL="0">
+              <a:lnSpc>
+                <a:spcPct val="96000"/>
+              </a:lnSpc>
+              <a:buNone/>
+            </a:pPr>
+            <a:r>
+              <a:rPr lang="en-US" sz="1300" b="1" dirty="0">
+                <a:solidFill>
+                  <a:srgbClr val="232C33"/>
+                </a:solidFill>
+                <a:latin typeface="Century Schoolbook" pitchFamily="34" charset="0"/>
+                <a:ea typeface="Century Schoolbook" pitchFamily="34" charset="-122"/>
+                <a:cs typeface="Century Schoolbook" pitchFamily="34" charset="-120"/>
+              </a:rPr>
+              <a:t>Amazon SQS</a:t>
+            </a:r>
+            <a:endParaRPr lang="en-US" sz="1300" dirty="0"/>
+          </a:p>
+        </p:txBody>
+      </p:sp>
+      <p:sp>
+        <p:nvSpPr>
+          <p:cNvPr id="20" name="Text 18"/>
+          <p:cNvSpPr/>
+          <p:nvPr/>
+        </p:nvSpPr>
+        <p:spPr>
+          <a:xfrm>
+            <a:off x="4621682" y="4864608"/>
+            <a:ext cx="1099261" cy="365760"/>
+          </a:xfrm>
+          <a:prstGeom prst="rect">
+            <a:avLst/>
+          </a:prstGeom>
+          <a:noFill/>
+          <a:ln/>
+        </p:spPr>
+        <p:txBody>
+          <a:bodyPr wrap="square" lIns="0" tIns="0" rIns="0" bIns="0" rtlCol="0" anchor="ctr"/>
+          <a:lstStyle/>
+          <a:p>
+            <a:pPr indent="0" marL="0">
+              <a:buNone/>
+            </a:pPr>
+            <a:r>
+              <a:rPr lang="en-US" sz="900" dirty="0">
+                <a:solidFill>
+                  <a:srgbClr val="5F6B74"/>
                 </a:solidFill>
                 <a:latin typeface="Calibri" pitchFamily="34" charset="0"/>
                 <a:ea typeface="Calibri" pitchFamily="34" charset="-122"/>
                 <a:cs typeface="Calibri" pitchFamily="34" charset="-120"/>
               </a:rPr>
-              <a:t>windows · 4 thresholds</a:t>
-            </a:r>
-            <a:endParaRPr lang="en-US" sz="1050" dirty="0"/>
-          </a:p>
-        </p:txBody>
-      </p:sp>
-      <p:sp>
-        <p:nvSpPr>
-          <p:cNvPr id="12" name="Shape 10"/>
-          <p:cNvSpPr/>
-          <p:nvPr/>
-        </p:nvSpPr>
-        <p:spPr>
-          <a:xfrm>
-            <a:off x="7242048" y="2514600"/>
-            <a:ext cx="1975104" cy="0"/>
-          </a:xfrm>
-          <a:prstGeom prst="line">
-            <a:avLst/>
-          </a:prstGeom>
-          <a:noFill/>
-          <a:ln w="25400">
-            <a:solidFill>
-              <a:srgbClr val="74899A"/>
-            </a:solidFill>
-            <a:prstDash val="solid"/>
-            <a:headEnd type="none"/>
-            <a:tailEnd type="triangle"/>
-          </a:ln>
-        </p:spPr>
-      </p:sp>
-      <p:sp>
-        <p:nvSpPr>
-          <p:cNvPr id="13" name="Shape 11"/>
-          <p:cNvSpPr/>
-          <p:nvPr/>
-        </p:nvSpPr>
-        <p:spPr>
-          <a:xfrm>
-            <a:off x="9235440" y="1874520"/>
-            <a:ext cx="2286000" cy="1280160"/>
+              <a:t>batched summaries</a:t>
+            </a:r>
+            <a:endParaRPr lang="en-US" sz="900" dirty="0"/>
+          </a:p>
+        </p:txBody>
+      </p:sp>
+      <p:sp>
+        <p:nvSpPr>
+          <p:cNvPr id="21" name="Shape 19"/>
+          <p:cNvSpPr/>
+          <p:nvPr/>
+        </p:nvSpPr>
+        <p:spPr>
+          <a:xfrm>
+            <a:off x="5940400" y="4256532"/>
+            <a:ext cx="310896" cy="219456"/>
+          </a:xfrm>
+          <a:prstGeom prst="rightArrow">
+            <a:avLst/>
+          </a:prstGeom>
+          <a:solidFill>
+            <a:srgbClr val="5F6B74"/>
+          </a:solidFill>
+          <a:ln/>
+        </p:spPr>
+      </p:sp>
+      <p:sp>
+        <p:nvSpPr>
+          <p:cNvPr id="22" name="Shape 20"/>
+          <p:cNvSpPr/>
+          <p:nvPr/>
+        </p:nvSpPr>
+        <p:spPr>
+          <a:xfrm>
+            <a:off x="6324448" y="3383280"/>
+            <a:ext cx="1391869" cy="1965960"/>
           </a:xfrm>
           <a:prstGeom prst="roundRect">
             <a:avLst>
-              <a:gd name="adj" fmla="val 7143"/>
+              <a:gd name="adj" fmla="val 1314"/>
             </a:avLst>
           </a:prstGeom>
           <a:solidFill>
-            <a:srgbClr val="EEF2F4"/>
-          </a:solidFill>
-          <a:ln w="19050">
+            <a:srgbClr val="FFFFFF"/>
+          </a:solidFill>
+          <a:ln w="12700">
             <a:solidFill>
-              <a:srgbClr val="33454E"/>
+              <a:srgbClr val="E4E6E9"/>
             </a:solidFill>
             <a:prstDash val="solid"/>
           </a:ln>
@@ -1873,34 +2030,14 @@
       </p:sp>
       <p:sp>
         <p:nvSpPr>
-          <p:cNvPr id="14" name="Shape 12"/>
-          <p:cNvSpPr/>
-          <p:nvPr/>
-        </p:nvSpPr>
-        <p:spPr>
-          <a:xfrm>
-            <a:off x="10287000" y="2039112"/>
-            <a:ext cx="182880" cy="182880"/>
-          </a:xfrm>
-          <a:prstGeom prst="ellipse">
-            <a:avLst/>
-          </a:prstGeom>
-          <a:solidFill>
-            <a:srgbClr val="33454E"/>
-          </a:solidFill>
-          <a:ln/>
-        </p:spPr>
-      </p:sp>
-      <p:sp>
-        <p:nvSpPr>
-          <p:cNvPr id="15" name="Text 13"/>
-          <p:cNvSpPr/>
-          <p:nvPr/>
-        </p:nvSpPr>
-        <p:spPr>
-          <a:xfrm>
-            <a:off x="9208008" y="2258568"/>
-            <a:ext cx="2340864" cy="365760"/>
+          <p:cNvPr id="23" name="Text 21"/>
+          <p:cNvSpPr/>
+          <p:nvPr/>
+        </p:nvSpPr>
+        <p:spPr>
+          <a:xfrm>
+            <a:off x="6470752" y="3566160"/>
+            <a:ext cx="1099261" cy="320040"/>
           </a:xfrm>
           <a:prstGeom prst="rect">
             <a:avLst/>
@@ -1912,34 +2049,201 @@
           <a:bodyPr wrap="square" lIns="0" tIns="0" rIns="0" bIns="0" rtlCol="0" anchor="ctr"/>
           <a:lstStyle/>
           <a:p>
-            <a:pPr algn="ctr" indent="0" marL="0">
-              <a:buNone/>
-            </a:pPr>
-            <a:r>
-              <a:rPr lang="en-US" sz="1450" b="1" dirty="0">
-                <a:solidFill>
-                  <a:srgbClr val="1E262E"/>
+            <a:pPr indent="0" marL="0">
+              <a:buNone/>
+            </a:pPr>
+            <a:r>
+              <a:rPr lang="en-US" sz="1100" dirty="0">
+                <a:solidFill>
+                  <a:srgbClr val="B3302A"/>
+                </a:solidFill>
+                <a:latin typeface="Consolas" pitchFamily="34" charset="0"/>
+                <a:ea typeface="Consolas" pitchFamily="34" charset="-122"/>
+                <a:cs typeface="Consolas" pitchFamily="34" charset="-120"/>
+              </a:rPr>
+              <a:t>04</a:t>
+            </a:r>
+            <a:endParaRPr lang="en-US" sz="1100" dirty="0"/>
+          </a:p>
+        </p:txBody>
+      </p:sp>
+      <p:sp>
+        <p:nvSpPr>
+          <p:cNvPr id="24" name="Text 22"/>
+          <p:cNvSpPr/>
+          <p:nvPr/>
+        </p:nvSpPr>
+        <p:spPr>
+          <a:xfrm>
+            <a:off x="6470752" y="4005072"/>
+            <a:ext cx="1099261" cy="868680"/>
+          </a:xfrm>
+          <a:prstGeom prst="rect">
+            <a:avLst/>
+          </a:prstGeom>
+          <a:noFill/>
+          <a:ln/>
+        </p:spPr>
+        <p:txBody>
+          <a:bodyPr wrap="square" lIns="0" tIns="0" rIns="0" bIns="0" rtlCol="0" anchor="t"/>
+          <a:lstStyle/>
+          <a:p>
+            <a:pPr indent="0" marL="0">
+              <a:lnSpc>
+                <a:spcPct val="96000"/>
+              </a:lnSpc>
+              <a:buNone/>
+            </a:pPr>
+            <a:r>
+              <a:rPr lang="en-US" sz="1300" b="1" dirty="0">
+                <a:solidFill>
+                  <a:srgbClr val="232C33"/>
+                </a:solidFill>
+                <a:latin typeface="Century Schoolbook" pitchFamily="34" charset="0"/>
+                <a:ea typeface="Century Schoolbook" pitchFamily="34" charset="-122"/>
+                <a:cs typeface="Century Schoolbook" pitchFamily="34" charset="-120"/>
+              </a:rPr>
+              <a:t>AWS Lambda</a:t>
+            </a:r>
+            <a:endParaRPr lang="en-US" sz="1300" dirty="0"/>
+          </a:p>
+        </p:txBody>
+      </p:sp>
+      <p:sp>
+        <p:nvSpPr>
+          <p:cNvPr id="25" name="Text 23"/>
+          <p:cNvSpPr/>
+          <p:nvPr/>
+        </p:nvSpPr>
+        <p:spPr>
+          <a:xfrm>
+            <a:off x="6470752" y="4864608"/>
+            <a:ext cx="1099261" cy="365760"/>
+          </a:xfrm>
+          <a:prstGeom prst="rect">
+            <a:avLst/>
+          </a:prstGeom>
+          <a:noFill/>
+          <a:ln/>
+        </p:spPr>
+        <p:txBody>
+          <a:bodyPr wrap="square" lIns="0" tIns="0" rIns="0" bIns="0" rtlCol="0" anchor="ctr"/>
+          <a:lstStyle/>
+          <a:p>
+            <a:pPr indent="0" marL="0">
+              <a:buNone/>
+            </a:pPr>
+            <a:r>
+              <a:rPr lang="en-US" sz="900" dirty="0">
+                <a:solidFill>
+                  <a:srgbClr val="5F6B74"/>
                 </a:solidFill>
                 <a:latin typeface="Calibri" pitchFamily="34" charset="0"/>
                 <a:ea typeface="Calibri" pitchFamily="34" charset="-122"/>
                 <a:cs typeface="Calibri" pitchFamily="34" charset="-120"/>
               </a:rPr>
-              <a:t>Amazon SQS</a:t>
-            </a:r>
-            <a:endParaRPr lang="en-US" sz="1450" dirty="0"/>
-          </a:p>
-        </p:txBody>
-      </p:sp>
-      <p:sp>
-        <p:nvSpPr>
-          <p:cNvPr id="16" name="Text 14"/>
-          <p:cNvSpPr/>
-          <p:nvPr/>
-        </p:nvSpPr>
-        <p:spPr>
-          <a:xfrm>
-            <a:off x="9235440" y="2606040"/>
-            <a:ext cx="2286000" cy="411480"/>
+              <a:t>python3.12 ingest</a:t>
+            </a:r>
+            <a:endParaRPr lang="en-US" sz="900" dirty="0"/>
+          </a:p>
+        </p:txBody>
+      </p:sp>
+      <p:sp>
+        <p:nvSpPr>
+          <p:cNvPr id="26" name="Shape 24"/>
+          <p:cNvSpPr/>
+          <p:nvPr/>
+        </p:nvSpPr>
+        <p:spPr>
+          <a:xfrm>
+            <a:off x="7789469" y="4256532"/>
+            <a:ext cx="310896" cy="219456"/>
+          </a:xfrm>
+          <a:prstGeom prst="rightArrow">
+            <a:avLst/>
+          </a:prstGeom>
+          <a:solidFill>
+            <a:srgbClr val="5F6B74"/>
+          </a:solidFill>
+          <a:ln/>
+        </p:spPr>
+      </p:sp>
+      <p:sp>
+        <p:nvSpPr>
+          <p:cNvPr id="27" name="Shape 25"/>
+          <p:cNvSpPr/>
+          <p:nvPr/>
+        </p:nvSpPr>
+        <p:spPr>
+          <a:xfrm>
+            <a:off x="8173517" y="3383280"/>
+            <a:ext cx="1391869" cy="1965960"/>
+          </a:xfrm>
+          <a:prstGeom prst="roundRect">
+            <a:avLst>
+              <a:gd name="adj" fmla="val 1314"/>
+            </a:avLst>
+          </a:prstGeom>
+          <a:solidFill>
+            <a:srgbClr val="FFFFFF"/>
+          </a:solidFill>
+          <a:ln w="12700">
+            <a:solidFill>
+              <a:srgbClr val="E4E6E9"/>
+            </a:solidFill>
+            <a:prstDash val="solid"/>
+          </a:ln>
+        </p:spPr>
+      </p:sp>
+      <p:sp>
+        <p:nvSpPr>
+          <p:cNvPr id="28" name="Text 26"/>
+          <p:cNvSpPr/>
+          <p:nvPr/>
+        </p:nvSpPr>
+        <p:spPr>
+          <a:xfrm>
+            <a:off x="8319821" y="3566160"/>
+            <a:ext cx="1099261" cy="320040"/>
+          </a:xfrm>
+          <a:prstGeom prst="rect">
+            <a:avLst/>
+          </a:prstGeom>
+          <a:noFill/>
+          <a:ln/>
+        </p:spPr>
+        <p:txBody>
+          <a:bodyPr wrap="square" lIns="0" tIns="0" rIns="0" bIns="0" rtlCol="0" anchor="ctr"/>
+          <a:lstStyle/>
+          <a:p>
+            <a:pPr indent="0" marL="0">
+              <a:buNone/>
+            </a:pPr>
+            <a:r>
+              <a:rPr lang="en-US" sz="1100" dirty="0">
+                <a:solidFill>
+                  <a:srgbClr val="B3302A"/>
+                </a:solidFill>
+                <a:latin typeface="Consolas" pitchFamily="34" charset="0"/>
+                <a:ea typeface="Consolas" pitchFamily="34" charset="-122"/>
+                <a:cs typeface="Consolas" pitchFamily="34" charset="-120"/>
+              </a:rPr>
+              <a:t>05</a:t>
+            </a:r>
+            <a:endParaRPr lang="en-US" sz="1100" dirty="0"/>
+          </a:p>
+        </p:txBody>
+      </p:sp>
+      <p:sp>
+        <p:nvSpPr>
+          <p:cNvPr id="29" name="Text 27"/>
+          <p:cNvSpPr/>
+          <p:nvPr/>
+        </p:nvSpPr>
+        <p:spPr>
+          <a:xfrm>
+            <a:off x="8319821" y="4005072"/>
+            <a:ext cx="1099261" cy="868680"/>
           </a:xfrm>
           <a:prstGeom prst="rect">
             <a:avLst/>
@@ -1951,46 +2255,108 @@
           <a:bodyPr wrap="square" lIns="0" tIns="0" rIns="0" bIns="0" rtlCol="0" anchor="t"/>
           <a:lstStyle/>
           <a:p>
-            <a:pPr algn="ctr" indent="0" marL="0">
-              <a:buNone/>
-            </a:pPr>
-            <a:r>
-              <a:rPr lang="en-US" sz="1050" dirty="0">
-                <a:solidFill>
-                  <a:srgbClr val="5F6C76"/>
+            <a:pPr indent="0" marL="0">
+              <a:lnSpc>
+                <a:spcPct val="96000"/>
+              </a:lnSpc>
+              <a:buNone/>
+            </a:pPr>
+            <a:r>
+              <a:rPr lang="en-US" sz="1300" b="1" dirty="0">
+                <a:solidFill>
+                  <a:srgbClr val="232C33"/>
+                </a:solidFill>
+                <a:latin typeface="Century Schoolbook" pitchFamily="34" charset="0"/>
+                <a:ea typeface="Century Schoolbook" pitchFamily="34" charset="-122"/>
+                <a:cs typeface="Century Schoolbook" pitchFamily="34" charset="-120"/>
+              </a:rPr>
+              <a:t>DynamoDB</a:t>
+            </a:r>
+            <a:endParaRPr lang="en-US" sz="1300" dirty="0"/>
+          </a:p>
+        </p:txBody>
+      </p:sp>
+      <p:sp>
+        <p:nvSpPr>
+          <p:cNvPr id="30" name="Text 28"/>
+          <p:cNvSpPr/>
+          <p:nvPr/>
+        </p:nvSpPr>
+        <p:spPr>
+          <a:xfrm>
+            <a:off x="8319821" y="4864608"/>
+            <a:ext cx="1099261" cy="365760"/>
+          </a:xfrm>
+          <a:prstGeom prst="rect">
+            <a:avLst/>
+          </a:prstGeom>
+          <a:noFill/>
+          <a:ln/>
+        </p:spPr>
+        <p:txBody>
+          <a:bodyPr wrap="square" lIns="0" tIns="0" rIns="0" bIns="0" rtlCol="0" anchor="ctr"/>
+          <a:lstStyle/>
+          <a:p>
+            <a:pPr indent="0" marL="0">
+              <a:buNone/>
+            </a:pPr>
+            <a:r>
+              <a:rPr lang="en-US" sz="900" dirty="0">
+                <a:solidFill>
+                  <a:srgbClr val="5F6B74"/>
                 </a:solidFill>
                 <a:latin typeface="Calibri" pitchFamily="34" charset="0"/>
                 <a:ea typeface="Calibri" pitchFamily="34" charset="-122"/>
                 <a:cs typeface="Calibri" pitchFamily="34" charset="-120"/>
               </a:rPr>
-              <a:t>batched summaries</a:t>
-            </a:r>
-            <a:endParaRPr lang="en-US" sz="1050" dirty="0"/>
-          </a:p>
-        </p:txBody>
-      </p:sp>
-      <p:sp>
-        <p:nvSpPr>
-          <p:cNvPr id="17" name="Shape 15"/>
-          <p:cNvSpPr/>
-          <p:nvPr/>
-        </p:nvSpPr>
-        <p:spPr>
-          <a:xfrm>
-            <a:off x="9235440" y="3520440"/>
-            <a:ext cx="2286000" cy="1280160"/>
+              <a:t>time-keyed store</a:t>
+            </a:r>
+            <a:endParaRPr lang="en-US" sz="900" dirty="0"/>
+          </a:p>
+        </p:txBody>
+      </p:sp>
+      <p:sp>
+        <p:nvSpPr>
+          <p:cNvPr id="31" name="Shape 29"/>
+          <p:cNvSpPr/>
+          <p:nvPr/>
+        </p:nvSpPr>
+        <p:spPr>
+          <a:xfrm>
+            <a:off x="9638538" y="4256532"/>
+            <a:ext cx="310896" cy="219456"/>
+          </a:xfrm>
+          <a:prstGeom prst="rightArrow">
+            <a:avLst/>
+          </a:prstGeom>
+          <a:solidFill>
+            <a:srgbClr val="5F6B74"/>
+          </a:solidFill>
+          <a:ln/>
+        </p:spPr>
+      </p:sp>
+      <p:sp>
+        <p:nvSpPr>
+          <p:cNvPr id="32" name="Shape 30"/>
+          <p:cNvSpPr/>
+          <p:nvPr/>
+        </p:nvSpPr>
+        <p:spPr>
+          <a:xfrm>
+            <a:off x="10022586" y="3383280"/>
+            <a:ext cx="1391869" cy="1965960"/>
           </a:xfrm>
           <a:prstGeom prst="roundRect">
             <a:avLst>
-              <a:gd name="adj" fmla="val 7143"/>
+              <a:gd name="adj" fmla="val 1314"/>
             </a:avLst>
           </a:prstGeom>
           <a:solidFill>
-            <a:srgbClr val="EEF2F4"/>
-          </a:solidFill>
-          <a:ln w="19050">
+            <a:srgbClr val="FFFFFF"/>
+          </a:solidFill>
+          <a:ln w="12700">
             <a:solidFill>
-              <a:srgbClr val="33454E"/>
+              <a:srgbClr val="E4E6E9"/>
             </a:solidFill>
             <a:prstDash val="solid"/>
           </a:ln>
@@ -1998,34 +2364,14 @@
       </p:sp>
       <p:sp>
         <p:nvSpPr>
-          <p:cNvPr id="18" name="Shape 16"/>
-          <p:cNvSpPr/>
-          <p:nvPr/>
-        </p:nvSpPr>
-        <p:spPr>
-          <a:xfrm>
-            <a:off x="10287000" y="3685032"/>
-            <a:ext cx="182880" cy="182880"/>
-          </a:xfrm>
-          <a:prstGeom prst="ellipse">
-            <a:avLst/>
-          </a:prstGeom>
-          <a:solidFill>
-            <a:srgbClr val="33454E"/>
-          </a:solidFill>
-          <a:ln/>
-        </p:spPr>
-      </p:sp>
-      <p:sp>
-        <p:nvSpPr>
-          <p:cNvPr id="19" name="Text 17"/>
-          <p:cNvSpPr/>
-          <p:nvPr/>
-        </p:nvSpPr>
-        <p:spPr>
-          <a:xfrm>
-            <a:off x="9208008" y="3904488"/>
-            <a:ext cx="2340864" cy="365760"/>
+          <p:cNvPr id="33" name="Text 31"/>
+          <p:cNvSpPr/>
+          <p:nvPr/>
+        </p:nvSpPr>
+        <p:spPr>
+          <a:xfrm>
+            <a:off x="10168890" y="3566160"/>
+            <a:ext cx="1099261" cy="320040"/>
           </a:xfrm>
           <a:prstGeom prst="rect">
             <a:avLst/>
@@ -2037,423 +2383,102 @@
           <a:bodyPr wrap="square" lIns="0" tIns="0" rIns="0" bIns="0" rtlCol="0" anchor="ctr"/>
           <a:lstStyle/>
           <a:p>
-            <a:pPr algn="ctr" indent="0" marL="0">
-              <a:buNone/>
-            </a:pPr>
-            <a:r>
-              <a:rPr lang="en-US" sz="1450" b="1" dirty="0">
-                <a:solidFill>
-                  <a:srgbClr val="1E262E"/>
+            <a:pPr indent="0" marL="0">
+              <a:buNone/>
+            </a:pPr>
+            <a:r>
+              <a:rPr lang="en-US" sz="1100" dirty="0">
+                <a:solidFill>
+                  <a:srgbClr val="B3302A"/>
+                </a:solidFill>
+                <a:latin typeface="Consolas" pitchFamily="34" charset="0"/>
+                <a:ea typeface="Consolas" pitchFamily="34" charset="-122"/>
+                <a:cs typeface="Consolas" pitchFamily="34" charset="-120"/>
+              </a:rPr>
+              <a:t>06</a:t>
+            </a:r>
+            <a:endParaRPr lang="en-US" sz="1100" dirty="0"/>
+          </a:p>
+        </p:txBody>
+      </p:sp>
+      <p:sp>
+        <p:nvSpPr>
+          <p:cNvPr id="34" name="Text 32"/>
+          <p:cNvSpPr/>
+          <p:nvPr/>
+        </p:nvSpPr>
+        <p:spPr>
+          <a:xfrm>
+            <a:off x="10168890" y="4005072"/>
+            <a:ext cx="1099261" cy="868680"/>
+          </a:xfrm>
+          <a:prstGeom prst="rect">
+            <a:avLst/>
+          </a:prstGeom>
+          <a:noFill/>
+          <a:ln/>
+        </p:spPr>
+        <p:txBody>
+          <a:bodyPr wrap="square" lIns="0" tIns="0" rIns="0" bIns="0" rtlCol="0" anchor="t"/>
+          <a:lstStyle/>
+          <a:p>
+            <a:pPr indent="0" marL="0">
+              <a:lnSpc>
+                <a:spcPct val="96000"/>
+              </a:lnSpc>
+              <a:buNone/>
+            </a:pPr>
+            <a:r>
+              <a:rPr lang="en-US" sz="1300" b="1" dirty="0">
+                <a:solidFill>
+                  <a:srgbClr val="232C33"/>
+                </a:solidFill>
+                <a:latin typeface="Century Schoolbook" pitchFamily="34" charset="0"/>
+                <a:ea typeface="Century Schoolbook" pitchFamily="34" charset="-122"/>
+                <a:cs typeface="Century Schoolbook" pitchFamily="34" charset="-120"/>
+              </a:rPr>
+              <a:t>API GW + S3</a:t>
+            </a:r>
+            <a:endParaRPr lang="en-US" sz="1300" dirty="0"/>
+          </a:p>
+        </p:txBody>
+      </p:sp>
+      <p:sp>
+        <p:nvSpPr>
+          <p:cNvPr id="35" name="Text 33"/>
+          <p:cNvSpPr/>
+          <p:nvPr/>
+        </p:nvSpPr>
+        <p:spPr>
+          <a:xfrm>
+            <a:off x="10168890" y="4864608"/>
+            <a:ext cx="1099261" cy="365760"/>
+          </a:xfrm>
+          <a:prstGeom prst="rect">
+            <a:avLst/>
+          </a:prstGeom>
+          <a:noFill/>
+          <a:ln/>
+        </p:spPr>
+        <p:txBody>
+          <a:bodyPr wrap="square" lIns="0" tIns="0" rIns="0" bIns="0" rtlCol="0" anchor="ctr"/>
+          <a:lstStyle/>
+          <a:p>
+            <a:pPr indent="0" marL="0">
+              <a:buNone/>
+            </a:pPr>
+            <a:r>
+              <a:rPr lang="en-US" sz="900" dirty="0">
+                <a:solidFill>
+                  <a:srgbClr val="5F6B74"/>
                 </a:solidFill>
                 <a:latin typeface="Calibri" pitchFamily="34" charset="0"/>
                 <a:ea typeface="Calibri" pitchFamily="34" charset="-122"/>
                 <a:cs typeface="Calibri" pitchFamily="34" charset="-120"/>
               </a:rPr>
-              <a:t>AWS Lambda</a:t>
-            </a:r>
-            <a:endParaRPr lang="en-US" sz="1450" dirty="0"/>
-          </a:p>
-        </p:txBody>
-      </p:sp>
-      <p:sp>
-        <p:nvSpPr>
-          <p:cNvPr id="20" name="Text 18"/>
-          <p:cNvSpPr/>
-          <p:nvPr/>
-        </p:nvSpPr>
-        <p:spPr>
-          <a:xfrm>
-            <a:off x="9235440" y="4251960"/>
-            <a:ext cx="2286000" cy="411480"/>
-          </a:xfrm>
-          <a:prstGeom prst="rect">
-            <a:avLst/>
-          </a:prstGeom>
-          <a:noFill/>
-          <a:ln/>
-        </p:spPr>
-        <p:txBody>
-          <a:bodyPr wrap="square" lIns="0" tIns="0" rIns="0" bIns="0" rtlCol="0" anchor="t"/>
-          <a:lstStyle/>
-          <a:p>
-            <a:pPr algn="ctr" indent="0" marL="0">
-              <a:buNone/>
-            </a:pPr>
-            <a:r>
-              <a:rPr lang="en-US" sz="1050" dirty="0">
-                <a:solidFill>
-                  <a:srgbClr val="5F6C76"/>
-                </a:solidFill>
-                <a:latin typeface="Calibri" pitchFamily="34" charset="0"/>
-                <a:ea typeface="Calibri" pitchFamily="34" charset="-122"/>
-                <a:cs typeface="Calibri" pitchFamily="34" charset="-120"/>
-              </a:rPr>
-              <a:t>python3.12 ingest</a:t>
-            </a:r>
-            <a:endParaRPr lang="en-US" sz="1050" dirty="0"/>
-          </a:p>
-        </p:txBody>
-      </p:sp>
-      <p:sp>
-        <p:nvSpPr>
-          <p:cNvPr id="21" name="Shape 19"/>
-          <p:cNvSpPr/>
-          <p:nvPr/>
-        </p:nvSpPr>
-        <p:spPr>
-          <a:xfrm>
-            <a:off x="7242048" y="4160520"/>
-            <a:ext cx="1975104" cy="0"/>
-          </a:xfrm>
-          <a:prstGeom prst="line">
-            <a:avLst/>
-          </a:prstGeom>
-          <a:noFill/>
-          <a:ln w="25400">
-            <a:solidFill>
-              <a:srgbClr val="74899A"/>
-            </a:solidFill>
-            <a:prstDash val="solid"/>
-            <a:headEnd type="triangle"/>
-            <a:tailEnd type="oval"/>
-          </a:ln>
-        </p:spPr>
-      </p:sp>
-      <p:sp>
-        <p:nvSpPr>
-          <p:cNvPr id="22" name="Shape 20"/>
-          <p:cNvSpPr/>
-          <p:nvPr/>
-        </p:nvSpPr>
-        <p:spPr>
-          <a:xfrm>
-            <a:off x="4937760" y="3520440"/>
-            <a:ext cx="2286000" cy="1280160"/>
-          </a:xfrm>
-          <a:prstGeom prst="roundRect">
-            <a:avLst>
-              <a:gd name="adj" fmla="val 7143"/>
-            </a:avLst>
-          </a:prstGeom>
-          <a:solidFill>
-            <a:srgbClr val="EEF2F4"/>
-          </a:solidFill>
-          <a:ln w="19050">
-            <a:solidFill>
-              <a:srgbClr val="33454E"/>
-            </a:solidFill>
-            <a:prstDash val="solid"/>
-          </a:ln>
-        </p:spPr>
-      </p:sp>
-      <p:sp>
-        <p:nvSpPr>
-          <p:cNvPr id="23" name="Shape 21"/>
-          <p:cNvSpPr/>
-          <p:nvPr/>
-        </p:nvSpPr>
-        <p:spPr>
-          <a:xfrm>
-            <a:off x="5989320" y="3685032"/>
-            <a:ext cx="182880" cy="182880"/>
-          </a:xfrm>
-          <a:prstGeom prst="ellipse">
-            <a:avLst/>
-          </a:prstGeom>
-          <a:solidFill>
-            <a:srgbClr val="33454E"/>
-          </a:solidFill>
-          <a:ln/>
-        </p:spPr>
-      </p:sp>
-      <p:sp>
-        <p:nvSpPr>
-          <p:cNvPr id="24" name="Text 22"/>
-          <p:cNvSpPr/>
-          <p:nvPr/>
-        </p:nvSpPr>
-        <p:spPr>
-          <a:xfrm>
-            <a:off x="4910328" y="3904488"/>
-            <a:ext cx="2340864" cy="365760"/>
-          </a:xfrm>
-          <a:prstGeom prst="rect">
-            <a:avLst/>
-          </a:prstGeom>
-          <a:noFill/>
-          <a:ln/>
-        </p:spPr>
-        <p:txBody>
-          <a:bodyPr wrap="square" lIns="0" tIns="0" rIns="0" bIns="0" rtlCol="0" anchor="ctr"/>
-          <a:lstStyle/>
-          <a:p>
-            <a:pPr algn="ctr" indent="0" marL="0">
-              <a:buNone/>
-            </a:pPr>
-            <a:r>
-              <a:rPr lang="en-US" sz="1450" b="1" dirty="0">
-                <a:solidFill>
-                  <a:srgbClr val="1E262E"/>
-                </a:solidFill>
-                <a:latin typeface="Calibri" pitchFamily="34" charset="0"/>
-                <a:ea typeface="Calibri" pitchFamily="34" charset="-122"/>
-                <a:cs typeface="Calibri" pitchFamily="34" charset="-120"/>
-              </a:rPr>
-              <a:t>DynamoDB</a:t>
-            </a:r>
-            <a:endParaRPr lang="en-US" sz="1450" dirty="0"/>
-          </a:p>
-        </p:txBody>
-      </p:sp>
-      <p:sp>
-        <p:nvSpPr>
-          <p:cNvPr id="25" name="Text 23"/>
-          <p:cNvSpPr/>
-          <p:nvPr/>
-        </p:nvSpPr>
-        <p:spPr>
-          <a:xfrm>
-            <a:off x="4937760" y="4251960"/>
-            <a:ext cx="2286000" cy="411480"/>
-          </a:xfrm>
-          <a:prstGeom prst="rect">
-            <a:avLst/>
-          </a:prstGeom>
-          <a:noFill/>
-          <a:ln/>
-        </p:spPr>
-        <p:txBody>
-          <a:bodyPr wrap="square" lIns="0" tIns="0" rIns="0" bIns="0" rtlCol="0" anchor="t"/>
-          <a:lstStyle/>
-          <a:p>
-            <a:pPr algn="ctr" indent="0" marL="0">
-              <a:buNone/>
-            </a:pPr>
-            <a:r>
-              <a:rPr lang="en-US" sz="1050" dirty="0">
-                <a:solidFill>
-                  <a:srgbClr val="5F6C76"/>
-                </a:solidFill>
-                <a:latin typeface="Calibri" pitchFamily="34" charset="0"/>
-                <a:ea typeface="Calibri" pitchFamily="34" charset="-122"/>
-                <a:cs typeface="Calibri" pitchFamily="34" charset="-120"/>
-              </a:rPr>
-              <a:t>time-keyed store</a:t>
-            </a:r>
-            <a:endParaRPr lang="en-US" sz="1050" dirty="0"/>
-          </a:p>
-        </p:txBody>
-      </p:sp>
-      <p:sp>
-        <p:nvSpPr>
-          <p:cNvPr id="26" name="Shape 24"/>
-          <p:cNvSpPr/>
-          <p:nvPr/>
-        </p:nvSpPr>
-        <p:spPr>
-          <a:xfrm>
-            <a:off x="2944368" y="4160520"/>
-            <a:ext cx="1975104" cy="0"/>
-          </a:xfrm>
-          <a:prstGeom prst="line">
-            <a:avLst/>
-          </a:prstGeom>
-          <a:noFill/>
-          <a:ln w="25400">
-            <a:solidFill>
-              <a:srgbClr val="74899A"/>
-            </a:solidFill>
-            <a:prstDash val="solid"/>
-            <a:headEnd type="triangle"/>
-            <a:tailEnd type="oval"/>
-          </a:ln>
-        </p:spPr>
-      </p:sp>
-      <p:sp>
-        <p:nvSpPr>
-          <p:cNvPr id="27" name="Shape 25"/>
-          <p:cNvSpPr/>
-          <p:nvPr/>
-        </p:nvSpPr>
-        <p:spPr>
-          <a:xfrm>
-            <a:off x="640080" y="3520440"/>
-            <a:ext cx="2286000" cy="1280160"/>
-          </a:xfrm>
-          <a:prstGeom prst="roundRect">
-            <a:avLst>
-              <a:gd name="adj" fmla="val 7143"/>
-            </a:avLst>
-          </a:prstGeom>
-          <a:solidFill>
-            <a:srgbClr val="EEF2F4"/>
-          </a:solidFill>
-          <a:ln w="19050">
-            <a:solidFill>
-              <a:srgbClr val="4E6773"/>
-            </a:solidFill>
-            <a:prstDash val="solid"/>
-          </a:ln>
-        </p:spPr>
-      </p:sp>
-      <p:sp>
-        <p:nvSpPr>
-          <p:cNvPr id="28" name="Shape 26"/>
-          <p:cNvSpPr/>
-          <p:nvPr/>
-        </p:nvSpPr>
-        <p:spPr>
-          <a:xfrm>
-            <a:off x="1691640" y="3685032"/>
-            <a:ext cx="182880" cy="182880"/>
-          </a:xfrm>
-          <a:prstGeom prst="ellipse">
-            <a:avLst/>
-          </a:prstGeom>
-          <a:solidFill>
-            <a:srgbClr val="4E6773"/>
-          </a:solidFill>
-          <a:ln/>
-        </p:spPr>
-      </p:sp>
-      <p:sp>
-        <p:nvSpPr>
-          <p:cNvPr id="29" name="Text 27"/>
-          <p:cNvSpPr/>
-          <p:nvPr/>
-        </p:nvSpPr>
-        <p:spPr>
-          <a:xfrm>
-            <a:off x="612648" y="3904488"/>
-            <a:ext cx="2340864" cy="365760"/>
-          </a:xfrm>
-          <a:prstGeom prst="rect">
-            <a:avLst/>
-          </a:prstGeom>
-          <a:noFill/>
-          <a:ln/>
-        </p:spPr>
-        <p:txBody>
-          <a:bodyPr wrap="square" lIns="0" tIns="0" rIns="0" bIns="0" rtlCol="0" anchor="ctr"/>
-          <a:lstStyle/>
-          <a:p>
-            <a:pPr algn="ctr" indent="0" marL="0">
-              <a:buNone/>
-            </a:pPr>
-            <a:r>
-              <a:rPr lang="en-US" sz="1450" b="1" dirty="0">
-                <a:solidFill>
-                  <a:srgbClr val="1E262E"/>
-                </a:solidFill>
-                <a:latin typeface="Calibri" pitchFamily="34" charset="0"/>
-                <a:ea typeface="Calibri" pitchFamily="34" charset="-122"/>
-                <a:cs typeface="Calibri" pitchFamily="34" charset="-120"/>
-              </a:rPr>
-              <a:t>API GW + S3</a:t>
-            </a:r>
-            <a:endParaRPr lang="en-US" sz="1450" dirty="0"/>
-          </a:p>
-        </p:txBody>
-      </p:sp>
-      <p:sp>
-        <p:nvSpPr>
-          <p:cNvPr id="30" name="Text 28"/>
-          <p:cNvSpPr/>
-          <p:nvPr/>
-        </p:nvSpPr>
-        <p:spPr>
-          <a:xfrm>
-            <a:off x="640080" y="4251960"/>
-            <a:ext cx="2286000" cy="411480"/>
-          </a:xfrm>
-          <a:prstGeom prst="rect">
-            <a:avLst/>
-          </a:prstGeom>
-          <a:noFill/>
-          <a:ln/>
-        </p:spPr>
-        <p:txBody>
-          <a:bodyPr wrap="square" lIns="0" tIns="0" rIns="0" bIns="0" rtlCol="0" anchor="t"/>
-          <a:lstStyle/>
-          <a:p>
-            <a:pPr algn="ctr" indent="0" marL="0">
-              <a:buNone/>
-            </a:pPr>
-            <a:r>
-              <a:rPr lang="en-US" sz="1050" dirty="0">
-                <a:solidFill>
-                  <a:srgbClr val="5F6C76"/>
-                </a:solidFill>
-                <a:latin typeface="Calibri" pitchFamily="34" charset="0"/>
-                <a:ea typeface="Calibri" pitchFamily="34" charset="-122"/>
-                <a:cs typeface="Calibri" pitchFamily="34" charset="-120"/>
-              </a:rPr>
               <a:t>integrity index</a:t>
             </a:r>
-            <a:endParaRPr lang="en-US" sz="1050" dirty="0"/>
-          </a:p>
-        </p:txBody>
-      </p:sp>
-      <p:sp>
-        <p:nvSpPr>
-          <p:cNvPr id="31" name="Shape 29"/>
-          <p:cNvSpPr/>
-          <p:nvPr/>
-        </p:nvSpPr>
-        <p:spPr>
-          <a:xfrm>
-            <a:off x="10378440" y="3154680"/>
-            <a:ext cx="0" cy="365760"/>
-          </a:xfrm>
-          <a:prstGeom prst="line">
-            <a:avLst/>
-          </a:prstGeom>
-          <a:noFill/>
-          <a:ln w="25400">
-            <a:solidFill>
-              <a:srgbClr val="74899A"/>
-            </a:solidFill>
-            <a:prstDash val="solid"/>
-            <a:tailEnd type="triangle"/>
-          </a:ln>
-        </p:spPr>
-      </p:sp>
-      <p:sp>
-        <p:nvSpPr>
-          <p:cNvPr id="32" name="Text 30"/>
-          <p:cNvSpPr/>
-          <p:nvPr/>
-        </p:nvSpPr>
-        <p:spPr>
-          <a:xfrm>
-            <a:off x="640080" y="5257800"/>
-            <a:ext cx="10972800" cy="731520"/>
-          </a:xfrm>
-          <a:prstGeom prst="rect">
-            <a:avLst/>
-          </a:prstGeom>
-          <a:noFill/>
-          <a:ln/>
-        </p:spPr>
-        <p:txBody>
-          <a:bodyPr wrap="square" rtlCol="0" anchor="ctr"/>
-          <a:lstStyle/>
-          <a:p>
-            <a:pPr algn="ctr" indent="0" marL="0">
-              <a:buNone/>
-            </a:pPr>
-            <a:r>
-              <a:rPr lang="en-US" sz="1500" i="1" dirty="0">
-                <a:solidFill>
-                  <a:srgbClr val="33454E"/>
-                </a:solidFill>
-                <a:latin typeface="Calibri" pitchFamily="34" charset="0"/>
-                <a:ea typeface="Calibri" pitchFamily="34" charset="-122"/>
-                <a:cs typeface="Calibri" pitchFamily="34" charset="-120"/>
-              </a:rPr>
-              <a:t>Every 10-second window becomes one min/max/average per sensor, checked against four thresholds at the fog node; the dashboard folds each span into a 0-100 integrity index.</a:t>
-            </a:r>
-            <a:endParaRPr lang="en-US" sz="1500" dirty="0"/>
+            <a:endParaRPr lang="en-US" sz="900" dirty="0"/>
           </a:p>
         </p:txBody>
       </p:sp>
@@ -2471,7 +2496,7 @@
     <p:bg>
       <p:bgPr>
         <a:solidFill>
-          <a:srgbClr val="FFFFFF"/>
+          <a:srgbClr val="EEF0F1"/>
         </a:solidFill>
       </p:bgPr>
     </p:bg>
@@ -2491,14 +2516,174 @@
       </p:grpSpPr>
       <p:sp>
         <p:nvSpPr>
-          <p:cNvPr id="2" name="Text 0"/>
-          <p:cNvSpPr/>
-          <p:nvPr/>
-        </p:nvSpPr>
-        <p:spPr>
-          <a:xfrm>
-            <a:off x="640080" y="457200"/>
-            <a:ext cx="7315200" cy="640080"/>
+          <p:cNvPr id="2" name="Shape 0"/>
+          <p:cNvSpPr/>
+          <p:nvPr/>
+        </p:nvSpPr>
+        <p:spPr>
+          <a:xfrm>
+            <a:off x="4114800" y="685800"/>
+            <a:ext cx="3959352" cy="0"/>
+          </a:xfrm>
+          <a:prstGeom prst="line">
+            <a:avLst/>
+          </a:prstGeom>
+          <a:noFill/>
+          <a:ln w="9525">
+            <a:solidFill>
+              <a:srgbClr val="5F6B74"/>
+            </a:solidFill>
+            <a:prstDash val="solid"/>
+          </a:ln>
+        </p:spPr>
+      </p:sp>
+      <p:sp>
+        <p:nvSpPr>
+          <p:cNvPr id="3" name="Shape 1"/>
+          <p:cNvSpPr/>
+          <p:nvPr/>
+        </p:nvSpPr>
+        <p:spPr>
+          <a:xfrm>
+            <a:off x="5986120" y="576072"/>
+            <a:ext cx="219456" cy="219456"/>
+          </a:xfrm>
+          <a:prstGeom prst="diamond">
+            <a:avLst/>
+          </a:prstGeom>
+          <a:solidFill>
+            <a:srgbClr val="B3302A"/>
+          </a:solidFill>
+          <a:ln/>
+        </p:spPr>
+      </p:sp>
+      <p:sp>
+        <p:nvSpPr>
+          <p:cNvPr id="4" name="Text 2"/>
+          <p:cNvSpPr/>
+          <p:nvPr/>
+        </p:nvSpPr>
+        <p:spPr>
+          <a:xfrm>
+            <a:off x="777240" y="1143000"/>
+            <a:ext cx="914400" cy="640080"/>
+          </a:xfrm>
+          <a:prstGeom prst="rect">
+            <a:avLst/>
+          </a:prstGeom>
+          <a:noFill/>
+          <a:ln/>
+        </p:spPr>
+        <p:txBody>
+          <a:bodyPr wrap="square" lIns="0" tIns="0" rIns="0" bIns="0" rtlCol="0" anchor="ctr"/>
+          <a:lstStyle/>
+          <a:p>
+            <a:pPr indent="0" marL="0">
+              <a:buNone/>
+            </a:pPr>
+            <a:r>
+              <a:rPr lang="en-US" sz="3000" b="1" dirty="0">
+                <a:solidFill>
+                  <a:srgbClr val="B3302A"/>
+                </a:solidFill>
+                <a:latin typeface="Century Schoolbook" pitchFamily="34" charset="0"/>
+                <a:ea typeface="Century Schoolbook" pitchFamily="34" charset="-122"/>
+                <a:cs typeface="Century Schoolbook" pitchFamily="34" charset="-120"/>
+              </a:rPr>
+              <a:t>02</a:t>
+            </a:r>
+            <a:endParaRPr lang="en-US" sz="3000" dirty="0"/>
+          </a:p>
+        </p:txBody>
+      </p:sp>
+      <p:sp>
+        <p:nvSpPr>
+          <p:cNvPr id="5" name="Text 3"/>
+          <p:cNvSpPr/>
+          <p:nvPr/>
+        </p:nvSpPr>
+        <p:spPr>
+          <a:xfrm>
+            <a:off x="1645920" y="1316736"/>
+            <a:ext cx="9768535" cy="274320"/>
+          </a:xfrm>
+          <a:prstGeom prst="rect">
+            <a:avLst/>
+          </a:prstGeom>
+          <a:noFill/>
+          <a:ln/>
+        </p:spPr>
+        <p:txBody>
+          <a:bodyPr wrap="square" lIns="0" tIns="0" rIns="0" bIns="0" rtlCol="0" anchor="ctr"/>
+          <a:lstStyle/>
+          <a:p>
+            <a:pPr indent="0" marL="0">
+              <a:buNone/>
+            </a:pPr>
+            <a:r>
+              <a:rPr lang="en-US" sz="1100" b="1" spc="200" kern="0" dirty="0">
+                <a:solidFill>
+                  <a:srgbClr val="5F6B74"/>
+                </a:solidFill>
+                <a:latin typeface="Calibri" pitchFamily="34" charset="0"/>
+                <a:ea typeface="Calibri" pitchFamily="34" charset="-122"/>
+                <a:cs typeface="Calibri" pitchFamily="34" charset="-120"/>
+              </a:rPr>
+              <a:t>LIVE DEMO</a:t>
+            </a:r>
+            <a:endParaRPr lang="en-US" sz="1100" dirty="0"/>
+          </a:p>
+        </p:txBody>
+      </p:sp>
+      <p:sp>
+        <p:nvSpPr>
+          <p:cNvPr id="6" name="Text 4"/>
+          <p:cNvSpPr/>
+          <p:nvPr/>
+        </p:nvSpPr>
+        <p:spPr>
+          <a:xfrm>
+            <a:off x="777240" y="1792224"/>
+            <a:ext cx="10637215" cy="640080"/>
+          </a:xfrm>
+          <a:prstGeom prst="rect">
+            <a:avLst/>
+          </a:prstGeom>
+          <a:noFill/>
+          <a:ln/>
+        </p:spPr>
+        <p:txBody>
+          <a:bodyPr wrap="square" lIns="0" tIns="0" rIns="0" bIns="0" rtlCol="0" anchor="ctr"/>
+          <a:lstStyle/>
+          <a:p>
+            <a:pPr indent="0" marL="0">
+              <a:buNone/>
+            </a:pPr>
+            <a:r>
+              <a:rPr lang="en-US" sz="2300" b="1" dirty="0">
+                <a:solidFill>
+                  <a:srgbClr val="232C33"/>
+                </a:solidFill>
+                <a:latin typeface="Century Schoolbook" pitchFamily="34" charset="0"/>
+                <a:ea typeface="Century Schoolbook" pitchFamily="34" charset="-122"/>
+                <a:cs typeface="Century Schoolbook" pitchFamily="34" charset="-120"/>
+              </a:rPr>
+              <a:t>See it running on AWS</a:t>
+            </a:r>
+            <a:endParaRPr lang="en-US" sz="2300" dirty="0"/>
+          </a:p>
+        </p:txBody>
+      </p:sp>
+      <p:sp>
+        <p:nvSpPr>
+          <p:cNvPr id="7" name="Text 5"/>
+          <p:cNvSpPr/>
+          <p:nvPr/>
+        </p:nvSpPr>
+        <p:spPr>
+          <a:xfrm>
+            <a:off x="777240" y="2313432"/>
+            <a:ext cx="10637215" cy="274320"/>
           </a:xfrm>
           <a:prstGeom prst="rect">
             <a:avLst/>
@@ -2514,48 +2699,9 @@
               <a:buNone/>
             </a:pPr>
             <a:r>
-              <a:rPr lang="en-US" sz="3000" b="1" dirty="0">
-                <a:solidFill>
-                  <a:srgbClr val="1E262E"/>
-                </a:solidFill>
-                <a:latin typeface="Bookman Old Style" pitchFamily="34" charset="0"/>
-                <a:ea typeface="Bookman Old Style" pitchFamily="34" charset="-122"/>
-                <a:cs typeface="Bookman Old Style" pitchFamily="34" charset="-120"/>
-              </a:rPr>
-              <a:t>Live Demo</a:t>
-            </a:r>
-            <a:endParaRPr lang="en-US" sz="3000" dirty="0"/>
-          </a:p>
-        </p:txBody>
-      </p:sp>
-      <p:sp>
-        <p:nvSpPr>
-          <p:cNvPr id="3" name="Text 1"/>
-          <p:cNvSpPr/>
-          <p:nvPr/>
-        </p:nvSpPr>
-        <p:spPr>
-          <a:xfrm>
-            <a:off x="658368" y="1143000"/>
-            <a:ext cx="10972800" cy="365760"/>
-          </a:xfrm>
-          <a:prstGeom prst="rect">
-            <a:avLst/>
-          </a:prstGeom>
-          <a:noFill/>
-          <a:ln/>
-        </p:spPr>
-        <p:txBody>
-          <a:bodyPr wrap="square" rtlCol="0" anchor="ctr"/>
-          <a:lstStyle/>
-          <a:p>
-            <a:pPr indent="0" marL="0">
-              <a:buNone/>
-            </a:pPr>
-            <a:r>
-              <a:rPr lang="en-US" sz="1400" dirty="0">
-                <a:solidFill>
-                  <a:srgbClr val="4E6773"/>
+              <a:rPr lang="en-US" sz="1100" dirty="0">
+                <a:solidFill>
+                  <a:srgbClr val="B3302A"/>
                 </a:solidFill>
                 <a:latin typeface="Consolas" pitchFamily="34" charset="0"/>
                 <a:ea typeface="Consolas" pitchFamily="34" charset="-122"/>
@@ -2563,32 +2709,32 @@
               </a:rPr>
               <a:t>bshm-frontend-661886400169.s3.us-east-1.amazonaws.com</a:t>
             </a:r>
-            <a:endParaRPr lang="en-US" sz="1400" dirty="0"/>
-          </a:p>
-        </p:txBody>
-      </p:sp>
-      <p:sp>
-        <p:nvSpPr>
-          <p:cNvPr id="4" name="Shape 2"/>
-          <p:cNvSpPr/>
-          <p:nvPr/>
-        </p:nvSpPr>
-        <p:spPr>
-          <a:xfrm>
-            <a:off x="640080" y="1874520"/>
-            <a:ext cx="3502152" cy="3977640"/>
+            <a:endParaRPr lang="en-US" sz="1100" dirty="0"/>
+          </a:p>
+        </p:txBody>
+      </p:sp>
+      <p:sp>
+        <p:nvSpPr>
+          <p:cNvPr id="8" name="Shape 6"/>
+          <p:cNvSpPr/>
+          <p:nvPr/>
+        </p:nvSpPr>
+        <p:spPr>
+          <a:xfrm>
+            <a:off x="777240" y="2926080"/>
+            <a:ext cx="3301898" cy="3154680"/>
           </a:xfrm>
           <a:prstGeom prst="roundRect">
             <a:avLst>
-              <a:gd name="adj" fmla="val 2611"/>
+              <a:gd name="adj" fmla="val 580"/>
             </a:avLst>
           </a:prstGeom>
           <a:solidFill>
-            <a:srgbClr val="EEF2F4"/>
-          </a:solidFill>
-          <a:ln w="15240">
+            <a:srgbClr val="FFFFFF"/>
+          </a:solidFill>
+          <a:ln w="12700">
             <a:solidFill>
-              <a:srgbClr val="4E6773"/>
+              <a:srgbClr val="E4E6E9"/>
             </a:solidFill>
             <a:prstDash val="solid"/>
           </a:ln>
@@ -2596,34 +2742,14 @@
       </p:sp>
       <p:sp>
         <p:nvSpPr>
-          <p:cNvPr id="5" name="Shape 3"/>
-          <p:cNvSpPr/>
-          <p:nvPr/>
-        </p:nvSpPr>
-        <p:spPr>
-          <a:xfrm>
-            <a:off x="914400" y="2148840"/>
-            <a:ext cx="603504" cy="603504"/>
-          </a:xfrm>
-          <a:prstGeom prst="ellipse">
-            <a:avLst/>
-          </a:prstGeom>
-          <a:solidFill>
-            <a:srgbClr val="33454E"/>
-          </a:solidFill>
-          <a:ln/>
-        </p:spPr>
-      </p:sp>
-      <p:sp>
-        <p:nvSpPr>
-          <p:cNvPr id="6" name="Text 4"/>
-          <p:cNvSpPr/>
-          <p:nvPr/>
-        </p:nvSpPr>
-        <p:spPr>
-          <a:xfrm>
-            <a:off x="914400" y="2148840"/>
-            <a:ext cx="603504" cy="603504"/>
+          <p:cNvPr id="9" name="Text 7"/>
+          <p:cNvSpPr/>
+          <p:nvPr/>
+        </p:nvSpPr>
+        <p:spPr>
+          <a:xfrm>
+            <a:off x="1051560" y="3163824"/>
+            <a:ext cx="1828800" cy="777240"/>
           </a:xfrm>
           <a:prstGeom prst="rect">
             <a:avLst/>
@@ -2635,34 +2761,76 @@
           <a:bodyPr wrap="square" lIns="0" tIns="0" rIns="0" bIns="0" rtlCol="0" anchor="ctr"/>
           <a:lstStyle/>
           <a:p>
-            <a:pPr algn="ctr" indent="0" marL="0">
-              <a:buNone/>
-            </a:pPr>
-            <a:r>
-              <a:rPr lang="en-US" sz="2200" b="1" dirty="0">
-                <a:solidFill>
-                  <a:srgbClr val="FFFFFF"/>
-                </a:solidFill>
-                <a:latin typeface="Bookman Old Style" pitchFamily="34" charset="0"/>
-                <a:ea typeface="Bookman Old Style" pitchFamily="34" charset="-122"/>
-                <a:cs typeface="Bookman Old Style" pitchFamily="34" charset="-120"/>
-              </a:rPr>
-              <a:t>1</a:t>
-            </a:r>
-            <a:endParaRPr lang="en-US" sz="2200" dirty="0"/>
-          </a:p>
-        </p:txBody>
-      </p:sp>
-      <p:sp>
-        <p:nvSpPr>
-          <p:cNvPr id="7" name="Text 5"/>
-          <p:cNvSpPr/>
-          <p:nvPr/>
-        </p:nvSpPr>
-        <p:spPr>
-          <a:xfrm>
-            <a:off x="914400" y="2898648"/>
-            <a:ext cx="2953512" cy="777240"/>
+            <a:pPr indent="0" marL="0">
+              <a:buNone/>
+            </a:pPr>
+            <a:r>
+              <a:rPr lang="en-US" sz="3800" b="1" dirty="0">
+                <a:solidFill>
+                  <a:srgbClr val="B3302A"/>
+                </a:solidFill>
+                <a:latin typeface="Century Schoolbook" pitchFamily="34" charset="0"/>
+                <a:ea typeface="Century Schoolbook" pitchFamily="34" charset="-122"/>
+                <a:cs typeface="Century Schoolbook" pitchFamily="34" charset="-120"/>
+              </a:rPr>
+              <a:t>01</a:t>
+            </a:r>
+            <a:endParaRPr lang="en-US" sz="3800" dirty="0"/>
+          </a:p>
+        </p:txBody>
+      </p:sp>
+      <p:sp>
+        <p:nvSpPr>
+          <p:cNvPr id="10" name="Text 8"/>
+          <p:cNvSpPr/>
+          <p:nvPr/>
+        </p:nvSpPr>
+        <p:spPr>
+          <a:xfrm>
+            <a:off x="1069848" y="3977640"/>
+            <a:ext cx="2753258" cy="868680"/>
+          </a:xfrm>
+          <a:prstGeom prst="rect">
+            <a:avLst/>
+          </a:prstGeom>
+          <a:noFill/>
+          <a:ln/>
+        </p:spPr>
+        <p:txBody>
+          <a:bodyPr wrap="square" lIns="0" tIns="0" rIns="0" bIns="0" rtlCol="0" anchor="t"/>
+          <a:lstStyle/>
+          <a:p>
+            <a:pPr indent="0" marL="0">
+              <a:lnSpc>
+                <a:spcPct val="100000"/>
+              </a:lnSpc>
+              <a:buNone/>
+            </a:pPr>
+            <a:r>
+              <a:rPr lang="en-US" sz="1550" b="1" dirty="0">
+                <a:solidFill>
+                  <a:srgbClr val="232C33"/>
+                </a:solidFill>
+                <a:latin typeface="Century Schoolbook" pitchFamily="34" charset="0"/>
+                <a:ea typeface="Century Schoolbook" pitchFamily="34" charset="-122"/>
+                <a:cs typeface="Century Schoolbook" pitchFamily="34" charset="-120"/>
+              </a:rPr>
+              <a:t>A 0-to-100 integrity index per span</a:t>
+            </a:r>
+            <a:endParaRPr lang="en-US" sz="1550" dirty="0"/>
+          </a:p>
+        </p:txBody>
+      </p:sp>
+      <p:sp>
+        <p:nvSpPr>
+          <p:cNvPr id="11" name="Text 9"/>
+          <p:cNvSpPr/>
+          <p:nvPr/>
+        </p:nvSpPr>
+        <p:spPr>
+          <a:xfrm>
+            <a:off x="1069848" y="4846320"/>
+            <a:ext cx="2753258" cy="1051560"/>
           </a:xfrm>
           <a:prstGeom prst="rect">
             <a:avLst/>
@@ -2675,33 +2843,63 @@
           <a:lstStyle/>
           <a:p>
             <a:pPr indent="0" marL="0">
-              <a:buNone/>
-            </a:pPr>
-            <a:r>
-              <a:rPr lang="en-US" sz="1600" b="1" dirty="0">
-                <a:solidFill>
-                  <a:srgbClr val="1E262E"/>
+              <a:lnSpc>
+                <a:spcPct val="120000"/>
+              </a:lnSpc>
+              <a:buNone/>
+            </a:pPr>
+            <a:r>
+              <a:rPr lang="en-US" sz="1200" dirty="0">
+                <a:solidFill>
+                  <a:srgbClr val="5F6B74"/>
                 </a:solidFill>
                 <a:latin typeface="Calibri" pitchFamily="34" charset="0"/>
                 <a:ea typeface="Calibri" pitchFamily="34" charset="-122"/>
                 <a:cs typeface="Calibri" pitchFamily="34" charset="-120"/>
               </a:rPr>
-              <a:t>A 0-to-100 integrity index per span</a:t>
-            </a:r>
-            <a:endParaRPr lang="en-US" sz="1600" dirty="0"/>
-          </a:p>
-        </p:txBody>
-      </p:sp>
-      <p:sp>
-        <p:nvSpPr>
-          <p:cNvPr id="8" name="Text 6"/>
-          <p:cNvSpPr/>
-          <p:nvPr/>
-        </p:nvSpPr>
-        <p:spPr>
-          <a:xfrm>
-            <a:off x="914400" y="3657600"/>
-            <a:ext cx="2953512" cy="2011680"/>
+              <a:t>The dashboard folds each span's strain average and peak vibration into one structural integrity index, live on read.</a:t>
+            </a:r>
+            <a:endParaRPr lang="en-US" sz="1200" dirty="0"/>
+          </a:p>
+        </p:txBody>
+      </p:sp>
+      <p:sp>
+        <p:nvSpPr>
+          <p:cNvPr id="12" name="Shape 10"/>
+          <p:cNvSpPr/>
+          <p:nvPr/>
+        </p:nvSpPr>
+        <p:spPr>
+          <a:xfrm>
+            <a:off x="4444898" y="2926080"/>
+            <a:ext cx="3301898" cy="3154680"/>
+          </a:xfrm>
+          <a:prstGeom prst="roundRect">
+            <a:avLst>
+              <a:gd name="adj" fmla="val 580"/>
+            </a:avLst>
+          </a:prstGeom>
+          <a:solidFill>
+            <a:srgbClr val="FFFFFF"/>
+          </a:solidFill>
+          <a:ln w="12700">
+            <a:solidFill>
+              <a:srgbClr val="E4E6E9"/>
+            </a:solidFill>
+            <a:prstDash val="solid"/>
+          </a:ln>
+        </p:spPr>
+      </p:sp>
+      <p:sp>
+        <p:nvSpPr>
+          <p:cNvPr id="13" name="Text 11"/>
+          <p:cNvSpPr/>
+          <p:nvPr/>
+        </p:nvSpPr>
+        <p:spPr>
+          <a:xfrm>
+            <a:off x="4719218" y="3163824"/>
+            <a:ext cx="1828800" cy="777240"/>
           </a:xfrm>
           <a:prstGeom prst="rect">
             <a:avLst/>
@@ -2714,48 +2912,129 @@
           <a:lstStyle/>
           <a:p>
             <a:pPr indent="0" marL="0">
+              <a:buNone/>
+            </a:pPr>
+            <a:r>
+              <a:rPr lang="en-US" sz="3800" b="1" dirty="0">
+                <a:solidFill>
+                  <a:srgbClr val="B3302A"/>
+                </a:solidFill>
+                <a:latin typeface="Century Schoolbook" pitchFamily="34" charset="0"/>
+                <a:ea typeface="Century Schoolbook" pitchFamily="34" charset="-122"/>
+                <a:cs typeface="Century Schoolbook" pitchFamily="34" charset="-120"/>
+              </a:rPr>
+              <a:t>02</a:t>
+            </a:r>
+            <a:endParaRPr lang="en-US" sz="3800" dirty="0"/>
+          </a:p>
+        </p:txBody>
+      </p:sp>
+      <p:sp>
+        <p:nvSpPr>
+          <p:cNvPr id="14" name="Text 12"/>
+          <p:cNvSpPr/>
+          <p:nvPr/>
+        </p:nvSpPr>
+        <p:spPr>
+          <a:xfrm>
+            <a:off x="4737506" y="3977640"/>
+            <a:ext cx="2753258" cy="868680"/>
+          </a:xfrm>
+          <a:prstGeom prst="rect">
+            <a:avLst/>
+          </a:prstGeom>
+          <a:noFill/>
+          <a:ln/>
+        </p:spPr>
+        <p:txBody>
+          <a:bodyPr wrap="square" lIns="0" tIns="0" rIns="0" bIns="0" rtlCol="0" anchor="t"/>
+          <a:lstStyle/>
+          <a:p>
+            <a:pPr indent="0" marL="0">
               <a:lnSpc>
-                <a:spcPct val="106000"/>
+                <a:spcPct val="100000"/>
               </a:lnSpc>
               <a:buNone/>
             </a:pPr>
             <a:r>
-              <a:rPr lang="en-US" sz="1250" dirty="0">
-                <a:solidFill>
-                  <a:srgbClr val="5F6C76"/>
+              <a:rPr lang="en-US" sz="1550" b="1" dirty="0">
+                <a:solidFill>
+                  <a:srgbClr val="232C33"/>
+                </a:solidFill>
+                <a:latin typeface="Century Schoolbook" pitchFamily="34" charset="0"/>
+                <a:ea typeface="Century Schoolbook" pitchFamily="34" charset="-122"/>
+                <a:cs typeface="Century Schoolbook" pitchFamily="34" charset="-120"/>
+              </a:rPr>
+              <a:t>Two spans, tracked live</a:t>
+            </a:r>
+            <a:endParaRPr lang="en-US" sz="1550" dirty="0"/>
+          </a:p>
+        </p:txBody>
+      </p:sp>
+      <p:sp>
+        <p:nvSpPr>
+          <p:cNvPr id="15" name="Text 13"/>
+          <p:cNvSpPr/>
+          <p:nvPr/>
+        </p:nvSpPr>
+        <p:spPr>
+          <a:xfrm>
+            <a:off x="4737506" y="4846320"/>
+            <a:ext cx="2753258" cy="1051560"/>
+          </a:xfrm>
+          <a:prstGeom prst="rect">
+            <a:avLst/>
+          </a:prstGeom>
+          <a:noFill/>
+          <a:ln/>
+        </p:spPr>
+        <p:txBody>
+          <a:bodyPr wrap="square" lIns="0" tIns="0" rIns="0" bIns="0" rtlCol="0" anchor="ctr"/>
+          <a:lstStyle/>
+          <a:p>
+            <a:pPr indent="0" marL="0">
+              <a:lnSpc>
+                <a:spcPct val="120000"/>
+              </a:lnSpc>
+              <a:buNone/>
+            </a:pPr>
+            <a:r>
+              <a:rPr lang="en-US" sz="1200" dirty="0">
+                <a:solidFill>
+                  <a:srgbClr val="5F6B74"/>
                 </a:solidFill>
                 <a:latin typeface="Calibri" pitchFamily="34" charset="0"/>
                 <a:ea typeface="Calibri" pitchFamily="34" charset="-122"/>
                 <a:cs typeface="Calibri" pitchFamily="34" charset="-120"/>
               </a:rPr>
-              <a:t>The dashboard folds each span's strain average and peak vibration into one structural integrity index, live on read.</a:t>
-            </a:r>
-            <a:endParaRPr lang="en-US" sz="1250" dirty="0"/>
-          </a:p>
-        </p:txBody>
-      </p:sp>
-      <p:sp>
-        <p:nvSpPr>
-          <p:cNvPr id="9" name="Shape 7"/>
-          <p:cNvSpPr/>
-          <p:nvPr/>
-        </p:nvSpPr>
-        <p:spPr>
-          <a:xfrm>
-            <a:off x="4416552" y="1874520"/>
-            <a:ext cx="3502152" cy="3977640"/>
+              <a:t>Span-A reads 100 percent with no active alerts and Span-B reads 76.8 percent, good and tracking real readings.</a:t>
+            </a:r>
+            <a:endParaRPr lang="en-US" sz="1200" dirty="0"/>
+          </a:p>
+        </p:txBody>
+      </p:sp>
+      <p:sp>
+        <p:nvSpPr>
+          <p:cNvPr id="16" name="Shape 14"/>
+          <p:cNvSpPr/>
+          <p:nvPr/>
+        </p:nvSpPr>
+        <p:spPr>
+          <a:xfrm>
+            <a:off x="8112557" y="2926080"/>
+            <a:ext cx="3301898" cy="3154680"/>
           </a:xfrm>
           <a:prstGeom prst="roundRect">
             <a:avLst>
-              <a:gd name="adj" fmla="val 2611"/>
+              <a:gd name="adj" fmla="val 580"/>
             </a:avLst>
           </a:prstGeom>
           <a:solidFill>
-            <a:srgbClr val="EEF2F4"/>
-          </a:solidFill>
-          <a:ln w="15240">
+            <a:srgbClr val="FFFFFF"/>
+          </a:solidFill>
+          <a:ln w="12700">
             <a:solidFill>
-              <a:srgbClr val="4E6773"/>
+              <a:srgbClr val="E4E6E9"/>
             </a:solidFill>
             <a:prstDash val="solid"/>
           </a:ln>
@@ -2763,34 +3042,14 @@
       </p:sp>
       <p:sp>
         <p:nvSpPr>
-          <p:cNvPr id="10" name="Shape 8"/>
-          <p:cNvSpPr/>
-          <p:nvPr/>
-        </p:nvSpPr>
-        <p:spPr>
-          <a:xfrm>
-            <a:off x="4690872" y="2148840"/>
-            <a:ext cx="603504" cy="603504"/>
-          </a:xfrm>
-          <a:prstGeom prst="ellipse">
-            <a:avLst/>
-          </a:prstGeom>
-          <a:solidFill>
-            <a:srgbClr val="33454E"/>
-          </a:solidFill>
-          <a:ln/>
-        </p:spPr>
-      </p:sp>
-      <p:sp>
-        <p:nvSpPr>
-          <p:cNvPr id="11" name="Text 9"/>
-          <p:cNvSpPr/>
-          <p:nvPr/>
-        </p:nvSpPr>
-        <p:spPr>
-          <a:xfrm>
-            <a:off x="4690872" y="2148840"/>
-            <a:ext cx="603504" cy="603504"/>
+          <p:cNvPr id="17" name="Text 15"/>
+          <p:cNvSpPr/>
+          <p:nvPr/>
+        </p:nvSpPr>
+        <p:spPr>
+          <a:xfrm>
+            <a:off x="8386877" y="3163824"/>
+            <a:ext cx="1828800" cy="777240"/>
           </a:xfrm>
           <a:prstGeom prst="rect">
             <a:avLst/>
@@ -2802,34 +3061,76 @@
           <a:bodyPr wrap="square" lIns="0" tIns="0" rIns="0" bIns="0" rtlCol="0" anchor="ctr"/>
           <a:lstStyle/>
           <a:p>
-            <a:pPr algn="ctr" indent="0" marL="0">
-              <a:buNone/>
-            </a:pPr>
-            <a:r>
-              <a:rPr lang="en-US" sz="2200" b="1" dirty="0">
-                <a:solidFill>
-                  <a:srgbClr val="FFFFFF"/>
-                </a:solidFill>
-                <a:latin typeface="Bookman Old Style" pitchFamily="34" charset="0"/>
-                <a:ea typeface="Bookman Old Style" pitchFamily="34" charset="-122"/>
-                <a:cs typeface="Bookman Old Style" pitchFamily="34" charset="-120"/>
-              </a:rPr>
-              <a:t>2</a:t>
-            </a:r>
-            <a:endParaRPr lang="en-US" sz="2200" dirty="0"/>
-          </a:p>
-        </p:txBody>
-      </p:sp>
-      <p:sp>
-        <p:nvSpPr>
-          <p:cNvPr id="12" name="Text 10"/>
-          <p:cNvSpPr/>
-          <p:nvPr/>
-        </p:nvSpPr>
-        <p:spPr>
-          <a:xfrm>
-            <a:off x="4690872" y="2898648"/>
-            <a:ext cx="2953512" cy="777240"/>
+            <a:pPr indent="0" marL="0">
+              <a:buNone/>
+            </a:pPr>
+            <a:r>
+              <a:rPr lang="en-US" sz="3800" b="1" dirty="0">
+                <a:solidFill>
+                  <a:srgbClr val="B3302A"/>
+                </a:solidFill>
+                <a:latin typeface="Century Schoolbook" pitchFamily="34" charset="0"/>
+                <a:ea typeface="Century Schoolbook" pitchFamily="34" charset="-122"/>
+                <a:cs typeface="Century Schoolbook" pitchFamily="34" charset="-120"/>
+              </a:rPr>
+              <a:t>03</a:t>
+            </a:r>
+            <a:endParaRPr lang="en-US" sz="3800" dirty="0"/>
+          </a:p>
+        </p:txBody>
+      </p:sp>
+      <p:sp>
+        <p:nvSpPr>
+          <p:cNvPr id="18" name="Text 16"/>
+          <p:cNvSpPr/>
+          <p:nvPr/>
+        </p:nvSpPr>
+        <p:spPr>
+          <a:xfrm>
+            <a:off x="8405165" y="3977640"/>
+            <a:ext cx="2753258" cy="868680"/>
+          </a:xfrm>
+          <a:prstGeom prst="rect">
+            <a:avLst/>
+          </a:prstGeom>
+          <a:noFill/>
+          <a:ln/>
+        </p:spPr>
+        <p:txBody>
+          <a:bodyPr wrap="square" lIns="0" tIns="0" rIns="0" bIns="0" rtlCol="0" anchor="t"/>
+          <a:lstStyle/>
+          <a:p>
+            <a:pPr indent="0" marL="0">
+              <a:lnSpc>
+                <a:spcPct val="100000"/>
+              </a:lnSpc>
+              <a:buNone/>
+            </a:pPr>
+            <a:r>
+              <a:rPr lang="en-US" sz="1550" b="1" dirty="0">
+                <a:solidFill>
+                  <a:srgbClr val="232C33"/>
+                </a:solidFill>
+                <a:latin typeface="Century Schoolbook" pitchFamily="34" charset="0"/>
+                <a:ea typeface="Century Schoolbook" pitchFamily="34" charset="-122"/>
+                <a:cs typeface="Century Schoolbook" pitchFamily="34" charset="-120"/>
+              </a:rPr>
+              <a:t>The index reaches zero where an alert fires</a:t>
+            </a:r>
+            <a:endParaRPr lang="en-US" sz="1550" dirty="0"/>
+          </a:p>
+        </p:txBody>
+      </p:sp>
+      <p:sp>
+        <p:nvSpPr>
+          <p:cNvPr id="19" name="Text 17"/>
+          <p:cNvSpPr/>
+          <p:nvPr/>
+        </p:nvSpPr>
+        <p:spPr>
+          <a:xfrm>
+            <a:off x="8405165" y="4846320"/>
+            <a:ext cx="2753258" cy="1051560"/>
           </a:xfrm>
           <a:prstGeom prst="rect">
             <a:avLst/>
@@ -2842,229 +3143,23 @@
           <a:lstStyle/>
           <a:p>
             <a:pPr indent="0" marL="0">
-              <a:buNone/>
-            </a:pPr>
-            <a:r>
-              <a:rPr lang="en-US" sz="1600" b="1" dirty="0">
-                <a:solidFill>
-                  <a:srgbClr val="1E262E"/>
+              <a:lnSpc>
+                <a:spcPct val="120000"/>
+              </a:lnSpc>
+              <a:buNone/>
+            </a:pPr>
+            <a:r>
+              <a:rPr lang="en-US" sz="1200" dirty="0">
+                <a:solidFill>
+                  <a:srgbClr val="5F6B74"/>
                 </a:solidFill>
                 <a:latin typeface="Calibri" pitchFamily="34" charset="0"/>
                 <a:ea typeface="Calibri" pitchFamily="34" charset="-122"/>
                 <a:cs typeface="Calibri" pitchFamily="34" charset="-120"/>
               </a:rPr>
-              <a:t>Two spans, tracked live</a:t>
-            </a:r>
-            <a:endParaRPr lang="en-US" sz="1600" dirty="0"/>
-          </a:p>
-        </p:txBody>
-      </p:sp>
-      <p:sp>
-        <p:nvSpPr>
-          <p:cNvPr id="13" name="Text 11"/>
-          <p:cNvSpPr/>
-          <p:nvPr/>
-        </p:nvSpPr>
-        <p:spPr>
-          <a:xfrm>
-            <a:off x="4690872" y="3657600"/>
-            <a:ext cx="2953512" cy="2011680"/>
-          </a:xfrm>
-          <a:prstGeom prst="rect">
-            <a:avLst/>
-          </a:prstGeom>
-          <a:noFill/>
-          <a:ln/>
-        </p:spPr>
-        <p:txBody>
-          <a:bodyPr wrap="square" lIns="0" tIns="0" rIns="0" bIns="0" rtlCol="0" anchor="ctr"/>
-          <a:lstStyle/>
-          <a:p>
-            <a:pPr indent="0" marL="0">
-              <a:lnSpc>
-                <a:spcPct val="106000"/>
-              </a:lnSpc>
-              <a:buNone/>
-            </a:pPr>
-            <a:r>
-              <a:rPr lang="en-US" sz="1250" dirty="0">
-                <a:solidFill>
-                  <a:srgbClr val="5F6C76"/>
-                </a:solidFill>
-                <a:latin typeface="Calibri" pitchFamily="34" charset="0"/>
-                <a:ea typeface="Calibri" pitchFamily="34" charset="-122"/>
-                <a:cs typeface="Calibri" pitchFamily="34" charset="-120"/>
-              </a:rPr>
-              <a:t>Span-A reads 100 percent with no active alerts and Span-B reads 76.8 percent, good and tracking real readings.</a:t>
-            </a:r>
-            <a:endParaRPr lang="en-US" sz="1250" dirty="0"/>
-          </a:p>
-        </p:txBody>
-      </p:sp>
-      <p:sp>
-        <p:nvSpPr>
-          <p:cNvPr id="14" name="Shape 12"/>
-          <p:cNvSpPr/>
-          <p:nvPr/>
-        </p:nvSpPr>
-        <p:spPr>
-          <a:xfrm>
-            <a:off x="8193024" y="1874520"/>
-            <a:ext cx="3502152" cy="3977640"/>
-          </a:xfrm>
-          <a:prstGeom prst="roundRect">
-            <a:avLst>
-              <a:gd name="adj" fmla="val 2611"/>
-            </a:avLst>
-          </a:prstGeom>
-          <a:solidFill>
-            <a:srgbClr val="EEF2F4"/>
-          </a:solidFill>
-          <a:ln w="15240">
-            <a:solidFill>
-              <a:srgbClr val="4E6773"/>
-            </a:solidFill>
-            <a:prstDash val="solid"/>
-          </a:ln>
-        </p:spPr>
-      </p:sp>
-      <p:sp>
-        <p:nvSpPr>
-          <p:cNvPr id="15" name="Shape 13"/>
-          <p:cNvSpPr/>
-          <p:nvPr/>
-        </p:nvSpPr>
-        <p:spPr>
-          <a:xfrm>
-            <a:off x="8467344" y="2148840"/>
-            <a:ext cx="603504" cy="603504"/>
-          </a:xfrm>
-          <a:prstGeom prst="ellipse">
-            <a:avLst/>
-          </a:prstGeom>
-          <a:solidFill>
-            <a:srgbClr val="33454E"/>
-          </a:solidFill>
-          <a:ln/>
-        </p:spPr>
-      </p:sp>
-      <p:sp>
-        <p:nvSpPr>
-          <p:cNvPr id="16" name="Text 14"/>
-          <p:cNvSpPr/>
-          <p:nvPr/>
-        </p:nvSpPr>
-        <p:spPr>
-          <a:xfrm>
-            <a:off x="8467344" y="2148840"/>
-            <a:ext cx="603504" cy="603504"/>
-          </a:xfrm>
-          <a:prstGeom prst="rect">
-            <a:avLst/>
-          </a:prstGeom>
-          <a:noFill/>
-          <a:ln/>
-        </p:spPr>
-        <p:txBody>
-          <a:bodyPr wrap="square" lIns="0" tIns="0" rIns="0" bIns="0" rtlCol="0" anchor="ctr"/>
-          <a:lstStyle/>
-          <a:p>
-            <a:pPr algn="ctr" indent="0" marL="0">
-              <a:buNone/>
-            </a:pPr>
-            <a:r>
-              <a:rPr lang="en-US" sz="2200" b="1" dirty="0">
-                <a:solidFill>
-                  <a:srgbClr val="FFFFFF"/>
-                </a:solidFill>
-                <a:latin typeface="Bookman Old Style" pitchFamily="34" charset="0"/>
-                <a:ea typeface="Bookman Old Style" pitchFamily="34" charset="-122"/>
-                <a:cs typeface="Bookman Old Style" pitchFamily="34" charset="-120"/>
-              </a:rPr>
-              <a:t>3</a:t>
-            </a:r>
-            <a:endParaRPr lang="en-US" sz="2200" dirty="0"/>
-          </a:p>
-        </p:txBody>
-      </p:sp>
-      <p:sp>
-        <p:nvSpPr>
-          <p:cNvPr id="17" name="Text 15"/>
-          <p:cNvSpPr/>
-          <p:nvPr/>
-        </p:nvSpPr>
-        <p:spPr>
-          <a:xfrm>
-            <a:off x="8467344" y="2898648"/>
-            <a:ext cx="2953512" cy="777240"/>
-          </a:xfrm>
-          <a:prstGeom prst="rect">
-            <a:avLst/>
-          </a:prstGeom>
-          <a:noFill/>
-          <a:ln/>
-        </p:spPr>
-        <p:txBody>
-          <a:bodyPr wrap="square" lIns="0" tIns="0" rIns="0" bIns="0" rtlCol="0" anchor="ctr"/>
-          <a:lstStyle/>
-          <a:p>
-            <a:pPr indent="0" marL="0">
-              <a:buNone/>
-            </a:pPr>
-            <a:r>
-              <a:rPr lang="en-US" sz="1600" b="1" dirty="0">
-                <a:solidFill>
-                  <a:srgbClr val="1E262E"/>
-                </a:solidFill>
-                <a:latin typeface="Calibri" pitchFamily="34" charset="0"/>
-                <a:ea typeface="Calibri" pitchFamily="34" charset="-122"/>
-                <a:cs typeface="Calibri" pitchFamily="34" charset="-120"/>
-              </a:rPr>
-              <a:t>The index reaches zero where an alert fires</a:t>
-            </a:r>
-            <a:endParaRPr lang="en-US" sz="1600" dirty="0"/>
-          </a:p>
-        </p:txBody>
-      </p:sp>
-      <p:sp>
-        <p:nvSpPr>
-          <p:cNvPr id="18" name="Text 16"/>
-          <p:cNvSpPr/>
-          <p:nvPr/>
-        </p:nvSpPr>
-        <p:spPr>
-          <a:xfrm>
-            <a:off x="8467344" y="3657600"/>
-            <a:ext cx="2953512" cy="2011680"/>
-          </a:xfrm>
-          <a:prstGeom prst="rect">
-            <a:avLst/>
-          </a:prstGeom>
-          <a:noFill/>
-          <a:ln/>
-        </p:spPr>
-        <p:txBody>
-          <a:bodyPr wrap="square" lIns="0" tIns="0" rIns="0" bIns="0" rtlCol="0" anchor="ctr"/>
-          <a:lstStyle/>
-          <a:p>
-            <a:pPr indent="0" marL="0">
-              <a:lnSpc>
-                <a:spcPct val="106000"/>
-              </a:lnSpc>
-              <a:buNone/>
-            </a:pPr>
-            <a:r>
-              <a:rPr lang="en-US" sz="1250" dirty="0">
-                <a:solidFill>
-                  <a:srgbClr val="5F6C76"/>
-                </a:solidFill>
-                <a:latin typeface="Calibri" pitchFamily="34" charset="0"/>
-                <a:ea typeface="Calibri" pitchFamily="34" charset="-122"/>
-                <a:cs typeface="Calibri" pitchFamily="34" charset="-120"/>
-              </a:rPr>
               <a:t>Its critical bound equals the alert threshold, so the number and the alarm agree by construction.</a:t>
             </a:r>
-            <a:endParaRPr lang="en-US" sz="1250" dirty="0"/>
+            <a:endParaRPr lang="en-US" sz="1200" dirty="0"/>
           </a:p>
         </p:txBody>
       </p:sp>
@@ -3082,7 +3177,7 @@
     <p:bg>
       <p:bgPr>
         <a:solidFill>
-          <a:srgbClr val="FFFFFF"/>
+          <a:srgbClr val="EEF0F1"/>
         </a:solidFill>
       </p:bgPr>
     </p:bg>
@@ -3102,65 +3197,22 @@
       </p:grpSpPr>
       <p:sp>
         <p:nvSpPr>
-          <p:cNvPr id="2" name="Text 0"/>
-          <p:cNvSpPr/>
-          <p:nvPr/>
-        </p:nvSpPr>
-        <p:spPr>
-          <a:xfrm>
-            <a:off x="640080" y="502920"/>
-            <a:ext cx="10972800" cy="822960"/>
-          </a:xfrm>
-          <a:prstGeom prst="rect">
-            <a:avLst/>
-          </a:prstGeom>
-          <a:noFill/>
-          <a:ln/>
-        </p:spPr>
-        <p:txBody>
-          <a:bodyPr wrap="square" rtlCol="0" anchor="t"/>
-          <a:lstStyle/>
-          <a:p>
-            <a:pPr indent="0" marL="0">
-              <a:buNone/>
-            </a:pPr>
-            <a:r>
-              <a:rPr lang="en-US" sz="2800" b="1" dirty="0">
-                <a:solidFill>
-                  <a:srgbClr val="1E262E"/>
-                </a:solidFill>
-                <a:latin typeface="Bookman Old Style" pitchFamily="34" charset="0"/>
-                <a:ea typeface="Bookman Old Style" pitchFamily="34" charset="-122"/>
-                <a:cs typeface="Bookman Old Style" pitchFamily="34" charset="-120"/>
-              </a:rPr>
-              <a:t>Hardest Part — one risky Terraform apply</a:t>
-            </a:r>
-            <a:endParaRPr lang="en-US" sz="2800" dirty="0"/>
-          </a:p>
-        </p:txBody>
-      </p:sp>
-      <p:sp>
-        <p:nvSpPr>
-          <p:cNvPr id="3" name="Shape 1"/>
-          <p:cNvSpPr/>
-          <p:nvPr/>
-        </p:nvSpPr>
-        <p:spPr>
-          <a:xfrm>
-            <a:off x="640080" y="1874520"/>
-            <a:ext cx="4937760" cy="4160520"/>
-          </a:xfrm>
-          <a:prstGeom prst="roundRect">
-            <a:avLst>
-              <a:gd name="adj" fmla="val 2198"/>
-            </a:avLst>
-          </a:prstGeom>
-          <a:solidFill>
-            <a:srgbClr val="EEF2F4"/>
-          </a:solidFill>
-          <a:ln w="19050">
+          <p:cNvPr id="2" name="Shape 0"/>
+          <p:cNvSpPr/>
+          <p:nvPr/>
+        </p:nvSpPr>
+        <p:spPr>
+          <a:xfrm>
+            <a:off x="4114800" y="685800"/>
+            <a:ext cx="3959352" cy="0"/>
+          </a:xfrm>
+          <a:prstGeom prst="line">
+            <a:avLst/>
+          </a:prstGeom>
+          <a:noFill/>
+          <a:ln w="9525">
             <a:solidFill>
-              <a:srgbClr val="E0A63C"/>
+              <a:srgbClr val="5F6B74"/>
             </a:solidFill>
             <a:prstDash val="solid"/>
           </a:ln>
@@ -3168,14 +3220,34 @@
       </p:sp>
       <p:sp>
         <p:nvSpPr>
+          <p:cNvPr id="3" name="Shape 1"/>
+          <p:cNvSpPr/>
+          <p:nvPr/>
+        </p:nvSpPr>
+        <p:spPr>
+          <a:xfrm>
+            <a:off x="5986120" y="576072"/>
+            <a:ext cx="219456" cy="219456"/>
+          </a:xfrm>
+          <a:prstGeom prst="diamond">
+            <a:avLst/>
+          </a:prstGeom>
+          <a:solidFill>
+            <a:srgbClr val="B3302A"/>
+          </a:solidFill>
+          <a:ln/>
+        </p:spPr>
+      </p:sp>
+      <p:sp>
+        <p:nvSpPr>
           <p:cNvPr id="4" name="Text 2"/>
           <p:cNvSpPr/>
           <p:nvPr/>
         </p:nvSpPr>
         <p:spPr>
           <a:xfrm>
-            <a:off x="960120" y="2103120"/>
-            <a:ext cx="3657600" cy="457200"/>
+            <a:off x="777240" y="1143000"/>
+            <a:ext cx="914400" cy="640080"/>
           </a:xfrm>
           <a:prstGeom prst="rect">
             <a:avLst/>
@@ -3191,17 +3263,17 @@
               <a:buNone/>
             </a:pPr>
             <a:r>
-              <a:rPr lang="en-US" sz="1900" b="1" dirty="0">
-                <a:solidFill>
-                  <a:srgbClr val="E0A63C"/>
-                </a:solidFill>
-                <a:latin typeface="Bookman Old Style" pitchFamily="34" charset="0"/>
-                <a:ea typeface="Bookman Old Style" pitchFamily="34" charset="-122"/>
-                <a:cs typeface="Bookman Old Style" pitchFamily="34" charset="-120"/>
-              </a:rPr>
-              <a:t>Problem</a:t>
-            </a:r>
-            <a:endParaRPr lang="en-US" sz="1900" dirty="0"/>
+              <a:rPr lang="en-US" sz="3000" b="1" dirty="0">
+                <a:solidFill>
+                  <a:srgbClr val="B3302A"/>
+                </a:solidFill>
+                <a:latin typeface="Century Schoolbook" pitchFamily="34" charset="0"/>
+                <a:ea typeface="Century Schoolbook" pitchFamily="34" charset="-122"/>
+                <a:cs typeface="Century Schoolbook" pitchFamily="34" charset="-120"/>
+              </a:rPr>
+              <a:t>03</a:t>
+            </a:r>
+            <a:endParaRPr lang="en-US" sz="3000" dirty="0"/>
           </a:p>
         </p:txBody>
       </p:sp>
@@ -3213,8 +3285,8 @@
         </p:nvSpPr>
         <p:spPr>
           <a:xfrm>
-            <a:off x="960120" y="2651760"/>
-            <a:ext cx="4343400" cy="3200400"/>
+            <a:off x="1645920" y="1316736"/>
+            <a:ext cx="9768535" cy="274320"/>
           </a:xfrm>
           <a:prstGeom prst="rect">
             <a:avLst/>
@@ -3227,48 +3299,84 @@
           <a:lstStyle/>
           <a:p>
             <a:pPr indent="0" marL="0">
-              <a:lnSpc>
-                <a:spcPct val="112000"/>
-              </a:lnSpc>
-              <a:buNone/>
-            </a:pPr>
-            <a:r>
-              <a:rPr lang="en-US" sz="1350" dirty="0">
-                <a:solidFill>
-                  <a:srgbClr val="1E262E"/>
+              <a:buNone/>
+            </a:pPr>
+            <a:r>
+              <a:rPr lang="en-US" sz="1100" b="1" spc="200" kern="0" dirty="0">
+                <a:solidFill>
+                  <a:srgbClr val="5F6B74"/>
                 </a:solidFill>
                 <a:latin typeface="Calibri" pitchFamily="34" charset="0"/>
                 <a:ea typeface="Calibri" pitchFamily="34" charset="-122"/>
                 <a:cs typeface="Calibri" pitchFamily="34" charset="-120"/>
               </a:rPr>
-              <a:t>Every project here deploys through one shared Terraform module, and its local state file already tracked a different live AWS stack under the default workspace. Nothing in my code was wrong — but applied against that workspace, Terraform reconciles state and plans to destroy the other deployment's live resources. The only warning is one line of plan output.</a:t>
-            </a:r>
-            <a:endParaRPr lang="en-US" sz="1350" dirty="0"/>
-          </a:p>
-        </p:txBody>
-      </p:sp>
-      <p:sp>
-        <p:nvSpPr>
-          <p:cNvPr id="6" name="Shape 4"/>
-          <p:cNvSpPr/>
-          <p:nvPr/>
-        </p:nvSpPr>
-        <p:spPr>
-          <a:xfrm>
-            <a:off x="6611112" y="1874520"/>
-            <a:ext cx="4937760" cy="4160520"/>
+              <a:t>CHALLENGE</a:t>
+            </a:r>
+            <a:endParaRPr lang="en-US" sz="1100" dirty="0"/>
+          </a:p>
+        </p:txBody>
+      </p:sp>
+      <p:sp>
+        <p:nvSpPr>
+          <p:cNvPr id="6" name="Text 4"/>
+          <p:cNvSpPr/>
+          <p:nvPr/>
+        </p:nvSpPr>
+        <p:spPr>
+          <a:xfrm>
+            <a:off x="777240" y="1792224"/>
+            <a:ext cx="10637215" cy="640080"/>
+          </a:xfrm>
+          <a:prstGeom prst="rect">
+            <a:avLst/>
+          </a:prstGeom>
+          <a:noFill/>
+          <a:ln/>
+        </p:spPr>
+        <p:txBody>
+          <a:bodyPr wrap="square" lIns="0" tIns="0" rIns="0" bIns="0" rtlCol="0" anchor="ctr"/>
+          <a:lstStyle/>
+          <a:p>
+            <a:pPr indent="0" marL="0">
+              <a:buNone/>
+            </a:pPr>
+            <a:r>
+              <a:rPr lang="en-US" sz="2300" b="1" dirty="0">
+                <a:solidFill>
+                  <a:srgbClr val="232C33"/>
+                </a:solidFill>
+                <a:latin typeface="Century Schoolbook" pitchFamily="34" charset="0"/>
+                <a:ea typeface="Century Schoolbook" pitchFamily="34" charset="-122"/>
+                <a:cs typeface="Century Schoolbook" pitchFamily="34" charset="-120"/>
+              </a:rPr>
+              <a:t>one risky Terraform apply</a:t>
+            </a:r>
+            <a:endParaRPr lang="en-US" sz="2300" dirty="0"/>
+          </a:p>
+        </p:txBody>
+      </p:sp>
+      <p:sp>
+        <p:nvSpPr>
+          <p:cNvPr id="7" name="Shape 5"/>
+          <p:cNvSpPr/>
+          <p:nvPr/>
+        </p:nvSpPr>
+        <p:spPr>
+          <a:xfrm>
+            <a:off x="777240" y="2834640"/>
+            <a:ext cx="5090008" cy="3246120"/>
           </a:xfrm>
           <a:prstGeom prst="roundRect">
             <a:avLst>
-              <a:gd name="adj" fmla="val 2198"/>
+              <a:gd name="adj" fmla="val 563"/>
             </a:avLst>
           </a:prstGeom>
           <a:solidFill>
-            <a:srgbClr val="EEF2F4"/>
-          </a:solidFill>
-          <a:ln w="19050">
+            <a:srgbClr val="FFFFFF"/>
+          </a:solidFill>
+          <a:ln w="12700">
             <a:solidFill>
-              <a:srgbClr val="4E6773"/>
+              <a:srgbClr val="E4E6E9"/>
             </a:solidFill>
             <a:prstDash val="solid"/>
           </a:ln>
@@ -3276,14 +3384,14 @@
       </p:sp>
       <p:sp>
         <p:nvSpPr>
-          <p:cNvPr id="7" name="Text 5"/>
-          <p:cNvSpPr/>
-          <p:nvPr/>
-        </p:nvSpPr>
-        <p:spPr>
-          <a:xfrm>
-            <a:off x="6931152" y="2103120"/>
-            <a:ext cx="3657600" cy="457200"/>
+          <p:cNvPr id="8" name="Text 6"/>
+          <p:cNvSpPr/>
+          <p:nvPr/>
+        </p:nvSpPr>
+        <p:spPr>
+          <a:xfrm>
+            <a:off x="1097280" y="3108960"/>
+            <a:ext cx="4449928" cy="320040"/>
           </a:xfrm>
           <a:prstGeom prst="rect">
             <a:avLst/>
@@ -3299,81 +3407,215 @@
               <a:buNone/>
             </a:pPr>
             <a:r>
-              <a:rPr lang="en-US" sz="1900" b="1" dirty="0">
-                <a:solidFill>
-                  <a:srgbClr val="4E6773"/>
-                </a:solidFill>
-                <a:latin typeface="Bookman Old Style" pitchFamily="34" charset="0"/>
-                <a:ea typeface="Bookman Old Style" pitchFamily="34" charset="-122"/>
-                <a:cs typeface="Bookman Old Style" pitchFamily="34" charset="-120"/>
-              </a:rPr>
-              <a:t>Solution</a:t>
-            </a:r>
-            <a:endParaRPr lang="en-US" sz="1900" dirty="0"/>
-          </a:p>
-        </p:txBody>
-      </p:sp>
-      <p:sp>
-        <p:nvSpPr>
-          <p:cNvPr id="8" name="Text 6"/>
-          <p:cNvSpPr/>
-          <p:nvPr/>
-        </p:nvSpPr>
-        <p:spPr>
-          <a:xfrm>
-            <a:off x="6931152" y="2651760"/>
-            <a:ext cx="4343400" cy="3200400"/>
-          </a:xfrm>
-          <a:prstGeom prst="rect">
-            <a:avLst/>
-          </a:prstGeom>
-          <a:noFill/>
-          <a:ln/>
-        </p:spPr>
-        <p:txBody>
-          <a:bodyPr wrap="square" lIns="0" tIns="0" rIns="0" bIns="0" rtlCol="0" anchor="ctr"/>
-          <a:lstStyle/>
-          <a:p>
-            <a:pPr indent="0" marL="0">
-              <a:lnSpc>
-                <a:spcPct val="112000"/>
-              </a:lnSpc>
-              <a:buNone/>
-            </a:pPr>
-            <a:r>
-              <a:rPr lang="en-US" sz="1350" dirty="0">
-                <a:solidFill>
-                  <a:srgbClr val="1E262E"/>
+              <a:rPr lang="en-US" sz="1200" b="1" spc="200" kern="0" dirty="0">
+                <a:solidFill>
+                  <a:srgbClr val="A66A1F"/>
                 </a:solidFill>
                 <a:latin typeface="Calibri" pitchFamily="34" charset="0"/>
                 <a:ea typeface="Calibri" pitchFamily="34" charset="-122"/>
                 <a:cs typeface="Calibri" pitchFamily="34" charset="-120"/>
               </a:rPr>
+              <a:t>PROBLEM</a:t>
+            </a:r>
+            <a:endParaRPr lang="en-US" sz="1200" dirty="0"/>
+          </a:p>
+        </p:txBody>
+      </p:sp>
+      <p:sp>
+        <p:nvSpPr>
+          <p:cNvPr id="9" name="Shape 7"/>
+          <p:cNvSpPr/>
+          <p:nvPr/>
+        </p:nvSpPr>
+        <p:spPr>
+          <a:xfrm>
+            <a:off x="1097280" y="3493008"/>
+            <a:ext cx="4449928" cy="0"/>
+          </a:xfrm>
+          <a:prstGeom prst="line">
+            <a:avLst/>
+          </a:prstGeom>
+          <a:noFill/>
+          <a:ln w="19050">
+            <a:solidFill>
+              <a:srgbClr val="A66A1F"/>
+            </a:solidFill>
+            <a:prstDash val="solid"/>
+          </a:ln>
+        </p:spPr>
+      </p:sp>
+      <p:sp>
+        <p:nvSpPr>
+          <p:cNvPr id="10" name="Text 8"/>
+          <p:cNvSpPr/>
+          <p:nvPr/>
+        </p:nvSpPr>
+        <p:spPr>
+          <a:xfrm>
+            <a:off x="1097280" y="3657600"/>
+            <a:ext cx="4449928" cy="2240280"/>
+          </a:xfrm>
+          <a:prstGeom prst="rect">
+            <a:avLst/>
+          </a:prstGeom>
+          <a:noFill/>
+          <a:ln/>
+        </p:spPr>
+        <p:txBody>
+          <a:bodyPr wrap="square" lIns="0" tIns="0" rIns="0" bIns="0" rtlCol="0" anchor="t"/>
+          <a:lstStyle/>
+          <a:p>
+            <a:pPr indent="0" marL="0">
+              <a:lnSpc>
+                <a:spcPct val="128000"/>
+              </a:lnSpc>
+              <a:buNone/>
+            </a:pPr>
+            <a:r>
+              <a:rPr lang="en-US" sz="1350" dirty="0">
+                <a:solidFill>
+                  <a:srgbClr val="232C33"/>
+                </a:solidFill>
+                <a:latin typeface="Calibri" pitchFamily="34" charset="0"/>
+                <a:ea typeface="Calibri" pitchFamily="34" charset="-122"/>
+                <a:cs typeface="Calibri" pitchFamily="34" charset="-120"/>
+              </a:rPr>
+              <a:t>Every project here deploys through one shared Terraform module, and its local state file already tracked a different live AWS stack under the default workspace. Nothing in my code was wrong — but applied against that workspace, Terraform reconciles state and plans to destroy the other deployment's live resources. The only warning is one line of plan output.</a:t>
+            </a:r>
+            <a:endParaRPr lang="en-US" sz="1350" dirty="0"/>
+          </a:p>
+        </p:txBody>
+      </p:sp>
+      <p:sp>
+        <p:nvSpPr>
+          <p:cNvPr id="11" name="Shape 9"/>
+          <p:cNvSpPr/>
+          <p:nvPr/>
+        </p:nvSpPr>
+        <p:spPr>
+          <a:xfrm>
+            <a:off x="6324448" y="2834640"/>
+            <a:ext cx="5090008" cy="3246120"/>
+          </a:xfrm>
+          <a:prstGeom prst="roundRect">
+            <a:avLst>
+              <a:gd name="adj" fmla="val 563"/>
+            </a:avLst>
+          </a:prstGeom>
+          <a:solidFill>
+            <a:srgbClr val="FFFFFF"/>
+          </a:solidFill>
+          <a:ln w="12700">
+            <a:solidFill>
+              <a:srgbClr val="E4E6E9"/>
+            </a:solidFill>
+            <a:prstDash val="solid"/>
+          </a:ln>
+        </p:spPr>
+      </p:sp>
+      <p:sp>
+        <p:nvSpPr>
+          <p:cNvPr id="12" name="Text 10"/>
+          <p:cNvSpPr/>
+          <p:nvPr/>
+        </p:nvSpPr>
+        <p:spPr>
+          <a:xfrm>
+            <a:off x="6644488" y="3108960"/>
+            <a:ext cx="4449928" cy="320040"/>
+          </a:xfrm>
+          <a:prstGeom prst="rect">
+            <a:avLst/>
+          </a:prstGeom>
+          <a:noFill/>
+          <a:ln/>
+        </p:spPr>
+        <p:txBody>
+          <a:bodyPr wrap="square" lIns="0" tIns="0" rIns="0" bIns="0" rtlCol="0" anchor="ctr"/>
+          <a:lstStyle/>
+          <a:p>
+            <a:pPr indent="0" marL="0">
+              <a:buNone/>
+            </a:pPr>
+            <a:r>
+              <a:rPr lang="en-US" sz="1200" b="1" spc="200" kern="0" dirty="0">
+                <a:solidFill>
+                  <a:srgbClr val="3D7A5C"/>
+                </a:solidFill>
+                <a:latin typeface="Calibri" pitchFamily="34" charset="0"/>
+                <a:ea typeface="Calibri" pitchFamily="34" charset="-122"/>
+                <a:cs typeface="Calibri" pitchFamily="34" charset="-120"/>
+              </a:rPr>
+              <a:t>SOLUTION</a:t>
+            </a:r>
+            <a:endParaRPr lang="en-US" sz="1200" dirty="0"/>
+          </a:p>
+        </p:txBody>
+      </p:sp>
+      <p:sp>
+        <p:nvSpPr>
+          <p:cNvPr id="13" name="Shape 11"/>
+          <p:cNvSpPr/>
+          <p:nvPr/>
+        </p:nvSpPr>
+        <p:spPr>
+          <a:xfrm>
+            <a:off x="6644488" y="3493008"/>
+            <a:ext cx="4449928" cy="0"/>
+          </a:xfrm>
+          <a:prstGeom prst="line">
+            <a:avLst/>
+          </a:prstGeom>
+          <a:noFill/>
+          <a:ln w="19050">
+            <a:solidFill>
+              <a:srgbClr val="3D7A5C"/>
+            </a:solidFill>
+            <a:prstDash val="solid"/>
+          </a:ln>
+        </p:spPr>
+      </p:sp>
+      <p:sp>
+        <p:nvSpPr>
+          <p:cNvPr id="14" name="Text 12"/>
+          <p:cNvSpPr/>
+          <p:nvPr/>
+        </p:nvSpPr>
+        <p:spPr>
+          <a:xfrm>
+            <a:off x="6644488" y="3657600"/>
+            <a:ext cx="4449928" cy="2240280"/>
+          </a:xfrm>
+          <a:prstGeom prst="rect">
+            <a:avLst/>
+          </a:prstGeom>
+          <a:noFill/>
+          <a:ln/>
+        </p:spPr>
+        <p:txBody>
+          <a:bodyPr wrap="square" lIns="0" tIns="0" rIns="0" bIns="0" rtlCol="0" anchor="t"/>
+          <a:lstStyle/>
+          <a:p>
+            <a:pPr indent="0" marL="0">
+              <a:lnSpc>
+                <a:spcPct val="128000"/>
+              </a:lnSpc>
+              <a:buNone/>
+            </a:pPr>
+            <a:r>
+              <a:rPr lang="en-US" sz="1350" dirty="0">
+                <a:solidFill>
+                  <a:srgbClr val="232C33"/>
+                </a:solidFill>
+                <a:latin typeface="Calibri" pitchFamily="34" charset="0"/>
+                <a:ea typeface="Calibri" pitchFamily="34" charset="-122"/>
+                <a:cs typeface="Calibri" pitchFamily="34" charset="-120"/>
+              </a:rPr>
               <a:t>A dedicated workspace was created first, and the re-plan read "24 to add, 0 to change, 0 to destroy"; then a single apply built all 24 resources, healthy within a minute. Never apply an unread plan. The same pre-deploy audit also caught two silent defects — a pagination undercount and unbatched publishing — both fixed and regression-tested before launch.</a:t>
             </a:r>
             <a:endParaRPr lang="en-US" sz="1350" dirty="0"/>
           </a:p>
         </p:txBody>
-      </p:sp>
-      <p:sp>
-        <p:nvSpPr>
-          <p:cNvPr id="9" name="Shape 7"/>
-          <p:cNvSpPr/>
-          <p:nvPr/>
-        </p:nvSpPr>
-        <p:spPr>
-          <a:xfrm>
-            <a:off x="5669280" y="3703320"/>
-            <a:ext cx="841248" cy="512064"/>
-          </a:xfrm>
-          <a:prstGeom prst="rightArrow">
-            <a:avLst/>
-          </a:prstGeom>
-          <a:solidFill>
-            <a:srgbClr val="33454E"/>
-          </a:solidFill>
-          <a:ln/>
-        </p:spPr>
       </p:sp>
     </p:spTree>
   </p:cSld>
